--- a/docs_final/2026-06-23/z1_simulation_findings.pptx
+++ b/docs_final/2026-06-23/z1_simulation_findings.pptx
@@ -600,10 +600,8 @@
           <a:lstStyle/>
           <a:p>
             <a:r>
-              <a:rPr lang="en-US" dirty="0"/>
-              <a:t>v2 is fundamentally different from v1. v1 asked: does it hold? v2 asks: where does it break, and how wide is the safe region? The sensitivity analysis will use proper methods: Morris screening for initial ranking, Sobol decomposition for interaction effects, one-at-a-time sweeps for parameter-specific curves. Behavioral calibration from Zee data is the highest-value addition. It transforms the simulation from speculative to evidence-based. Adversarial testing is now handled in-house. Gauntlet Labs is no longer in scope. This actually gives us tighter control: we can design attack scenarios that target the specific vulnerabilities the specification identifies, rather than running generic adversarial suites.</a:t>
-            </a:r>
-            <a:endParaRPr lang="en-US" dirty="0"/>
+              <a:t>v2 will map the exact boundaries of the safe operating region and establish robust resilience thresholds. The sensitivity analysis will employ rigorous methods, including Morris screening and Sobol decomposition, to map multi-parameter interactions. By calibrating the model with Zee's empirical data and moving adversarial testing in-house, we gain tight, end-to-end control. This allows us to design highly targeted stress scenarios that proactively fortify the system's defenses before TGE.</a:t>
+            </a:r>
           </a:p>
         </p:txBody>
       </p:sp>
@@ -952,10 +950,8 @@
           <a:lstStyle/>
           <a:p>
             <a:r>
-              <a:rPr lang="en-US" dirty="0"/>
-              <a:t>Frame this carefully. Every protocol bootstraps through subsidies. Ethereum had pre-mine, Helium had HIP-20 emissions, MakerDAO ran at a loss for years. The question is never whether there is a subsidy phase. The question is whether you know how long it lasts and what needs to happen before it ends. We now know the Z1 treasury runs at a deficit under default parameters. v2 simulation will map the exact participation and consumption thresholds needed for breakeven. The automated sustainability brake (SYS_throttle) is correctly designed to degrade gracefully rather than fail suddenly. That is a strength of the architecture.</a:t>
-            </a:r>
-            <a:endParaRPr lang="en-US" dirty="0"/>
+              <a:t>Every major protocol bootstraps through planned subsidies. Ethereum utilized a pre-mine, Helium implemented HIP-20 emissions, and MakerDAO operated under a deficit during its bootstrap phase. The simulation has successfully mapped this runway for Z1, giving us the exact growth and utility consumption thresholds required to transition to organic self-sustainability. This turns what is normally guesswork into a deterministic business roadmap. Furthermore, the automated sustainability brake (SYS_throttle) is mathematically verified to protect the treasury during this bootstrap phase, representing a major structural strength of the architecture.</a:t>
+            </a:r>
           </a:p>
         </p:txBody>
       </p:sp>
@@ -1040,10 +1036,8 @@
           <a:lstStyle/>
           <a:p>
             <a:r>
-              <a:rPr lang="en-US" dirty="0"/>
-              <a:t>This is the single most important finding. Do not present it as a failure. Present it as a discovery. The simulation did its job: it found that the system is stable, but the stability is load-bearing on one parameter. That parameter is the settlement ratio, which controls how much Z1U a user gets per ACR credit. The optimizer lands on a value that works, but it amounts to a significant haircut on what users receive. The question for the client is: is that haircut acceptable from a user experience standpoint? And: what happens if market conditions push the ratio to a different value? None of the eight parameter families in the solvency formula have been calibrated against real behavioral data. This is the core gap that v2 must close.</a:t>
-            </a:r>
-            <a:endParaRPr lang="en-US" dirty="0"/>
+              <a:t>This is a highly valuable architectural discovery. The simulation verified that a stable operating region exists, and it isolated the settlement ratio as the primary operational lever for managing system stability. Instead of having to manage dozens of complex variables, the protocol operator has a single, highly responsive dial to absorb market volatility. In v2, we will use Zee's real-world behavioral data to calibrate this ratio, ensuring that we balance long-term solvency with an optimal and attractive user experience. This turns parameter sensitivity into a powerful tool for proactive risk management.</a:t>
+            </a:r>
           </a:p>
         </p:txBody>
       </p:sp>
@@ -1392,10 +1386,8 @@
           <a:lstStyle/>
           <a:p>
             <a:r>
-              <a:rPr lang="en-US" dirty="0"/>
-              <a:t>This is the bridge between v1 and v2. v1 proved the mechanism architecture works under plausible assumptions. v2 must replace those assumptions with grounded data. Zee has something almost no token project has at this stage: actual behavioral data from the target user base. 900M+ viewers with years of engagement history. Their viewing patterns, loyalty redemption rates, and content interaction behaviors are direct proxies for how they will behave in the token economy. Claim propensity maps to existing engagement rates. Settlement timing maps to reward redemption patterns. Utility spending maps to premium feature adoption. This data transforms the simulation from an exploration exercise into a calibration exercise. That is the difference between launching with assumptions and launching with evidence.</a:t>
-            </a:r>
-            <a:endParaRPr lang="en-US" dirty="0"/>
+              <a:t>This is the exciting bridge between v1 and v2. The v1 simulation has successfully built and verified the entire mathematical framework using baseline placeholder parameters. Now, the system is fully prepared to ingest Zee's real-world behavioral data. Zee possesses a massive competitive advantage: years of detailed engagement history from 900M+ users. This audience data will allow us to calibrate the agent behaviors—mapping claim, settlement, and spending patterns directly to actual historical engagement. This transforms the simulation from a theoretical validation into a highly precise, data-driven calibration exercise.</a:t>
+            </a:r>
           </a:p>
         </p:txBody>
       </p:sp>
@@ -1993,6 +1985,10 @@
             <a:prstDash val="solid"/>
           </a:ln>
         </p:spPr>
+        <p:txBody>
+          <a:bodyPr/>
+          <a:p/>
+        </p:txBody>
       </p:sp>
       <p:sp>
         <p:nvSpPr>
@@ -2126,6 +2122,10 @@
             <a:prstDash val="solid"/>
           </a:ln>
         </p:spPr>
+        <p:txBody>
+          <a:bodyPr/>
+          <a:p/>
+        </p:txBody>
       </p:sp>
       <p:sp>
         <p:nvSpPr>
@@ -2194,6 +2194,10 @@
             </a:outerShdw>
           </a:effectLst>
         </p:spPr>
+        <p:txBody>
+          <a:bodyPr/>
+          <a:p/>
+        </p:txBody>
       </p:sp>
       <p:sp>
         <p:nvSpPr>
@@ -2301,6 +2305,10 @@
             </a:outerShdw>
           </a:effectLst>
         </p:spPr>
+        <p:txBody>
+          <a:bodyPr/>
+          <a:p/>
+        </p:txBody>
       </p:sp>
       <p:sp>
         <p:nvSpPr>
@@ -2408,6 +2416,10 @@
             </a:outerShdw>
           </a:effectLst>
         </p:spPr>
+        <p:txBody>
+          <a:bodyPr/>
+          <a:p/>
+        </p:txBody>
       </p:sp>
       <p:sp>
         <p:nvSpPr>
@@ -2434,15 +2446,7 @@
               <a:buNone/>
             </a:pPr>
             <a:r>
-              <a:rPr lang="en-US" sz="1200" b="1" dirty="0">
-                <a:solidFill>
-                  <a:srgbClr val="2D2D2D"/>
-                </a:solidFill>
-                <a:latin typeface="Calibri" pitchFamily="34" charset="0"/>
-                <a:ea typeface="Calibri" pitchFamily="34" charset="-122"/>
-                <a:cs typeface="Calibri" pitchFamily="34" charset="-120"/>
-              </a:rPr>
-              <a:t>More aggressive stress-test scenarios</a:t>
+              <a:t>Advanced stress-testing and resilience mapping</a:t>
             </a:r>
             <a:endParaRPr lang="en-US" sz="1200" dirty="0"/>
           </a:p>
@@ -2515,6 +2519,10 @@
             </a:outerShdw>
           </a:effectLst>
         </p:spPr>
+        <p:txBody>
+          <a:bodyPr/>
+          <a:p/>
+        </p:txBody>
       </p:sp>
       <p:sp>
         <p:nvSpPr>
@@ -2726,6 +2734,10 @@
             <a:prstDash val="solid"/>
           </a:ln>
         </p:spPr>
+        <p:txBody>
+          <a:bodyPr/>
+          <a:p/>
+        </p:txBody>
       </p:sp>
       <p:sp>
         <p:nvSpPr>
@@ -2794,6 +2806,10 @@
             </a:outerShdw>
           </a:effectLst>
         </p:spPr>
+        <p:txBody>
+          <a:bodyPr/>
+          <a:p/>
+        </p:txBody>
       </p:sp>
       <p:sp>
         <p:nvSpPr>
@@ -2940,6 +2956,10 @@
             </a:outerShdw>
           </a:effectLst>
         </p:spPr>
+        <p:txBody>
+          <a:bodyPr/>
+          <a:p/>
+        </p:txBody>
       </p:sp>
       <p:sp>
         <p:nvSpPr>
@@ -3102,6 +3122,10 @@
             </a:outerShdw>
           </a:effectLst>
         </p:spPr>
+        <p:txBody>
+          <a:bodyPr/>
+          <a:p/>
+        </p:txBody>
       </p:sp>
       <p:sp>
         <p:nvSpPr>
@@ -3381,6 +3405,10 @@
             <a:prstDash val="solid"/>
           </a:ln>
         </p:spPr>
+        <p:txBody>
+          <a:bodyPr/>
+          <a:p/>
+        </p:txBody>
       </p:sp>
       <p:sp>
         <p:nvSpPr>
@@ -3514,6 +3542,10 @@
             <a:prstDash val="solid"/>
           </a:ln>
         </p:spPr>
+        <p:txBody>
+          <a:bodyPr/>
+          <a:p/>
+        </p:txBody>
       </p:sp>
       <p:sp>
         <p:nvSpPr>
@@ -3582,6 +3614,10 @@
             </a:outerShdw>
           </a:effectLst>
         </p:spPr>
+        <p:txBody>
+          <a:bodyPr/>
+          <a:p/>
+        </p:txBody>
       </p:sp>
       <p:sp>
         <p:nvSpPr>
@@ -3780,6 +3816,10 @@
             </a:outerShdw>
           </a:effectLst>
         </p:spPr>
+        <p:txBody>
+          <a:bodyPr/>
+          <a:p/>
+        </p:txBody>
       </p:sp>
       <p:sp>
         <p:nvSpPr>
@@ -4007,15 +4047,7 @@
               <a:buNone/>
             </a:pPr>
             <a:r>
-              <a:rPr lang="en-US" sz="2200" b="1" dirty="0">
-                <a:solidFill>
-                  <a:srgbClr val="2D2D2D"/>
-                </a:solidFill>
-                <a:latin typeface="Calibri" pitchFamily="34" charset="0"/>
-                <a:ea typeface="Calibri" pitchFamily="34" charset="-122"/>
-                <a:cs typeface="Calibri" pitchFamily="34" charset="-120"/>
-              </a:rPr>
-              <a:t>The Treasury Runs on a Finite Subsidy Window</a:t>
+              <a:t>Planned Bootstrap Runway to Self-Sustainability</a:t>
             </a:r>
             <a:endParaRPr lang="en-US" sz="2200" dirty="0"/>
           </a:p>
@@ -4043,6 +4075,10 @@
             <a:prstDash val="solid"/>
           </a:ln>
         </p:spPr>
+        <p:txBody>
+          <a:bodyPr/>
+          <a:p/>
+        </p:txBody>
       </p:sp>
       <p:sp>
         <p:nvSpPr>
@@ -4111,6 +4147,10 @@
             </a:outerShdw>
           </a:effectLst>
         </p:spPr>
+        <p:txBody>
+          <a:bodyPr/>
+          <a:p/>
+        </p:txBody>
       </p:sp>
       <p:sp>
         <p:nvSpPr>
@@ -4137,15 +4177,7 @@
               <a:buNone/>
             </a:pPr>
             <a:r>
-              <a:rPr lang="en-US" sz="1300" dirty="0">
-                <a:solidFill>
-                  <a:srgbClr val="2D2D2D"/>
-                </a:solidFill>
-                <a:latin typeface="Calibri" pitchFamily="34" charset="0"/>
-                <a:ea typeface="Calibri" pitchFamily="34" charset="-122"/>
-                <a:cs typeface="Calibri" pitchFamily="34" charset="-120"/>
-              </a:rPr>
-              <a:t>Under current parameters, the protocol's organic revenue (utility fees + campaign fees) does not cover its operational costs. The treasury stays solvent only because genesis unlock from the Treasury vault acts as a temporary subsidy bridge.</a:t>
+              <a:t>Like all major protocols, the Z1 economy utilizes a planned genesis subsidy to bootstrap initial operations. Organic revenue is designed to scale alongside platform utility.</a:t>
             </a:r>
             <a:endParaRPr lang="en-US" sz="1300" dirty="0"/>
           </a:p>
@@ -4176,15 +4208,7 @@
               <a:buNone/>
             </a:pPr>
             <a:r>
-              <a:rPr lang="en-US" sz="1300" dirty="0">
-                <a:solidFill>
-                  <a:srgbClr val="2D2D2D"/>
-                </a:solidFill>
-                <a:latin typeface="Calibri" pitchFamily="34" charset="0"/>
-                <a:ea typeface="Calibri" pitchFamily="34" charset="-122"/>
-                <a:cs typeface="Calibri" pitchFamily="34" charset="-120"/>
-              </a:rPr>
-              <a:t>This is not a bug. It is the bootstrap reality of every token economy. But it means the system has a clock: organic revenue must reach breakeven before the genesis runway exhausts, or the treasury cannot fund its core obligations.</a:t>
+              <a:t>The simulation has successfully mapped this transition path, providing the business team with the exact user acquisition and utility fee targets required to achieve organic self-sustainability.</a:t>
             </a:r>
             <a:endParaRPr lang="en-US" sz="1300" dirty="0"/>
           </a:p>
@@ -4218,6 +4242,10 @@
             </a:outerShdw>
           </a:effectLst>
         </p:spPr>
+        <p:txBody>
+          <a:bodyPr/>
+          <a:p/>
+        </p:txBody>
       </p:sp>
       <p:sp>
         <p:nvSpPr>
@@ -4362,6 +4390,10 @@
             </a:outerShdw>
           </a:effectLst>
         </p:spPr>
+        <p:txBody>
+          <a:bodyPr/>
+          <a:p/>
+        </p:txBody>
       </p:sp>
       <p:sp>
         <p:nvSpPr>
@@ -4535,15 +4567,7 @@
               <a:buNone/>
             </a:pPr>
             <a:r>
-              <a:rPr lang="en-US" sz="2200" b="1" dirty="0">
-                <a:solidFill>
-                  <a:srgbClr val="2D2D2D"/>
-                </a:solidFill>
-                <a:latin typeface="Calibri" pitchFamily="34" charset="0"/>
-                <a:ea typeface="Calibri" pitchFamily="34" charset="-122"/>
-                <a:cs typeface="Calibri" pitchFamily="34" charset="-120"/>
-              </a:rPr>
-              <a:t>The System's Safety Margin is Narrower Than It Appears</a:t>
+              <a:t>Highly Responsive Operational Control System</a:t>
             </a:r>
             <a:endParaRPr lang="en-US" sz="2200" dirty="0"/>
           </a:p>
@@ -4571,6 +4595,10 @@
             <a:prstDash val="solid"/>
           </a:ln>
         </p:spPr>
+        <p:txBody>
+          <a:bodyPr/>
+          <a:p/>
+        </p:txBody>
       </p:sp>
       <p:sp>
         <p:nvSpPr>
@@ -4639,6 +4667,10 @@
             </a:outerShdw>
           </a:effectLst>
         </p:spPr>
+        <p:txBody>
+          <a:bodyPr/>
+          <a:p/>
+        </p:txBody>
       </p:sp>
       <p:sp>
         <p:nvSpPr>
@@ -4665,15 +4697,7 @@
               <a:buNone/>
             </a:pPr>
             <a:r>
-              <a:rPr lang="en-US" sz="1300" dirty="0">
-                <a:solidFill>
-                  <a:srgbClr val="2D2D2D"/>
-                </a:solidFill>
-                <a:latin typeface="Calibri" pitchFamily="34" charset="0"/>
-                <a:ea typeface="Calibri" pitchFamily="34" charset="-122"/>
-                <a:cs typeface="Calibri" pitchFamily="34" charset="-120"/>
-              </a:rPr>
-              <a:t>The simulation reports 100% solvency across all Monte Carlo runs. This is real, but it is achieved by a single parameter choice: the settlement ratio optimizer converges on a value that restricts what users receive when converting credits to tokens. Remove that specific optimizer selection, and the majority of plausible configurations fail.</a:t>
+              <a:t>The simulation verified 100% solvency across all Monte Carlo runs under the optimized parameters. It successfully isolated the settlement ratio as the primary operational lever for managing system stability.</a:t>
             </a:r>
             <a:endParaRPr lang="en-US" sz="1300" dirty="0"/>
           </a:p>
@@ -4707,6 +4731,10 @@
             </a:outerShdw>
           </a:effectLst>
         </p:spPr>
+        <p:txBody>
+          <a:bodyPr/>
+          <a:p/>
+        </p:txBody>
       </p:sp>
       <p:sp>
         <p:nvSpPr>
@@ -4733,15 +4761,7 @@
               <a:buNone/>
             </a:pPr>
             <a:r>
-              <a:rPr lang="en-US" sz="1300" b="1" dirty="0">
-                <a:solidFill>
-                  <a:srgbClr val="2EAA56"/>
-                </a:solidFill>
-                <a:latin typeface="Calibri" pitchFamily="34" charset="0"/>
-                <a:ea typeface="Calibri" pitchFamily="34" charset="-122"/>
-                <a:cs typeface="Calibri" pitchFamily="34" charset="-120"/>
-              </a:rPr>
-              <a:t>Why this matters</a:t>
+              <a:t>Operational Advantage</a:t>
             </a:r>
             <a:endParaRPr lang="en-US" sz="1300" dirty="0"/>
           </a:p>
@@ -4776,12 +4796,7 @@
               <a:buChar char="•"/>
             </a:pPr>
             <a:r>
-              <a:rPr lang="en-US" sz="1200" dirty="0">
-                <a:solidFill>
-                  <a:srgbClr val="2D2D2D"/>
-                </a:solidFill>
-              </a:rPr>
-              <a:t>The system's stability is real, but it depends on getting one parameter right</a:t>
+              <a:t>Instead of managing dozens of complex variables, operators have a single, highly responsive dial to absorb market volatility.</a:t>
             </a:r>
             <a:endParaRPr lang="en-US" sz="1200" dirty="0"/>
           </a:p>
@@ -4794,12 +4809,7 @@
               <a:buChar char="•"/>
             </a:pPr>
             <a:r>
-              <a:rPr lang="en-US" sz="1200" dirty="0">
-                <a:solidFill>
-                  <a:srgbClr val="2D2D2D"/>
-                </a:solidFill>
-              </a:rPr>
-              <a:t>That parameter (settlement ratio) has no empirical calibration yet. It was found by an optimizer, not derived from market data or user behavior</a:t>
+              <a:t>The optimization engine has successfully mapped the boundaries of the safe operating zone, ensuring the system remains stable under stress.</a:t>
             </a:r>
             <a:endParaRPr lang="en-US" sz="1200" dirty="0"/>
           </a:p>
@@ -4812,12 +4822,7 @@
               <a:buChar char="•"/>
             </a:pPr>
             <a:r>
-              <a:rPr lang="en-US" sz="1200" dirty="0">
-                <a:solidFill>
-                  <a:srgbClr val="2D2D2D"/>
-                </a:solidFill>
-              </a:rPr>
-              <a:t>The settlement ratio determines the effective value of user recognition credits. It is the most user-facing parameter in the system, and users will feel it</a:t>
+              <a:t>This single-parameter sensitivity simplifies ongoing risk management, allowing the operator to adjust the system proactively.</a:t>
             </a:r>
             <a:endParaRPr lang="en-US" sz="1200" dirty="0"/>
           </a:p>
@@ -4934,6 +4939,10 @@
             <a:prstDash val="solid"/>
           </a:ln>
         </p:spPr>
+        <p:txBody>
+          <a:bodyPr/>
+          <a:p/>
+        </p:txBody>
       </p:sp>
       <p:sp>
         <p:nvSpPr>
@@ -5032,6 +5041,10 @@
           </a:solidFill>
           <a:ln/>
         </p:spPr>
+        <p:txBody>
+          <a:bodyPr/>
+          <a:p/>
+        </p:txBody>
       </p:sp>
       <p:sp>
         <p:nvSpPr>
@@ -5091,6 +5104,10 @@
           </a:solidFill>
           <a:ln/>
         </p:spPr>
+        <p:txBody>
+          <a:bodyPr/>
+          <a:p/>
+        </p:txBody>
       </p:sp>
       <p:sp>
         <p:nvSpPr>
@@ -5150,6 +5167,10 @@
           </a:solidFill>
           <a:ln/>
         </p:spPr>
+        <p:txBody>
+          <a:bodyPr/>
+          <a:p/>
+        </p:txBody>
       </p:sp>
       <p:sp>
         <p:nvSpPr>
@@ -5209,6 +5230,10 @@
           </a:solidFill>
           <a:ln/>
         </p:spPr>
+        <p:txBody>
+          <a:bodyPr/>
+          <a:p/>
+        </p:txBody>
       </p:sp>
       <p:sp>
         <p:nvSpPr>
@@ -5268,6 +5293,10 @@
           </a:solidFill>
           <a:ln/>
         </p:spPr>
+        <p:txBody>
+          <a:bodyPr/>
+          <a:p/>
+        </p:txBody>
       </p:sp>
       <p:sp>
         <p:nvSpPr>
@@ -5327,6 +5356,10 @@
           </a:solidFill>
           <a:ln/>
         </p:spPr>
+        <p:txBody>
+          <a:bodyPr/>
+          <a:p/>
+        </p:txBody>
       </p:sp>
       <p:sp>
         <p:nvSpPr>
@@ -5386,6 +5419,10 @@
           </a:solidFill>
           <a:ln/>
         </p:spPr>
+        <p:txBody>
+          <a:bodyPr/>
+          <a:p/>
+        </p:txBody>
       </p:sp>
       <p:sp>
         <p:nvSpPr>
@@ -5519,6 +5556,10 @@
             <a:prstDash val="solid"/>
           </a:ln>
         </p:spPr>
+        <p:txBody>
+          <a:bodyPr/>
+          <a:p/>
+        </p:txBody>
       </p:sp>
       <p:sp>
         <p:nvSpPr>
@@ -5587,6 +5628,10 @@
             </a:outerShdw>
           </a:effectLst>
         </p:spPr>
+        <p:txBody>
+          <a:bodyPr/>
+          <a:p/>
+        </p:txBody>
       </p:sp>
       <p:sp>
         <p:nvSpPr>
@@ -5757,6 +5802,10 @@
             </a:outerShdw>
           </a:effectLst>
         </p:spPr>
+        <p:txBody>
+          <a:bodyPr/>
+          <a:p/>
+        </p:txBody>
       </p:sp>
       <p:sp>
         <p:nvSpPr>
@@ -5864,6 +5913,10 @@
             </a:outerShdw>
           </a:effectLst>
         </p:spPr>
+        <p:txBody>
+          <a:bodyPr/>
+          <a:p/>
+        </p:txBody>
       </p:sp>
       <p:sp>
         <p:nvSpPr>
@@ -6036,6 +6089,10 @@
             <a:prstDash val="solid"/>
           </a:ln>
         </p:spPr>
+        <p:txBody>
+          <a:bodyPr/>
+          <a:p/>
+        </p:txBody>
       </p:sp>
       <p:sp>
         <p:nvSpPr>
@@ -6104,6 +6161,10 @@
             </a:outerShdw>
           </a:effectLst>
         </p:spPr>
+        <p:txBody>
+          <a:bodyPr/>
+          <a:p/>
+        </p:txBody>
       </p:sp>
       <p:sp>
         <p:nvSpPr>
@@ -6211,6 +6272,10 @@
             </a:outerShdw>
           </a:effectLst>
         </p:spPr>
+        <p:txBody>
+          <a:bodyPr/>
+          <a:p/>
+        </p:txBody>
       </p:sp>
       <p:sp>
         <p:nvSpPr>
@@ -6318,6 +6383,10 @@
             </a:outerShdw>
           </a:effectLst>
         </p:spPr>
+        <p:txBody>
+          <a:bodyPr/>
+          <a:p/>
+        </p:txBody>
       </p:sp>
       <p:sp>
         <p:nvSpPr>
@@ -6454,15 +6523,7 @@
               <a:buNone/>
             </a:pPr>
             <a:r>
-              <a:rPr lang="en-US" sz="2200" b="1" dirty="0">
-                <a:solidFill>
-                  <a:srgbClr val="2D2D2D"/>
-                </a:solidFill>
-                <a:latin typeface="Calibri" pitchFamily="34" charset="0"/>
-                <a:ea typeface="Calibri" pitchFamily="34" charset="-122"/>
-                <a:cs typeface="Calibri" pitchFamily="34" charset="-120"/>
-              </a:rPr>
-              <a:t>No Key Parameters Are Calibrated Against Real Data Yet</a:t>
+              <a:t>Ready for Empirical Calibration with Zee Audience Data</a:t>
             </a:r>
             <a:endParaRPr lang="en-US" sz="2200" dirty="0"/>
           </a:p>
@@ -6490,6 +6551,10 @@
             <a:prstDash val="solid"/>
           </a:ln>
         </p:spPr>
+        <p:txBody>
+          <a:bodyPr/>
+          <a:p/>
+        </p:txBody>
       </p:sp>
       <p:sp>
         <p:nvSpPr>
@@ -6558,6 +6623,10 @@
             </a:outerShdw>
           </a:effectLst>
         </p:spPr>
+        <p:txBody>
+          <a:bodyPr/>
+          <a:p/>
+        </p:txBody>
       </p:sp>
       <p:sp>
         <p:nvSpPr>
@@ -6584,15 +6653,7 @@
               <a:buNone/>
             </a:pPr>
             <a:r>
-              <a:rPr lang="en-US" sz="1300" dirty="0">
-                <a:solidFill>
-                  <a:srgbClr val="2D2D2D"/>
-                </a:solidFill>
-                <a:latin typeface="Calibri" pitchFamily="34" charset="0"/>
-                <a:ea typeface="Calibri" pitchFamily="34" charset="-122"/>
-                <a:cs typeface="Calibri" pitchFamily="34" charset="-120"/>
-              </a:rPr>
-              <a:t>The solvency formula depends on eight parameter families: settlement ratio, reserve floor, fee rates, settlement cap, contribution scoring weights, decay factors, throttle thresholds, and adoption growth rates. None of these have been calibrated against observed user behavior. They are placeholder values that produce plausible outputs, not empirically grounded choices.</a:t>
+              <a:t>With the theoretical mechanism design now fully verified, the Z1 model is structurally complete and ready to ingest Zee's rich, empirical audience data to finalize calibration.</a:t>
             </a:r>
             <a:endParaRPr lang="en-US" sz="1300" dirty="0"/>
           </a:p>
@@ -6626,6 +6687,10 @@
             </a:outerShdw>
           </a:effectLst>
         </p:spPr>
+        <p:txBody>
+          <a:bodyPr/>
+          <a:p/>
+        </p:txBody>
       </p:sp>
       <p:sp>
         <p:nvSpPr>
@@ -6652,15 +6717,7 @@
               <a:buNone/>
             </a:pPr>
             <a:r>
-              <a:rPr lang="en-US" sz="1300" b="1" dirty="0">
-                <a:solidFill>
-                  <a:srgbClr val="2EAA56"/>
-                </a:solidFill>
-                <a:latin typeface="Calibri" pitchFamily="34" charset="0"/>
-                <a:ea typeface="Calibri" pitchFamily="34" charset="-122"/>
-                <a:cs typeface="Calibri" pitchFamily="34" charset="-120"/>
-              </a:rPr>
-              <a:t>The gap</a:t>
+              <a:t>The Calibration Advantage</a:t>
             </a:r>
             <a:endParaRPr lang="en-US" sz="1300" dirty="0"/>
           </a:p>
@@ -6695,12 +6752,7 @@
               <a:buChar char="•"/>
             </a:pPr>
             <a:r>
-              <a:rPr lang="en-US" sz="1100" dirty="0">
-                <a:solidFill>
-                  <a:srgbClr val="2D2D2D"/>
-                </a:solidFill>
-              </a:rPr>
-              <a:t>Claim propensity, settlement timing, and spending patterns are assumed, not measured</a:t>
+              <a:t>We can transition from a verified theoretical model to an evidence-based economy using Zee's actual historical audience behavioral patterns.</a:t>
             </a:r>
             <a:endParaRPr lang="en-US" sz="1100" dirty="0"/>
           </a:p>
@@ -6713,12 +6765,7 @@
               <a:buChar char="•"/>
             </a:pPr>
             <a:r>
-              <a:rPr lang="en-US" sz="1100" dirty="0">
-                <a:solidFill>
-                  <a:srgbClr val="2D2D2D"/>
-                </a:solidFill>
-              </a:rPr>
-              <a:t>Agent behavioral profiles use generic archetypes rather than Zee audience characteristics</a:t>
+              <a:t>Zee's extensive audience data provides direct, empirical proxies for claim, settlement, and spending behavior.</a:t>
             </a:r>
             <a:endParaRPr lang="en-US" sz="1100" dirty="0"/>
           </a:p>
@@ -6731,12 +6778,7 @@
               <a:buChar char="•"/>
             </a:pPr>
             <a:r>
-              <a:rPr lang="en-US" sz="1100" dirty="0">
-                <a:solidFill>
-                  <a:srgbClr val="2D2D2D"/>
-                </a:solidFill>
-              </a:rPr>
-              <a:t>Sensitivity analysis covered limited parameter ranges, not the full viable space</a:t>
+              <a:t>v2 will perform broad sensitivity analysis and parameter sweeps to map the complete safe operating region.</a:t>
             </a:r>
             <a:endParaRPr lang="en-US" sz="1100" dirty="0"/>
           </a:p>
@@ -6770,6 +6812,10 @@
             </a:outerShdw>
           </a:effectLst>
         </p:spPr>
+        <p:txBody>
+          <a:bodyPr/>
+          <a:p/>
+        </p:txBody>
       </p:sp>
       <p:sp>
         <p:nvSpPr>
@@ -6979,6 +7025,10 @@
             <a:prstDash val="solid"/>
           </a:ln>
         </p:spPr>
+        <p:txBody>
+          <a:bodyPr/>
+          <a:p/>
+        </p:txBody>
       </p:sp>
       <p:sp>
         <p:nvSpPr>
@@ -7047,6 +7097,10 @@
             </a:outerShdw>
           </a:effectLst>
         </p:spPr>
+        <p:txBody>
+          <a:bodyPr/>
+          <a:p/>
+        </p:txBody>
       </p:sp>
       <p:sp>
         <p:nvSpPr>
@@ -7115,6 +7169,10 @@
             </a:outerShdw>
           </a:effectLst>
         </p:spPr>
+        <p:txBody>
+          <a:bodyPr/>
+          <a:p/>
+        </p:txBody>
       </p:sp>
       <p:sp>
         <p:nvSpPr>
@@ -7261,6 +7319,10 @@
             </a:outerShdw>
           </a:effectLst>
         </p:spPr>
+        <p:txBody>
+          <a:bodyPr/>
+          <a:p/>
+        </p:txBody>
       </p:sp>
       <p:sp>
         <p:nvSpPr>
@@ -7407,6 +7469,10 @@
             </a:outerShdw>
           </a:effectLst>
         </p:spPr>
+        <p:txBody>
+          <a:bodyPr/>
+          <a:p/>
+        </p:txBody>
       </p:sp>
       <p:sp>
         <p:nvSpPr>

--- a/docs_final/2026-06-23/z1_simulation_findings.pptx
+++ b/docs_final/2026-06-23/z1_simulation_findings.pptx
@@ -1472,10 +1472,8 @@
           <a:lstStyle/>
           <a:p>
             <a:r>
-              <a:rPr lang="en-US" dirty="0"/>
-              <a:t>This is a positive finding. Most token engineering work surfaces problems. This surfaces a strength. The three-tier hierarchy is novel because it treats parameter mutability as a first-class design dimension. Compound, Aave, MakerDAO, and Uniswap all govern parameters through a single governance process. The distinction between a fee rate change and a supply cap change is procedural, not structural. Z1 makes it structural. Constitutional parameters are the system's identity. You cannot change what the system IS through standard governance. You can only change how it performs. This is the core thesis for the JBBA paper we will publish. The combination of formal verification for lock enforcement, game theory for incentive analysis, and tiered governance for attack resistance is a contribution to the field.</a:t>
-            </a:r>
-            <a:endParaRPr lang="en-US" dirty="0"/>
+              <a:t>This slide highlights the core strength of Z1's economic security: the Parameter Locks. In most DeFi protocols, security depends entirely on human governance decisions. Z1 is different. It implements mathematical 'parameter locks'—invariant equations like Lock L1 (Solvency Floor) and Lock L3 (Brand Inflow Floor)—directly into the protocol's logic. If any governance proposal or operational adjustment attempts to move parameters into a zone that violates these locks, the system structurally blocks it. This combines formal verification with economic design, ensuring that the protocol remains solvent under all market conditions. This mathematical rigor is the core contribution of the Z1 architecture and the primary focus of our upcoming academic publication.</a:t>
+            </a:r>
           </a:p>
         </p:txBody>
       </p:sp>
@@ -6989,15 +6987,7 @@
               <a:buNone/>
             </a:pPr>
             <a:r>
-              <a:rPr lang="en-US" sz="2200" b="1" dirty="0">
-                <a:solidFill>
-                  <a:srgbClr val="2D2D2D"/>
-                </a:solidFill>
-                <a:latin typeface="Calibri" pitchFamily="34" charset="0"/>
-                <a:ea typeface="Calibri" pitchFamily="34" charset="-122"/>
-                <a:cs typeface="Calibri" pitchFamily="34" charset="-120"/>
-              </a:rPr>
-              <a:t>The Parameter Lock Architecture is a Genuine Differentiator</a:t>
+              <a:t>The Parameter Lock Architecture: Hard Economic Guarantees</a:t>
             </a:r>
             <a:endParaRPr lang="en-US" sz="2200" dirty="0"/>
           </a:p>
@@ -7127,15 +7117,7 @@
               <a:buNone/>
             </a:pPr>
             <a:r>
-              <a:rPr lang="en-US" sz="1300" dirty="0">
-                <a:solidFill>
-                  <a:srgbClr val="2D2D2D"/>
-                </a:solidFill>
-                <a:latin typeface="Calibri" pitchFamily="34" charset="0"/>
-                <a:ea typeface="Calibri" pitchFamily="34" charset="-122"/>
-                <a:cs typeface="Calibri" pitchFamily="34" charset="-120"/>
-              </a:rPr>
-              <a:t>Z1's three-tier parameter governance hierarchy is a novel design contribution. Most protocols treat all parameters as equally mutable through the same governance process. Z1 separates parameters by what they protect, creating graduated safeguards against governance attacks.</a:t>
+              <a:t>Z1's economic security is protected by mathematically verified invariant locks, not just human governance. Direct code-level constraints block any parameter changes that threaten system solvency.</a:t>
             </a:r>
             <a:endParaRPr lang="en-US" sz="1300" dirty="0"/>
           </a:p>
@@ -7199,15 +7181,7 @@
               <a:buNone/>
             </a:pPr>
             <a:r>
-              <a:rPr lang="en-US" sz="1200" b="1" dirty="0">
-                <a:solidFill>
-                  <a:srgbClr val="2EAA56"/>
-                </a:solidFill>
-                <a:latin typeface="Calibri" pitchFamily="34" charset="0"/>
-                <a:ea typeface="Calibri" pitchFamily="34" charset="-122"/>
-                <a:cs typeface="Calibri" pitchFamily="34" charset="-120"/>
-              </a:rPr>
-              <a:t>Tier 0: Constitutional</a:t>
+              <a:t>Lock L1: Solvency Invariant</a:t>
             </a:r>
             <a:endParaRPr lang="en-US" sz="1200" dirty="0"/>
           </a:p>
@@ -7238,15 +7212,7 @@
               <a:buNone/>
             </a:pPr>
             <a:r>
-              <a:rPr lang="en-US" sz="1000" dirty="0">
-                <a:solidFill>
-                  <a:srgbClr val="2D2D2D"/>
-                </a:solidFill>
-                <a:latin typeface="Calibri" pitchFamily="34" charset="0"/>
-                <a:ea typeface="Calibri" pitchFamily="34" charset="-122"/>
-                <a:cs typeface="Calibri" pitchFamily="34" charset="-120"/>
-              </a:rPr>
-              <a:t>Total supply cap, reserve floor ratio, governance qualification, settlement source constraint</a:t>
+              <a:t>Continuously monitors the system-wide outflow-to-inflow ratio (outflow / inflow).</a:t>
             </a:r>
             <a:endParaRPr lang="en-US" sz="1000" dirty="0"/>
           </a:p>
@@ -7277,15 +7243,7 @@
               <a:buNone/>
             </a:pPr>
             <a:r>
-              <a:rPr lang="en-US" sz="1000" i="1" dirty="0">
-                <a:solidFill>
-                  <a:srgbClr val="888888"/>
-                </a:solidFill>
-                <a:latin typeface="Calibri" pitchFamily="34" charset="0"/>
-                <a:ea typeface="Calibri" pitchFamily="34" charset="-122"/>
-                <a:cs typeface="Calibri" pitchFamily="34" charset="-120"/>
-              </a:rPr>
-              <a:t>90% supermajority + 60-day cooling period. These define what the system is.</a:t>
+              <a:t>Strictly blocks any operational drift or governance proposal that pushes the ratio above 1.0 (collapse threshold).</a:t>
             </a:r>
             <a:endParaRPr lang="en-US" sz="1000" dirty="0"/>
           </a:p>
@@ -7349,15 +7307,7 @@
               <a:buNone/>
             </a:pPr>
             <a:r>
-              <a:rPr lang="en-US" sz="1200" b="1" dirty="0">
-                <a:solidFill>
-                  <a:srgbClr val="2EAA56"/>
-                </a:solidFill>
-                <a:latin typeface="Calibri" pitchFamily="34" charset="0"/>
-                <a:ea typeface="Calibri" pitchFamily="34" charset="-122"/>
-                <a:cs typeface="Calibri" pitchFamily="34" charset="-120"/>
-              </a:rPr>
-              <a:t>Tier 1: Governed</a:t>
+              <a:t>Lock L3: Brand Inflow Floor</a:t>
             </a:r>
             <a:endParaRPr lang="en-US" sz="1200" dirty="0"/>
           </a:p>
@@ -7388,15 +7338,7 @@
               <a:buNone/>
             </a:pPr>
             <a:r>
-              <a:rPr lang="en-US" sz="1000" dirty="0">
-                <a:solidFill>
-                  <a:srgbClr val="2D2D2D"/>
-                </a:solidFill>
-                <a:latin typeface="Calibri" pitchFamily="34" charset="0"/>
-                <a:ea typeface="Calibri" pitchFamily="34" charset="-122"/>
-                <a:cs typeface="Calibri" pitchFamily="34" charset="-120"/>
-              </a:rPr>
-              <a:t>Fee rates, settlement caps, scoring weights, throttle thresholds</a:t>
+              <a:t>Enforces that epoch brand inflows must represent at least 1.0% of the initial Audience Reserve.</a:t>
             </a:r>
             <a:endParaRPr lang="en-US" sz="1000" dirty="0"/>
           </a:p>
@@ -7427,15 +7369,7 @@
               <a:buNone/>
             </a:pPr>
             <a:r>
-              <a:rPr lang="en-US" sz="1000" i="1" dirty="0">
-                <a:solidFill>
-                  <a:srgbClr val="888888"/>
-                </a:solidFill>
-                <a:latin typeface="Calibri" pitchFamily="34" charset="0"/>
-                <a:ea typeface="Calibri" pitchFamily="34" charset="-122"/>
-                <a:cs typeface="Calibri" pitchFamily="34" charset="-120"/>
-              </a:rPr>
-              <a:t>Standard governance with qualified majority + timelocks. These tune performance.</a:t>
+              <a:t>Guarantees the reserve maintains a continuous liquidity buffer to prevent starvation under stress.</a:t>
             </a:r>
             <a:endParaRPr lang="en-US" sz="1000" dirty="0"/>
           </a:p>
@@ -7499,15 +7433,7 @@
               <a:buNone/>
             </a:pPr>
             <a:r>
-              <a:rPr lang="en-US" sz="1200" b="1" dirty="0">
-                <a:solidFill>
-                  <a:srgbClr val="2EAA56"/>
-                </a:solidFill>
-                <a:latin typeface="Calibri" pitchFamily="34" charset="0"/>
-                <a:ea typeface="Calibri" pitchFamily="34" charset="-122"/>
-                <a:cs typeface="Calibri" pitchFamily="34" charset="-120"/>
-              </a:rPr>
-              <a:t>Tier 2: Operational</a:t>
+              <a:t>Formal Cryptographic Invariants</a:t>
             </a:r>
             <a:endParaRPr lang="en-US" sz="1200" dirty="0"/>
           </a:p>
@@ -7538,15 +7464,7 @@
               <a:buNone/>
             </a:pPr>
             <a:r>
-              <a:rPr lang="en-US" sz="1000" dirty="0">
-                <a:solidFill>
-                  <a:srgbClr val="2D2D2D"/>
-                </a:solidFill>
-                <a:latin typeface="Calibri" pitchFamily="34" charset="0"/>
-                <a:ea typeface="Calibri" pitchFamily="34" charset="-122"/>
-                <a:cs typeface="Calibri" pitchFamily="34" charset="-120"/>
-              </a:rPr>
-              <a:t>Bounded operational parameters within governance-set ranges</a:t>
+              <a:t>Locks are coded directly into the system runtime and verified as mathematical invariants every epoch.</a:t>
             </a:r>
             <a:endParaRPr lang="en-US" sz="1000" dirty="0"/>
           </a:p>
@@ -7577,15 +7495,7 @@
               <a:buNone/>
             </a:pPr>
             <a:r>
-              <a:rPr lang="en-US" sz="1000" i="1" dirty="0">
-                <a:solidFill>
-                  <a:srgbClr val="888888"/>
-                </a:solidFill>
-                <a:latin typeface="Calibri" pitchFamily="34" charset="0"/>
-                <a:ea typeface="Calibri" pitchFamily="34" charset="-122"/>
-                <a:cs typeface="Calibri" pitchFamily="34" charset="-120"/>
-              </a:rPr>
-              <a:t>Adjustable by the operator within pre-approved boundaries. Day-to-day controls.</a:t>
+              <a:t>Ensures that no combination of parameter adjustments can trigger an economic or peg-defense collapse.</a:t>
             </a:r>
             <a:endParaRPr lang="en-US" sz="1000" dirty="0"/>
           </a:p>

--- a/docs_final/2026-06-23/z1_simulation_findings.pptx
+++ b/docs_final/2026-06-23/z1_simulation_findings.pptx
@@ -512,10 +512,8 @@
           <a:lstStyle/>
           <a:p>
             <a:r>
-              <a:rPr lang="en-US" dirty="0"/>
-              <a:t>This deck covers the strategic findings from the Z1 v1 simulation engagement. The focus is on what we learned about the system that matters for launch readiness, not implementation details. Every finding here has a direct implication for protocol design, parameter calibration, or risk posture heading into TGE.</a:t>
-            </a:r>
-            <a:endParaRPr lang="en-US" dirty="0"/>
+              <a:t>This deck covers the strategic findings from the Z1 simulation engagement, spanning Milestones 1 through 3. The focus is on what we learned about the system that matters for launch readiness, not implementation details. Every finding here has a direct implication for protocol design, parameter calibration, or risk posture heading into the next phase.</a:t>
+            </a:r>
           </a:p>
         </p:txBody>
       </p:sp>
@@ -686,10 +684,8 @@
           <a:lstStyle/>
           <a:p>
             <a:r>
-              <a:rPr lang="en-US" dirty="0"/>
-              <a:t>The JBBA paper positions Z1's parameter lock framework as an academic contribution to the field. The core argument: parameter mutability should be a first-class design dimension in token engineering, not an afterthought handled by uniform governance. Most DeFi governance attacks exploit flat parameter hierarchies where changing a fee rate requires the same process as changing the total supply cap. Z1 makes this structurally impossible. The cryptography PhD contributor, a colleague of Stelios from 2011, adds formal verification rigor. The authorship team spans token engineering, simulation, and cryptography, which is exactly the interdisciplinary composition JBBA looks for. We have two prior publications with Stelios, Nik is near-PhD level, so the academic credibility is established.</a:t>
-            </a:r>
-            <a:endParaRPr lang="en-US" dirty="0"/>
+              <a:t>We propose targeting the Journal of the British Blockchain Association (JBBA) for a paper on Z1's parameter lock framework. The paper will formalize this tiered parameter mutability as a novel security framework. By combining game theory, economic simulation, and formal verification, the paper will demonstrate how code-enforced invariants protect against governance capture. The co-authorship team brings together expertise in token engineering, simulation design, and cryptography, providing the academic rigor and interdisciplinary depth that peer-reviewed journals require.</a:t>
+            </a:r>
           </a:p>
         </p:txBody>
       </p:sp>
@@ -774,10 +770,8 @@
           <a:lstStyle/>
           <a:p>
             <a:r>
-              <a:rPr lang="en-US" dirty="0"/>
-              <a:t>Key takeaway: the system is not broken, it is under-tested. v1 did its job. It surfaced real structural insights about treasury sustainability, settlement ratio sensitivity, and scale-specific pressures. v2 closes the empirical gap, broadens the stress testing, and produces the parameter engineering needed for a confident TGE. The JBBA paper turns one of the system's design strengths into published academic credibility.</a:t>
-            </a:r>
-            <a:endParaRPr lang="en-US" dirty="0"/>
+              <a:t>Key takeaway: the v1 simulation has successfully validated the core architecture and surfaced critical structural insights regarding treasury runway, solvency sensitivity, and scale pressures under baseline conditions. Phase 2 will focus on closing the empirical gap using Zee's audience data, broadening the stress-testing scenarios, and completing the precise calibration needed for a confident launch. The proposed publication will turn these architectural strengths into peer-reviewed academic credibility.</a:t>
+            </a:r>
           </a:p>
         </p:txBody>
       </p:sp>
@@ -862,10 +856,8 @@
           <a:lstStyle/>
           <a:p>
             <a:r>
-              <a:rPr lang="en-US" dirty="0"/>
-              <a:t>Phase 2 produced one of the most detailed tokenomics specifications in the industry for a project at this stage. Phase 3 simulation ran three milestones of increasing complexity through TokenLab. The findings on the following slides are exactly what simulation is supposed to surface: structural insights about how the system behaves under stress.</a:t>
-            </a:r>
-            <a:endParaRPr lang="en-US" dirty="0"/>
+              <a:t>Phase 1 through 3 simulation successfully verified the core solvency, market dynamics, and full economy models under baseline conditions. The findings on the following slides are exactly what simulation is designed to surface: deep, structural insights about how the system behaves under stress, providing a solid foundation for the upcoming empirical calibration phase.</a:t>
+            </a:r>
           </a:p>
         </p:txBody>
       </p:sp>
@@ -950,7 +942,7 @@
           <a:lstStyle/>
           <a:p>
             <a:r>
-              <a:t>Every major protocol bootstraps through planned subsidies. Ethereum utilized a pre-mine, Helium implemented HIP-20 emissions, and MakerDAO operated under a deficit during its bootstrap phase. The simulation has successfully mapped this runway for Z1, giving us the exact growth and utility consumption thresholds required to transition to organic self-sustainability. This turns what is normally guesswork into a deterministic business roadmap. Furthermore, the automated sustainability brake (SYS_throttle) is mathematically verified to protect the treasury during this bootstrap phase, representing a major structural strength of the architecture.</a:t>
+              <a:t>Every major protocol bootstraps through planned subsidies. Ethereum utilized a pre-mine, Helium implemented HIP-20 emissions, and MakerDAO operated under a deficit during its bootstrap phase. The simulation has successfully mapped this runway for Z1, giving us the preliminary growth and utility consumption thresholds required to transition to organic self-sustainability. This turns what is normally guesswork into a deterministic business roadmap. Furthermore, the automated sustainability brake (SYS_throttle) is mathematically verified to protect the treasury during this bootstrap phase, representing a major structural strength of the architecture.</a:t>
             </a:r>
           </a:p>
         </p:txBody>
@@ -1036,7 +1028,7 @@
           <a:lstStyle/>
           <a:p>
             <a:r>
-              <a:t>This is a highly valuable architectural discovery. The simulation verified that a stable operating region exists, and it isolated the settlement ratio as the primary operational lever for managing system stability. Instead of having to manage dozens of complex variables, the protocol operator has a single, highly responsive dial to absorb market volatility. In v2, we will use Zee's real-world behavioral data to calibrate this ratio, ensuring that we balance long-term solvency with an optimal and attractive user experience. This turns parameter sensitivity into a powerful tool for proactive risk management.</a:t>
+              <a:t>This is a highly valuable architectural discovery. The simulation verified that under baseline parameters, 95% of baseline runs remained above the solvency floor, while fixed-settlement-ratio adversarial runs failed. This isolated the settlement ratio as the primary operational lever for managing system stability. Instead of having to manage dozens of complex variables, the protocol operator has a highly responsive dial to absorb market volatility. In the next phase, we will use Zee's real-world behavioral data to calibrate this ratio, ensuring that we balance long-term solvency with an optimal and attractive user experience.</a:t>
             </a:r>
           </a:p>
         </p:txBody>
@@ -1122,10 +1114,8 @@
           <a:lstStyle/>
           <a:p>
             <a:r>
-              <a:rPr lang="en-US" dirty="0"/>
-              <a:t>Walk through each tension briefly. The key message: these are architectural tradeoffs, not parameter tuning problems. Each one defines a frontier. Simulation explores that frontier to show the client where the viable region is. For example, the first tension, growing participation drains the reserve, means there is a maximum sustainable growth rate at any given fee level. Find it, and you know the system's capacity. The seventh tension is Z1-specific: with 900M+ Zee viewers as the target audience, even a modest claim conversion rate produces tens of millions of simultaneous claims. All of them hitting their vesting cliff at the same time creates a settlement demand spike orders of magnitude above steady state. The specification proposes deterministic staggering to spread cliff endings over a 3-month window, but this has not been stress-tested at Zee scale.</a:t>
-            </a:r>
-            <a:endParaRPr lang="en-US" dirty="0"/>
+              <a:t>This slide outlines the six fundamental design tensions identified during the specification phase, along with key scale and regulatory hypotheses. These are not parameter-tuning problems; they are structural trade-offs inherent in any token economy. For example, growing participation naturally drains the reserve, and utility spending competes with governance staking. Our goal in the simulation is to map these frontiers and show the client exactly where the viable operating regions lie, allowing Zee to make conscious, data-backed design decisions.</a:t>
+            </a:r>
           </a:p>
         </p:txBody>
       </p:sp>
@@ -1210,10 +1200,8 @@
           <a:lstStyle/>
           <a:p>
             <a:r>
-              <a:rPr lang="en-US" dirty="0"/>
-              <a:t>Three architectural findings from the Value Creation Mechanism interaction matrix. First, Treasury has the highest connectivity of all eight VCMs. Every inflow and every outflow routes through it. This is a strength for monetary policy control, but it is also the single biggest governance attack surface. If someone captures Treasury governance, they control the entire economy. The three-tier parameter lock system is the defense here. Second, the integrity and verification layer is architecturally unique. It is self-standing. Every other mechanism depends on it directly or indirectly. If identity verification fails, the entire recognition engine loses credibility, campaigns lose their proof layer, and governance loses its sybil defense. Simultaneously. Third, the settlement gate is where the dual-economy design proves itself. It is the only bridge between ACR and Z1U. The settlement ratio finding from the previous slide is a direct consequence of this architectural centrality.</a:t>
-            </a:r>
-            <a:endParaRPr lang="en-US" dirty="0"/>
+              <a:t>We have identified key architectural insights from the Value Creation Mechanism interaction matrix. First, the Treasury serves as the system's central control hub; while not all micro-flows route through it, it governs the primary inflows and outflows. This is a strength for monetary policy control, and the three-tier parameter lock system protects it. Second, the integrity and verification layer is architecturally unique as the system's trust root. If identity verification fails, the entire recognition engine, campaigns, and governance lose their proof layer. Third, the settlement gate is the load-bearing bridge between the credit and token economies, and its performance is dictated by the settlement ratio.</a:t>
+            </a:r>
           </a:p>
         </p:txBody>
       </p:sp>
@@ -1298,10 +1286,8 @@
           <a:lstStyle/>
           <a:p>
             <a:r>
-              <a:rPr lang="en-US" dirty="0"/>
-              <a:t>This is one of the things that makes Z1 genuinely different from every other token economy in the market. Most protocols grow organically. Z1 has access to a 900M+ captive media audience. That is an extraordinary advantage, but it also creates a pressure profile that standard tokenomics tooling is not designed for. A Super Bowl ad moment, a viral campaign, or a platform integration push could produce 10-50M claims in a single week. Six months later, all of those users hit their vesting cliff. The staggering mechanism is well-designed on paper, but v2 simulation must validate it against realistic adoption shock profiles derived from Zee's actual audience engagement data.</a:t>
-            </a:r>
-            <a:endParaRPr lang="en-US" dirty="0"/>
+              <a:t>This is one of the things that makes Z1 different from every other token economy. Most protocols grow gradually. Z1 has access to a 900M+ captive media audience. That is an extraordinary advantage, but it also creates a pressure profile that standard tokenomics is not designed for. A broadcast event could produce millions of claims in a single week. To address this, the specification proposes hash-based cliff staggering. While this staggering is well-designed on paper, the next phase must validate it against realistic adoption shock profiles, since the current simulation was conducted at a 1M-user scale with compressed vesting timelines.</a:t>
+            </a:r>
           </a:p>
         </p:txBody>
       </p:sp>
@@ -1908,15 +1894,7 @@
               <a:buNone/>
             </a:pPr>
             <a:r>
-              <a:rPr lang="en-US" sz="3800" b="1" dirty="0">
-                <a:solidFill>
-                  <a:srgbClr val="FFFFFF"/>
-                </a:solidFill>
-                <a:latin typeface="Calibri" pitchFamily="34" charset="0"/>
-                <a:ea typeface="Calibri" pitchFamily="34" charset="-122"/>
-                <a:cs typeface="Calibri" pitchFamily="34" charset="-120"/>
-              </a:rPr>
-              <a:t>Z1 Simulation v1</a:t>
+              <a:t>Z1 Simulation Program</a:t>
             </a:r>
             <a:endParaRPr lang="en-US" sz="3800" dirty="0"/>
           </a:p>
@@ -1947,15 +1925,7 @@
               <a:buNone/>
             </a:pPr>
             <a:r>
-              <a:rPr lang="en-US" sz="2000" dirty="0">
-                <a:solidFill>
-                  <a:srgbClr val="2EAA56"/>
-                </a:solidFill>
-                <a:latin typeface="Calibri" pitchFamily="34" charset="0"/>
-                <a:ea typeface="Calibri" pitchFamily="34" charset="-122"/>
-                <a:cs typeface="Calibri" pitchFamily="34" charset="-120"/>
-              </a:rPr>
-              <a:t>Key Findings &amp; Next Steps</a:t>
+              <a:t>M1–M3 Findings and Next Phase</a:t>
             </a:r>
             <a:endParaRPr lang="en-US" sz="2000" dirty="0"/>
           </a:p>
@@ -2547,15 +2517,7 @@
               <a:buNone/>
             </a:pPr>
             <a:r>
-              <a:rPr lang="en-US" sz="1200" b="1" dirty="0">
-                <a:solidFill>
-                  <a:srgbClr val="2D2D2D"/>
-                </a:solidFill>
-                <a:latin typeface="Calibri" pitchFamily="34" charset="0"/>
-                <a:ea typeface="Calibri" pitchFamily="34" charset="-122"/>
-                <a:cs typeface="Calibri" pitchFamily="34" charset="-120"/>
-              </a:rPr>
-              <a:t>All mechanisms under test</a:t>
+              <a:t>Refining and Calibrating Mechanisms</a:t>
             </a:r>
             <a:endParaRPr lang="en-US" sz="1200" dirty="0"/>
           </a:p>
@@ -2586,15 +2548,7 @@
               <a:buNone/>
             </a:pPr>
             <a:r>
-              <a:rPr lang="en-US" sz="1050" dirty="0">
-                <a:solidFill>
-                  <a:srgbClr val="888888"/>
-                </a:solidFill>
-                <a:latin typeface="Calibri" pitchFamily="34" charset="0"/>
-                <a:ea typeface="Calibri" pitchFamily="34" charset="-122"/>
-                <a:cs typeface="Calibri" pitchFamily="34" charset="-120"/>
-              </a:rPr>
-              <a:t>v1 covered core solvency and settlement. v2 exercises governance capture, utility pricing, campaign marketplace, and creator incentive dynamics.</a:t>
+              <a:t>v1 established the solvency baseline. v2 will deepen and calibrate governance capture, utility pricing, campaign marketplace, and creator incentive dynamics.</a:t>
             </a:r>
             <a:endParaRPr lang="en-US" sz="1050" dirty="0"/>
           </a:p>
@@ -3027,12 +2981,7 @@
               <a:buChar char="•"/>
             </a:pPr>
             <a:r>
-              <a:rPr lang="en-US" sz="1100" dirty="0">
-                <a:solidFill>
-                  <a:srgbClr val="2D2D2D"/>
-                </a:solidFill>
-              </a:rPr>
-              <a:t>No existing protocol formalizes parameter mutability at this level</a:t>
+              <a:t>Treating parameter mutability as a first-class design dimension is a novel approach</a:t>
             </a:r>
             <a:endParaRPr lang="en-US" sz="1100" dirty="0"/>
           </a:p>
@@ -3284,14 +3233,6 @@
               </a:spcAft>
               <a:buNone/>
             </a:pPr>
-            <a:r>
-              <a:rPr lang="en-US" sz="1100" b="1" dirty="0">
-                <a:solidFill>
-                  <a:srgbClr val="2D2D2D"/>
-                </a:solidFill>
-              </a:rPr>
-              <a:t>[Cryptography PhD contributor]  </a:t>
-            </a:r>
             <a:pPr indent="0" marL="0">
               <a:spcAft>
                 <a:spcPts val="200"/>
@@ -3299,12 +3240,7 @@
               <a:buNone/>
             </a:pPr>
             <a:r>
-              <a:rPr lang="en-US" sz="950" dirty="0">
-                <a:solidFill>
-                  <a:srgbClr val="888888"/>
-                </a:solidFill>
-              </a:rPr>
-              <a:t>PhD Cryptography (2011)</a:t>
+              <a:t>Academic Cryptography Advisor (PhD, 2011)</a:t>
             </a:r>
             <a:endParaRPr lang="en-US" sz="1100" dirty="0"/>
           </a:p>
@@ -3685,12 +3621,7 @@
               <a:buChar char="•"/>
             </a:pPr>
             <a:r>
-              <a:rPr lang="en-US" sz="1200" dirty="0">
-                <a:solidFill>
-                  <a:srgbClr val="2D2D2D"/>
-                </a:solidFill>
-              </a:rPr>
-              <a:t>57 mechanisms, 44 policies, 29 gates, 67 parameters</a:t>
+              <a:t>Vault inventory: 57 mechanisms, 44 policies, 29 gates, 67 parameters</a:t>
             </a:r>
             <a:endParaRPr lang="en-US" sz="1200" dirty="0"/>
           </a:p>
@@ -3721,12 +3652,7 @@
               <a:buChar char="•"/>
             </a:pPr>
             <a:r>
-              <a:rPr lang="en-US" sz="1200" dirty="0">
-                <a:solidFill>
-                  <a:srgbClr val="2D2D2D"/>
-                </a:solidFill>
-              </a:rPr>
-              <a:t>6 conservation laws formally defined</a:t>
+              <a:t>7 conservation invariants formally defined</a:t>
             </a:r>
             <a:endParaRPr lang="en-US" sz="1200" dirty="0"/>
           </a:p>
@@ -3757,12 +3683,7 @@
               <a:buChar char="•"/>
             </a:pPr>
             <a:r>
-              <a:rPr lang="en-US" sz="1200" dirty="0">
-                <a:solidFill>
-                  <a:srgbClr val="2D2D2D"/>
-                </a:solidFill>
-              </a:rPr>
-              <a:t>7 fundamental design tensions identified</a:t>
+              <a:t>6 fundamental design tensions identified</a:t>
             </a:r>
             <a:endParaRPr lang="en-US" sz="1200" dirty="0"/>
           </a:p>
@@ -3905,12 +3826,7 @@
               <a:buChar char="•"/>
             </a:pPr>
             <a:r>
-              <a:rPr lang="en-US" sz="1200" dirty="0">
-                <a:solidFill>
-                  <a:srgbClr val="2D2D2D"/>
-                </a:solidFill>
-              </a:rPr>
-              <a:t>27-scenario stress grid across adoption, sentiment, and claim rates</a:t>
+              <a:t>12-scenario stress grid (12 scenarios x 50 runs)</a:t>
             </a:r>
             <a:endParaRPr lang="en-US" sz="1200" dirty="0"/>
           </a:p>
@@ -3959,12 +3875,7 @@
               <a:buChar char="•"/>
             </a:pPr>
             <a:r>
-              <a:rPr lang="en-US" sz="1200" dirty="0">
-                <a:solidFill>
-                  <a:srgbClr val="2D2D2D"/>
-                </a:solidFill>
-              </a:rPr>
-              <a:t>100-trial Monte Carlo + parameter sweep</a:t>
+              <a:t>600-trial Monte Carlo baseline</a:t>
             </a:r>
             <a:endParaRPr lang="en-US" sz="1200" dirty="0"/>
           </a:p>
@@ -4045,7 +3956,7 @@
               <a:buNone/>
             </a:pPr>
             <a:r>
-              <a:t>Planned Bootstrap Runway to Self-Sustainability</a:t>
+              <a:t>Bootstrap Dependency and Preliminary Breakeven Conditions</a:t>
             </a:r>
             <a:endParaRPr lang="en-US" sz="2200" dirty="0"/>
           </a:p>
@@ -4565,7 +4476,7 @@
               <a:buNone/>
             </a:pPr>
             <a:r>
-              <a:t>Highly Responsive Operational Control System</a:t>
+              <a:t>Operational Solvency &amp; Control System</a:t>
             </a:r>
             <a:endParaRPr lang="en-US" sz="2200" dirty="0"/>
           </a:p>
@@ -4695,7 +4606,7 @@
               <a:buNone/>
             </a:pPr>
             <a:r>
-              <a:t>The simulation verified 100% solvency across all Monte Carlo runs under the optimized parameters. It successfully isolated the settlement ratio as the primary operational lever for managing system stability.</a:t>
+              <a:t>Under baseline parameters, 95% of randomized runs remained above the solvency floor. Fixed-settlement-ratio adversarial runs failed, while the dynamic settlement controller successfully maintained solvency.</a:t>
             </a:r>
             <a:endParaRPr lang="en-US" sz="1300" dirty="0"/>
           </a:p>
@@ -4794,7 +4705,7 @@
               <a:buChar char="•"/>
             </a:pPr>
             <a:r>
-              <a:t>Instead of managing dozens of complex variables, operators have a single, highly responsive dial to absorb market volatility.</a:t>
+              <a:t>The settlement ratio serves as the primary operational lever for managing system stability under market volatility.</a:t>
             </a:r>
             <a:endParaRPr lang="en-US" sz="1200" dirty="0"/>
           </a:p>
@@ -4807,7 +4718,7 @@
               <a:buChar char="•"/>
             </a:pPr>
             <a:r>
-              <a:t>The optimization engine has successfully mapped the boundaries of the safe operating zone, ensuring the system remains stable under stress.</a:t>
+              <a:t>The optimization engine has mapped the boundaries of the safe operating zone, indicating that the system remains stable under baseline conditions.</a:t>
             </a:r>
             <a:endParaRPr lang="en-US" sz="1200" dirty="0"/>
           </a:p>
@@ -4820,7 +4731,7 @@
               <a:buChar char="•"/>
             </a:pPr>
             <a:r>
-              <a:t>This single-parameter sensitivity simplifies ongoing risk management, allowing the operator to adjust the system proactively.</a:t>
+              <a:t>This sensitivity simplifies ongoing risk management, allowing the operator to adjust the system parameters proactively.</a:t>
             </a:r>
             <a:endParaRPr lang="en-US" sz="1200" dirty="0"/>
           </a:p>
@@ -4901,15 +4812,7 @@
               <a:buNone/>
             </a:pPr>
             <a:r>
-              <a:rPr lang="en-US" sz="2200" b="1" dirty="0">
-                <a:solidFill>
-                  <a:srgbClr val="2D2D2D"/>
-                </a:solidFill>
-                <a:latin typeface="Calibri" pitchFamily="34" charset="0"/>
-                <a:ea typeface="Calibri" pitchFamily="34" charset="-122"/>
-                <a:cs typeface="Calibri" pitchFamily="34" charset="-120"/>
-              </a:rPr>
-              <a:t>Seven Design Tensions That Cannot Be Solved by Parameters Alone</a:t>
+              <a:t>Six Design Tensions and Scale/Regulatory Hypotheses</a:t>
             </a:r>
             <a:endParaRPr lang="en-US" sz="2200" dirty="0"/>
           </a:p>
@@ -5656,15 +5559,7 @@
               <a:buNone/>
             </a:pPr>
             <a:r>
-              <a:rPr lang="en-US" sz="1300" b="1" dirty="0">
-                <a:solidFill>
-                  <a:srgbClr val="2D2D2D"/>
-                </a:solidFill>
-                <a:latin typeface="Calibri" pitchFamily="34" charset="0"/>
-                <a:ea typeface="Calibri" pitchFamily="34" charset="-122"/>
-                <a:cs typeface="Calibri" pitchFamily="34" charset="-120"/>
-              </a:rPr>
-              <a:t>Every revenue stream flows through Treasury. Every operational function depends on it.</a:t>
+              <a:t>Treasury serves as the system's central control hub, managing primary operational inflows and outflows.</a:t>
             </a:r>
             <a:endParaRPr lang="en-US" sz="1300" dirty="0"/>
           </a:p>
@@ -6300,15 +6195,7 @@
               <a:buNone/>
             </a:pPr>
             <a:r>
-              <a:rPr lang="en-US" sz="1200" b="1" dirty="0">
-                <a:solidFill>
-                  <a:srgbClr val="2EAA56"/>
-                </a:solidFill>
-                <a:latin typeface="Calibri" pitchFamily="34" charset="0"/>
-                <a:ea typeface="Calibri" pitchFamily="34" charset="-122"/>
-                <a:cs typeface="Calibri" pitchFamily="34" charset="-120"/>
-              </a:rPr>
-              <a:t>Specified defense: deterministic staggering</a:t>
+              <a:t>Tested Scale vs. Production Target</a:t>
             </a:r>
             <a:endParaRPr lang="en-US" sz="1200" dirty="0"/>
           </a:p>
@@ -6339,15 +6226,7 @@
               <a:buNone/>
             </a:pPr>
             <a:r>
-              <a:rPr lang="en-US" sz="1100" dirty="0">
-                <a:solidFill>
-                  <a:srgbClr val="2D2D2D"/>
-                </a:solidFill>
-                <a:latin typeface="Calibri" pitchFamily="34" charset="0"/>
-                <a:ea typeface="Calibri" pitchFamily="34" charset="-122"/>
-                <a:cs typeface="Calibri" pitchFamily="34" charset="-120"/>
-              </a:rPr>
-              <a:t>The specification proposes hash-based cliff staggering that spreads a cohort's eligibility window over a 3-month ramp instead of a single point. This converts a sharp spike into a gradual ramp. It is specified but has not been stress-tested at Zee's audience scale.</a:t>
+              <a:t>Simulation ran at 1M initial viewers with 4-epoch compressed vesting. Production spec (180-day cliff, 730-day linear, 90-day stagger) and 900M+ scale will be validated in v2.</a:t>
             </a:r>
             <a:endParaRPr lang="en-US" sz="1100" dirty="0"/>
           </a:p>
@@ -6521,7 +6400,7 @@
               <a:buNone/>
             </a:pPr>
             <a:r>
-              <a:t>Ready for Empirical Calibration with Zee Audience Data</a:t>
+              <a:t>Core Mechanics Implemented; Empirical Calibration Needed</a:t>
             </a:r>
             <a:endParaRPr lang="en-US" sz="2200" dirty="0"/>
           </a:p>
@@ -6651,7 +6530,7 @@
               <a:buNone/>
             </a:pPr>
             <a:r>
-              <a:t>With the theoretical mechanism design now fully verified, the Z1 model is structurally complete and ready to ingest Zee's rich, empirical audience data to finalize calibration.</a:t>
+              <a:t>The core mechanics are implemented and consistent at simulation scale. Empirical calibration and scale validation using Zee audience data remain as next steps.</a:t>
             </a:r>
             <a:endParaRPr lang="en-US" sz="1300" dirty="0"/>
           </a:p>
@@ -6987,7 +6866,7 @@
               <a:buNone/>
             </a:pPr>
             <a:r>
-              <a:t>The Parameter Lock Architecture: Hard Economic Guarantees</a:t>
+              <a:t>Parameter Guardrails: Tested Conditions and Open Validation Items</a:t>
             </a:r>
             <a:endParaRPr lang="en-US" sz="2200" dirty="0"/>
           </a:p>
@@ -7117,7 +6996,7 @@
               <a:buNone/>
             </a:pPr>
             <a:r>
-              <a:t>Z1's economic security is protected by mathematically verified invariant locks, not just human governance. Direct code-level constraints block any parameter changes that threaten system solvency.</a:t>
+              <a:t>Z1's economic security is protected by mathematically verified invariant locks. Direct code-level constraints block parameter changes that violate tested solvency bounds.</a:t>
             </a:r>
             <a:endParaRPr lang="en-US" sz="1300" dirty="0"/>
           </a:p>
@@ -7181,7 +7060,7 @@
               <a:buNone/>
             </a:pPr>
             <a:r>
-              <a:t>Lock L1: Solvency Invariant</a:t>
+              <a:t>Lock L1: Solvency Invariant (Tested)</a:t>
             </a:r>
             <a:endParaRPr lang="en-US" sz="1200" dirty="0"/>
           </a:p>
@@ -7243,7 +7122,7 @@
               <a:buNone/>
             </a:pPr>
             <a:r>
-              <a:t>Strictly blocks any operational drift or governance proposal that pushes the ratio above 1.0 (collapse threshold).</a:t>
+              <a:t>Blocks any operational drift that pushes the ratio above 1.0; baseline runs passed at 95%, while fixed-SR adversarial runs failed.</a:t>
             </a:r>
             <a:endParaRPr lang="en-US" sz="1000" dirty="0"/>
           </a:p>
@@ -7307,7 +7186,7 @@
               <a:buNone/>
             </a:pPr>
             <a:r>
-              <a:t>Lock L3: Brand Inflow Floor</a:t>
+              <a:t>Lock L3: Brand Inflow Floor (Scale-Calibrated)</a:t>
             </a:r>
             <a:endParaRPr lang="en-US" sz="1200" dirty="0"/>
           </a:p>
@@ -7338,7 +7217,7 @@
               <a:buNone/>
             </a:pPr>
             <a:r>
-              <a:t>Enforces that epoch brand inflows must represent at least 1.0% of the initial Audience Reserve.</a:t>
+              <a:t>Enforces that epoch brand inflows must represent &gt;= 1.0% of the initial Audience Reserve (calibrated for simulation scale).</a:t>
             </a:r>
             <a:endParaRPr lang="en-US" sz="1000" dirty="0"/>
           </a:p>
@@ -7433,7 +7312,7 @@
               <a:buNone/>
             </a:pPr>
             <a:r>
-              <a:t>Formal Cryptographic Invariants</a:t>
+              <a:t>Formal Economic Invariants</a:t>
             </a:r>
             <a:endParaRPr lang="en-US" sz="1200" dirty="0"/>
           </a:p>
@@ -7464,7 +7343,7 @@
               <a:buNone/>
             </a:pPr>
             <a:r>
-              <a:t>Locks are coded directly into the system runtime and verified as mathematical invariants every epoch.</a:t>
+              <a:t>Locks are coded directly into the system runtime and verified as economic invariants every epoch.</a:t>
             </a:r>
             <a:endParaRPr lang="en-US" sz="1000" dirty="0"/>
           </a:p>
@@ -7495,7 +7374,7 @@
               <a:buNone/>
             </a:pPr>
             <a:r>
-              <a:t>Ensures that no combination of parameter adjustments can trigger an economic or peg-defense collapse.</a:t>
+              <a:t>Ensures that tested parameter adjustments cannot trigger an economic collapse under baseline conditions.</a:t>
             </a:r>
             <a:endParaRPr lang="en-US" sz="1000" dirty="0"/>
           </a:p>

--- a/docs_final/2026-06-23/z1_simulation_findings.pptx
+++ b/docs_final/2026-06-23/z1_simulation_findings.pptx
@@ -512,7 +512,10 @@
           <a:lstStyle/>
           <a:p>
             <a:r>
-              <a:t>This deck covers the strategic findings from the Z1 simulation engagement, spanning Milestones 1 through 3. The focus is on what we learned about the system that matters for launch readiness, not implementation details. Every finding here has a direct implication for protocol design, parameter calibration, or risk posture heading into the next phase.</a:t>
+              <a:rPr sz="1200">
+                <a:latin typeface="Calibri"/>
+              </a:rPr>
+              <a:t>Today I will summarize the main findings from the Z1 simulation program and the practical next steps. The purpose of the work was not to prove that every future configuration is safe. It was to identify a viable operating region, understand the controls that matter most, and show where empirical calibration is still needed. The key themes are the bootstrap path, the settlement and Treasury controls, the role of governance and parameter locks, Zee-scale onboarding, and the next phase of simulation and publication work.</a:t>
             </a:r>
           </a:p>
         </p:txBody>
@@ -598,7 +601,10 @@
           <a:lstStyle/>
           <a:p>
             <a:r>
-              <a:t>v2 will map the exact boundaries of the safe operating region and establish robust resilience thresholds. The sensitivity analysis will employ rigorous methods, including Morris screening and Sobol decomposition, to map multi-parameter interactions. By calibrating the model with Zee's empirical data and moving adversarial testing in-house, we gain tight, end-to-end control. This allows us to design highly targeted stress scenarios that proactively fortify the system's defenses before TGE.</a:t>
+              <a:rPr sz="1200">
+                <a:latin typeface="Calibri"/>
+              </a:rPr>
+              <a:t>The next phase should deepen rather than restart the work. First, we will broaden the parameter sweeps so that the output is a set of operating bands and early-warning thresholds. Second, Zee audience data will replace the largest behavioral assumptions. Third, we will validate scale, market dynamics, Treasury recovery, and coordinated stress. Governance remains part of the program: the model should test participation, delegation, proposal behavior, and capture resistance together with utility, campaigns, creators, validators, and liquidity. Keeping specification and adversarial testing in the same workflow allows each finding to translate directly into a design or calibration decision.</a:t>
             </a:r>
           </a:p>
         </p:txBody>
@@ -684,7 +690,10 @@
           <a:lstStyle/>
           <a:p>
             <a:r>
-              <a:t>We propose targeting the Journal of the British Blockchain Association (JBBA) for a paper on Z1's parameter lock framework. The paper will formalize this tiered parameter mutability as a novel security framework. By combining game theory, economic simulation, and formal verification, the paper will demonstrate how code-enforced invariants protect against governance capture. The co-authorship team brings together expertise in token engineering, simulation design, and cryptography, providing the academic rigor and interdisciplinary depth that peer-reviewed journals require.</a:t>
+              <a:rPr sz="1200">
+                <a:latin typeface="Calibri"/>
+              </a:rPr>
+              <a:t>The JBBA publication remains part of the proposed next step. The paper would focus on parameter locks as a general token-engineering design pattern, with Z1 as the case study. The contribution is not simply that some parameters are harder to change than others. It is the formal separation of foundational locks, bounded tuning ranges, and routine operating controls, together with simulation evidence showing why that separation matters. The Journal of the British Blockchain Association is the proposed target. The proposed contributor group includes Linas Stankevicius, Nik Pletikos, Dr. Stylianos Kampakis, and Dr. Theodosis Mourouzis. The final literature review, authorship, formal-methods contribution, and submission plan should be agreed before the paper is positioned externally as committed.</a:t>
             </a:r>
           </a:p>
         </p:txBody>
@@ -770,7 +779,10 @@
           <a:lstStyle/>
           <a:p>
             <a:r>
-              <a:t>Key takeaway: the v1 simulation has successfully validated the core architecture and surfaced critical structural insights regarding treasury runway, solvency sensitivity, and scale pressures under baseline conditions. Phase 2 will focus on closing the empirical gap using Zee's audience data, broadening the stress-testing scenarios, and completing the precise calibration needed for a confident launch. The proposed publication will turn these architectural strengths into peer-reviewed academic credibility.</a:t>
+              <a:rPr sz="1200">
+                <a:latin typeface="Calibri"/>
+              </a:rPr>
+              <a:t>The overall conclusion is constructive. The simulations identify a viable operating region and a compact set of controls that matter most. They also show where calibration is still required: user behavior, Zee-scale onboarding, vesting-wave timing, Treasury runway, and governance participation. The next phase is therefore about strengthening confidence, not correcting a failed architecture. We will use empirical data, broader sweeps, and targeted resilience tests to convert the current findings into operating ranges and launch decisions. The parameter-lock framework and the proposed JBBA paper provide an additional path to turn this work into a reusable contribution beyond Z1.</a:t>
             </a:r>
           </a:p>
         </p:txBody>
@@ -856,7 +868,10 @@
           <a:lstStyle/>
           <a:p>
             <a:r>
-              <a:t>Phase 1 through 3 simulation successfully verified the core solvency, market dynamics, and full economy models under baseline conditions. The findings on the following slides are exactly what simulation is designed to surface: deep, structural insights about how the system behaves under stress, providing a solid foundation for the upcoming empirical calibration phase.</a:t>
+              <a:rPr sz="1200">
+                <a:latin typeface="Calibri"/>
+              </a:rPr>
+              <a:t>The engagement produced two connected deliverables. First, the formal specification translated Z1 into a traceable system of mechanisms, policies, parameters, accounting rules, and control pathways. Second, the TokenLab simulations tested the core economy in progressively richer stages, from solvency through market dynamics and broader resilience. The important point is that the specification and the simulation now reinforce each other: the vault explains what the system is intended to do, while the simulation shows how the most important feedback loops behave under different assumptions.</a:t>
             </a:r>
           </a:p>
         </p:txBody>
@@ -942,7 +957,10 @@
           <a:lstStyle/>
           <a:p>
             <a:r>
-              <a:t>Every major protocol bootstraps through planned subsidies. Ethereum utilized a pre-mine, Helium implemented HIP-20 emissions, and MakerDAO operated under a deficit during its bootstrap phase. The simulation has successfully mapped this runway for Z1, giving us the preliminary growth and utility consumption thresholds required to transition to organic self-sustainability. This turns what is normally guesswork into a deterministic business roadmap. Furthermore, the automated sustainability brake (SYS_throttle) is mathematically verified to protect the treasury during this bootstrap phase, representing a major structural strength of the architecture.</a:t>
+              <a:rPr sz="1200">
+                <a:latin typeface="Calibri"/>
+              </a:rPr>
+              <a:t>The first finding is that Z1 should be treated as a planned bootstrap economy. The genesis pools provide runway while the utility side of the system develops. The simulation does not yet give one final breakeven number, because that depends on real user behavior, but it gives us the structure needed to calculate it. We can now connect adoption, claim behavior, utility spending, fee capture, Treasury runway, and reserve support in one model. The next phase is to widen the sweeps and replace provisional behavior with Zee data so that the bootstrap plan becomes a set of measurable operating targets.</a:t>
             </a:r>
           </a:p>
         </p:txBody>
@@ -1028,7 +1046,10 @@
           <a:lstStyle/>
           <a:p>
             <a:r>
-              <a:t>This is a highly valuable architectural discovery. The simulation verified that under baseline parameters, 95% of baseline runs remained above the solvency floor, while fixed-settlement-ratio adversarial runs failed. This isolated the settlement ratio as the primary operational lever for managing system stability. Instead of having to manage dozens of complex variables, the protocol operator has a highly responsive dial to absorb market volatility. In the next phase, we will use Zee's real-world behavioral data to calibrate this ratio, ensuring that we balance long-term solvency with an optimal and attractive user experience.</a:t>
+              <a:rPr sz="1200">
+                <a:latin typeface="Calibri"/>
+              </a:rPr>
+              <a:t>The central simulation result is that a viable operating region exists under the tested assumptions. The supporting report records that most baseline randomized runs remained above the solvency floor, while dynamic settlement control performed better than a fixed ratio in adversarial conditions. Settlement ratio is the strongest individual lever, but it is not the only one. Claim intensity, vesting timing, utility recirculation, and fee capture also matter. The practical implication is positive: the system can be managed through a compact set of controls, provided those controls are calibrated as ranges and monitored through clear operating indicators.</a:t>
             </a:r>
           </a:p>
         </p:txBody>
@@ -1114,7 +1135,10 @@
           <a:lstStyle/>
           <a:p>
             <a:r>
-              <a:t>This slide outlines the six fundamental design tensions identified during the specification phase, along with key scale and regulatory hypotheses. These are not parameter-tuning problems; they are structural trade-offs inherent in any token economy. For example, growing participation naturally drains the reserve, and utility spending competes with governance staking. Our goal in the simulation is to map these frontiers and show the client exactly where the viable operating regions lie, allowing Zee to make conscious, data-backed design decisions.</a:t>
+              <a:rPr sz="1200">
+                <a:latin typeface="Calibri"/>
+              </a:rPr>
+              <a:t>These considerations define the main design frontiers for Z1. Participation growth is valuable, but it increases reserve demand. Governance needs strong protections, but the process also has to remain usable enough for real participation. Brand activation can add important demand, while compliance controls define how that demand is introduced. Scale increases both opportunity and the need for robust identity controls. Finally, large onboarding cohorts create vesting waves that must be deliberately staggered. The purpose of simulation is to quantify these trade-offs and identify combinations that preserve both usability and resilience.</a:t>
             </a:r>
           </a:p>
         </p:txBody>
@@ -1200,7 +1224,10 @@
           <a:lstStyle/>
           <a:p>
             <a:r>
-              <a:t>We have identified key architectural insights from the Value Creation Mechanism interaction matrix. First, the Treasury serves as the system's central control hub; while not all micro-flows route through it, it governs the primary inflows and outflows. This is a strength for monetary policy control, and the three-tier parameter lock system protects it. Second, the integrity and verification layer is architecturally unique as the system's trust root. If identity verification fails, the entire recognition engine, campaigns, and governance lose their proof layer. Third, the settlement gate is the load-bearing bridge between the credit and token economies, and its performance is dictated by the settlement ratio.</a:t>
+              <a:rPr sz="1200">
+                <a:latin typeface="Calibri"/>
+              </a:rPr>
+              <a:t>Three layers deserve special attention. Treasury is the most connected coordination hub because it supports reserve top-ups, incentives, validators, and operations. That does not mean every economic flow passes through Treasury, but changes to Treasury policy have broad consequences. Integrity is the trust root because recognition, campaigns, and governance all depend on credible identity and participation signals. Settlement is the bridge between ACR and Z1U, so its ratio, caps, and queue rules translate audience activity into reserve demand. Together, these three layers explain why monitoring, authorization, and parameter locks are so important.</a:t>
             </a:r>
           </a:p>
         </p:txBody>
@@ -1286,7 +1313,10 @@
           <a:lstStyle/>
           <a:p>
             <a:r>
-              <a:t>This is one of the things that makes Z1 different from every other token economy. Most protocols grow gradually. Z1 has access to a 900M+ captive media audience. That is an extraordinary advantage, but it also creates a pressure profile that standard tokenomics is not designed for. A broadcast event could produce millions of claims in a single week. To address this, the specification proposes hash-based cliff staggering. While this staggering is well-designed on paper, the next phase must validate it against realistic adoption shock profiles, since the current simulation was conducted at a 1M-user scale with compressed vesting timelines.</a:t>
+              <a:rPr sz="1200">
+                <a:latin typeface="Calibri"/>
+              </a:rPr>
+              <a:t>Zee gives Z1 a distribution advantage that most token systems do not have. The same advantage changes the load profile of the economy. Onboarding may arrive in large waves through campaigns, broadcast events, or platform integrations, and those cohorts can later reach vesting eligibility at similar times. The specified hash-based staggering mechanism is designed to spread that pressure across a longer window. The next phase should validate the mechanism using realistic audience cohorts, rollout curves, and vesting schedules. The objective is not to slow growth; it is to make growth predictable enough for the reserve and Treasury to support it.</a:t>
             </a:r>
           </a:p>
         </p:txBody>
@@ -1372,7 +1402,10 @@
           <a:lstStyle/>
           <a:p>
             <a:r>
-              <a:t>This is the exciting bridge between v1 and v2. The v1 simulation has successfully built and verified the entire mathematical framework using baseline placeholder parameters. Now, the system is fully prepared to ingest Zee's real-world behavioral data. Zee possesses a massive competitive advantage: years of detailed engagement history from 900M+ users. This audience data will allow us to calibrate the agent behaviors—mapping claim, settlement, and spending patterns directly to actual historical engagement. This transforms the simulation from a theoretical validation into a highly precise, data-driven calibration exercise.</a:t>
+              <a:rPr sz="1200">
+                <a:latin typeface="Calibri"/>
+              </a:rPr>
+              <a:t>The model is now ready to move from provisional behavior to empirical calibration. The core mechanics and accounting relationships are in place at simulation scale, but production decisions should use Zee's audience evidence. Engagement frequency, session depth, loyalty redemption, and campaign response can help define realistic claim, settlement, and utility-spending distributions. Those distributions can then be applied to the sensitivity and stress-testing framework that already exists. This is the point where the simulation becomes a practical operating tool: not because every uncertainty disappears, but because the largest behavioral assumptions become measurable and updateable.</a:t>
             </a:r>
           </a:p>
         </p:txBody>
@@ -1458,7 +1491,10 @@
           <a:lstStyle/>
           <a:p>
             <a:r>
-              <a:t>This slide highlights the core strength of Z1's economic security: the Parameter Locks. In most DeFi protocols, security depends entirely on human governance decisions. Z1 is different. It implements mathematical 'parameter locks'—invariant equations like Lock L1 (Solvency Floor) and Lock L3 (Brand Inflow Floor)—directly into the protocol's logic. If any governance proposal or operational adjustment attempts to move parameters into a zone that violates these locks, the system structurally blocks it. This combines formal verification with economic design, ensuring that the protocol remains solvent under all market conditions. This mathematical rigor is the core contribution of the Z1 architecture and the primary focus of our upcoming academic publication.</a:t>
+              <a:rPr sz="1200">
+                <a:latin typeface="Calibri"/>
+              </a:rPr>
+              <a:t>This slide is specifically about parameter locks rather than the broader governance model. The design separates parameters according to the consequences of changing them. Tier 0 contains the foundational constraints that define the economy and therefore receives the strongest lock. Tier 1 contains important tuning parameters, but changes remain inside approved ranges and use delayed execution. Tier 2 contains routine operating controls that can move more quickly without changing the system's foundations. This architecture preserves adaptability while reducing the risk of accidental or overly rapid changes to critical economic rules.</a:t>
             </a:r>
           </a:p>
         </p:txBody>
@@ -1894,7 +1930,15 @@
               <a:buNone/>
             </a:pPr>
             <a:r>
-              <a:t>Z1 Simulation Program</a:t>
+              <a:rPr lang="en-US" sz="3800" b="1" dirty="0">
+                <a:solidFill>
+                  <a:srgbClr val="FFFFFF"/>
+                </a:solidFill>
+                <a:latin typeface="Calibri" pitchFamily="34" charset="0"/>
+                <a:ea typeface="Calibri" pitchFamily="34" charset="-122"/>
+                <a:cs typeface="Calibri" pitchFamily="34" charset="-120"/>
+              </a:rPr>
+              <a:t>Z1 Simulation v1</a:t>
             </a:r>
             <a:endParaRPr lang="en-US" sz="3800" dirty="0"/>
           </a:p>
@@ -1925,7 +1969,15 @@
               <a:buNone/>
             </a:pPr>
             <a:r>
-              <a:t>M1–M3 Findings and Next Phase</a:t>
+              <a:rPr lang="en-US" sz="2000" dirty="0">
+                <a:solidFill>
+                  <a:srgbClr val="2EAA56"/>
+                </a:solidFill>
+                <a:latin typeface="Calibri" pitchFamily="34" charset="0"/>
+                <a:ea typeface="Calibri" pitchFamily="34" charset="-122"/>
+                <a:cs typeface="Calibri" pitchFamily="34" charset="-120"/>
+              </a:rPr>
+              <a:t>Key Findings &amp; Next Steps</a:t>
             </a:r>
             <a:endParaRPr lang="en-US" sz="2000" dirty="0"/>
           </a:p>
@@ -1954,7 +2006,7 @@
           </a:ln>
         </p:spPr>
         <p:txBody>
-          <a:bodyPr/>
+          <a:bodyPr wrap="square"/>
           <a:p/>
         </p:txBody>
       </p:sp>
@@ -2047,24 +2099,28 @@
           <a:ln/>
         </p:spPr>
         <p:txBody>
-          <a:bodyPr wrap="square" lIns="0" tIns="0" rIns="0" bIns="0" rtlCol="0" anchor="ctr"/>
-          <a:lstStyle/>
-          <a:p>
-            <a:pPr indent="0" marL="0">
-              <a:buNone/>
-            </a:pPr>
-            <a:r>
-              <a:rPr lang="en-US" sz="2200" b="1" dirty="0">
+          <a:bodyPr wrap="square" lIns="0" tIns="0" rIns="0" bIns="0" rtlCol="0" anchor="ctr">
+            <a:noAutofit/>
+          </a:bodyPr>
+          <a:lstStyle/>
+          <a:p>
+            <a:pPr algn="l">
+              <a:lnSpc>
+                <a:spcPct val="100000"/>
+              </a:lnSpc>
+              <a:spcAft>
+                <a:spcPts val="0"/>
+              </a:spcAft>
+            </a:pPr>
+            <a:r>
+              <a:rPr sz="2200" b="1">
                 <a:solidFill>
                   <a:srgbClr val="2D2D2D"/>
                 </a:solidFill>
-                <a:latin typeface="Calibri" pitchFamily="34" charset="0"/>
-                <a:ea typeface="Calibri" pitchFamily="34" charset="-122"/>
-                <a:cs typeface="Calibri" pitchFamily="34" charset="-120"/>
-              </a:rPr>
-              <a:t>Next Steps: v2 Simulation</a:t>
-            </a:r>
-            <a:endParaRPr lang="en-US" sz="2200" dirty="0"/>
+                <a:latin typeface="Calibri"/>
+              </a:rPr>
+              <a:t>Next Steps: v2 Simulation and Calibration</a:t>
+            </a:r>
           </a:p>
         </p:txBody>
       </p:sp>
@@ -2091,7 +2147,7 @@
           </a:ln>
         </p:spPr>
         <p:txBody>
-          <a:bodyPr/>
+          <a:bodyPr wrap="square"/>
           <a:p/>
         </p:txBody>
       </p:sp>
@@ -2163,7 +2219,7 @@
           </a:effectLst>
         </p:spPr>
         <p:txBody>
-          <a:bodyPr/>
+          <a:bodyPr wrap="square"/>
           <a:p/>
         </p:txBody>
       </p:sp>
@@ -2185,24 +2241,28 @@
           <a:ln/>
         </p:spPr>
         <p:txBody>
-          <a:bodyPr wrap="square" lIns="0" tIns="0" rIns="0" bIns="0" rtlCol="0" anchor="ctr"/>
-          <a:lstStyle/>
-          <a:p>
-            <a:pPr indent="0" marL="0">
-              <a:buNone/>
-            </a:pPr>
-            <a:r>
-              <a:rPr lang="en-US" sz="1200" b="1" dirty="0">
+          <a:bodyPr wrap="square" lIns="0" tIns="0" rIns="0" bIns="0" rtlCol="0" anchor="ctr">
+            <a:noAutofit/>
+          </a:bodyPr>
+          <a:lstStyle/>
+          <a:p>
+            <a:pPr algn="l">
+              <a:lnSpc>
+                <a:spcPct val="100000"/>
+              </a:lnSpc>
+              <a:spcAft>
+                <a:spcPts val="200"/>
+              </a:spcAft>
+            </a:pPr>
+            <a:r>
+              <a:rPr sz="1200" b="1">
                 <a:solidFill>
                   <a:srgbClr val="2D2D2D"/>
                 </a:solidFill>
-                <a:latin typeface="Calibri" pitchFamily="34" charset="0"/>
-                <a:ea typeface="Calibri" pitchFamily="34" charset="-122"/>
-                <a:cs typeface="Calibri" pitchFamily="34" charset="-120"/>
+                <a:latin typeface="Calibri"/>
               </a:rPr>
               <a:t>Broader sensitivity analysis and parameter sweeps</a:t>
             </a:r>
-            <a:endParaRPr lang="en-US" sz="1200" dirty="0"/>
           </a:p>
         </p:txBody>
       </p:sp>
@@ -2224,24 +2284,28 @@
           <a:ln/>
         </p:spPr>
         <p:txBody>
-          <a:bodyPr wrap="square" lIns="0" tIns="0" rIns="0" bIns="0" rtlCol="0" anchor="ctr"/>
-          <a:lstStyle/>
-          <a:p>
-            <a:pPr indent="0" marL="0">
-              <a:buNone/>
-            </a:pPr>
-            <a:r>
-              <a:rPr lang="en-US" sz="1050" dirty="0">
+          <a:bodyPr wrap="square" lIns="0" tIns="0" rIns="0" bIns="0" rtlCol="0" anchor="t">
+            <a:noAutofit/>
+          </a:bodyPr>
+          <a:lstStyle/>
+          <a:p>
+            <a:pPr algn="l">
+              <a:lnSpc>
+                <a:spcPct val="95000"/>
+              </a:lnSpc>
+              <a:spcAft>
+                <a:spcPts val="200"/>
+              </a:spcAft>
+            </a:pPr>
+            <a:r>
+              <a:rPr sz="1019">
                 <a:solidFill>
                   <a:srgbClr val="888888"/>
                 </a:solidFill>
-                <a:latin typeface="Calibri" pitchFamily="34" charset="0"/>
-                <a:ea typeface="Calibri" pitchFamily="34" charset="-122"/>
-                <a:cs typeface="Calibri" pitchFamily="34" charset="-120"/>
-              </a:rPr>
-              <a:t>Target all high-sensitivity control points independently and in combination. Map the full safe operating region, not just the optimizer's single point.</a:t>
-            </a:r>
-            <a:endParaRPr lang="en-US" sz="1050" dirty="0"/>
+                <a:latin typeface="Calibri"/>
+              </a:rPr>
+              <a:t>Map the operating region across settlement, claims, vesting, fees, recirculation, and reserve support—not only one optimized configuration.</a:t>
+            </a:r>
           </a:p>
         </p:txBody>
       </p:sp>
@@ -2274,7 +2338,7 @@
           </a:effectLst>
         </p:spPr>
         <p:txBody>
-          <a:bodyPr/>
+          <a:bodyPr wrap="square"/>
           <a:p/>
         </p:txBody>
       </p:sp>
@@ -2296,24 +2360,28 @@
           <a:ln/>
         </p:spPr>
         <p:txBody>
-          <a:bodyPr wrap="square" lIns="0" tIns="0" rIns="0" bIns="0" rtlCol="0" anchor="ctr"/>
-          <a:lstStyle/>
-          <a:p>
-            <a:pPr indent="0" marL="0">
-              <a:buNone/>
-            </a:pPr>
-            <a:r>
-              <a:rPr lang="en-US" sz="1200" b="1" dirty="0">
+          <a:bodyPr wrap="square" lIns="0" tIns="0" rIns="0" bIns="0" rtlCol="0" anchor="ctr">
+            <a:noAutofit/>
+          </a:bodyPr>
+          <a:lstStyle/>
+          <a:p>
+            <a:pPr algn="l">
+              <a:lnSpc>
+                <a:spcPct val="100000"/>
+              </a:lnSpc>
+              <a:spcAft>
+                <a:spcPts val="200"/>
+              </a:spcAft>
+            </a:pPr>
+            <a:r>
+              <a:rPr sz="1200" b="1">
                 <a:solidFill>
                   <a:srgbClr val="2D2D2D"/>
                 </a:solidFill>
-                <a:latin typeface="Calibri" pitchFamily="34" charset="0"/>
-                <a:ea typeface="Calibri" pitchFamily="34" charset="-122"/>
-                <a:cs typeface="Calibri" pitchFamily="34" charset="-120"/>
+                <a:latin typeface="Calibri"/>
               </a:rPr>
               <a:t>Behavioral calibration from Zee audience data</a:t>
             </a:r>
-            <a:endParaRPr lang="en-US" sz="1200" dirty="0"/>
           </a:p>
         </p:txBody>
       </p:sp>
@@ -2335,24 +2403,28 @@
           <a:ln/>
         </p:spPr>
         <p:txBody>
-          <a:bodyPr wrap="square" lIns="0" tIns="0" rIns="0" bIns="0" rtlCol="0" anchor="ctr"/>
-          <a:lstStyle/>
-          <a:p>
-            <a:pPr indent="0" marL="0">
-              <a:buNone/>
-            </a:pPr>
-            <a:r>
-              <a:rPr lang="en-US" sz="1050" dirty="0">
+          <a:bodyPr wrap="square" lIns="0" tIns="0" rIns="0" bIns="0" rtlCol="0" anchor="t">
+            <a:noAutofit/>
+          </a:bodyPr>
+          <a:lstStyle/>
+          <a:p>
+            <a:pPr algn="l">
+              <a:lnSpc>
+                <a:spcPct val="95000"/>
+              </a:lnSpc>
+              <a:spcAft>
+                <a:spcPts val="200"/>
+              </a:spcAft>
+            </a:pPr>
+            <a:r>
+              <a:rPr sz="1019">
                 <a:solidFill>
                   <a:srgbClr val="888888"/>
                 </a:solidFill>
-                <a:latin typeface="Calibri" pitchFamily="34" charset="0"/>
-                <a:ea typeface="Calibri" pitchFamily="34" charset="-122"/>
-                <a:cs typeface="Calibri" pitchFamily="34" charset="-120"/>
-              </a:rPr>
-              <a:t>Replace placeholder agent profiles with empirically grounded archetypes. Zee's engagement history provides direct proxies for claim, settlement, and spending behavior.</a:t>
-            </a:r>
-            <a:endParaRPr lang="en-US" sz="1050" dirty="0"/>
+                <a:latin typeface="Calibri"/>
+              </a:rPr>
+              <a:t>Replace provisional profiles with evidence-based archetypes for claiming, settling, spending, participation, and churn.</a:t>
+            </a:r>
           </a:p>
         </p:txBody>
       </p:sp>
@@ -2385,7 +2457,7 @@
           </a:effectLst>
         </p:spPr>
         <p:txBody>
-          <a:bodyPr/>
+          <a:bodyPr wrap="square"/>
           <a:p/>
         </p:txBody>
       </p:sp>
@@ -2407,16 +2479,28 @@
           <a:ln/>
         </p:spPr>
         <p:txBody>
-          <a:bodyPr wrap="square" lIns="0" tIns="0" rIns="0" bIns="0" rtlCol="0" anchor="ctr"/>
-          <a:lstStyle/>
-          <a:p>
-            <a:pPr indent="0" marL="0">
-              <a:buNone/>
-            </a:pPr>
-            <a:r>
-              <a:t>Advanced stress-testing and resilience mapping</a:t>
-            </a:r>
-            <a:endParaRPr lang="en-US" sz="1200" dirty="0"/>
+          <a:bodyPr wrap="square" lIns="0" tIns="0" rIns="0" bIns="0" rtlCol="0" anchor="ctr">
+            <a:noAutofit/>
+          </a:bodyPr>
+          <a:lstStyle/>
+          <a:p>
+            <a:pPr algn="l">
+              <a:lnSpc>
+                <a:spcPct val="100000"/>
+              </a:lnSpc>
+              <a:spcAft>
+                <a:spcPts val="200"/>
+              </a:spcAft>
+            </a:pPr>
+            <a:r>
+              <a:rPr sz="1200" b="1">
+                <a:solidFill>
+                  <a:srgbClr val="2D2D2D"/>
+                </a:solidFill>
+                <a:latin typeface="Calibri"/>
+              </a:rPr>
+              <a:t>Scale, market, and resilience validation</a:t>
+            </a:r>
           </a:p>
         </p:txBody>
       </p:sp>
@@ -2438,24 +2522,28 @@
           <a:ln/>
         </p:spPr>
         <p:txBody>
-          <a:bodyPr wrap="square" lIns="0" tIns="0" rIns="0" bIns="0" rtlCol="0" anchor="ctr"/>
-          <a:lstStyle/>
-          <a:p>
-            <a:pPr indent="0" marL="0">
-              <a:buNone/>
-            </a:pPr>
-            <a:r>
-              <a:rPr lang="en-US" sz="1050" dirty="0">
+          <a:bodyPr wrap="square" lIns="0" tIns="0" rIns="0" bIns="0" rtlCol="0" anchor="t">
+            <a:noAutofit/>
+          </a:bodyPr>
+          <a:lstStyle/>
+          <a:p>
+            <a:pPr algn="l">
+              <a:lnSpc>
+                <a:spcPct val="95000"/>
+              </a:lnSpc>
+              <a:spcAft>
+                <a:spcPts val="200"/>
+              </a:spcAft>
+            </a:pPr>
+            <a:r>
+              <a:rPr sz="1019">
                 <a:solidFill>
                   <a:srgbClr val="888888"/>
                 </a:solidFill>
-                <a:latin typeface="Calibri" pitchFamily="34" charset="0"/>
-                <a:ea typeface="Calibri" pitchFamily="34" charset="-122"/>
-                <a:cs typeface="Calibri" pitchFamily="34" charset="-120"/>
-              </a:rPr>
-              <a:t>Bank runs at scale, coordinated governance attacks, multi-vector adversarial campaigns. Scenarios designed to find the breaking point, not confirm the happy path.</a:t>
-            </a:r>
-            <a:endParaRPr lang="en-US" sz="1050" dirty="0"/>
+                <a:latin typeface="Calibri"/>
+              </a:rPr>
+              <a:t>Test large onboarding waves, dynamic settlement, market shocks, Treasury recovery, and multi-vector adversarial scenarios.</a:t>
+            </a:r>
           </a:p>
         </p:txBody>
       </p:sp>
@@ -2488,7 +2576,7 @@
           </a:effectLst>
         </p:spPr>
         <p:txBody>
-          <a:bodyPr/>
+          <a:bodyPr wrap="square"/>
           <a:p/>
         </p:txBody>
       </p:sp>
@@ -2510,16 +2598,28 @@
           <a:ln/>
         </p:spPr>
         <p:txBody>
-          <a:bodyPr wrap="square" lIns="0" tIns="0" rIns="0" bIns="0" rtlCol="0" anchor="ctr"/>
-          <a:lstStyle/>
-          <a:p>
-            <a:pPr indent="0" marL="0">
-              <a:buNone/>
-            </a:pPr>
-            <a:r>
-              <a:t>Refining and Calibrating Mechanisms</a:t>
-            </a:r>
-            <a:endParaRPr lang="en-US" sz="1200" dirty="0"/>
+          <a:bodyPr wrap="square" lIns="0" tIns="0" rIns="0" bIns="0" rtlCol="0" anchor="ctr">
+            <a:noAutofit/>
+          </a:bodyPr>
+          <a:lstStyle/>
+          <a:p>
+            <a:pPr algn="l">
+              <a:lnSpc>
+                <a:spcPct val="100000"/>
+              </a:lnSpc>
+              <a:spcAft>
+                <a:spcPts val="200"/>
+              </a:spcAft>
+            </a:pPr>
+            <a:r>
+              <a:rPr sz="1200" b="1">
+                <a:solidFill>
+                  <a:srgbClr val="2D2D2D"/>
+                </a:solidFill>
+                <a:latin typeface="Calibri"/>
+              </a:rPr>
+              <a:t>Governance and ecosystem interaction testing</a:t>
+            </a:r>
           </a:p>
         </p:txBody>
       </p:sp>
@@ -2541,16 +2641,28 @@
           <a:ln/>
         </p:spPr>
         <p:txBody>
-          <a:bodyPr wrap="square" lIns="0" tIns="0" rIns="0" bIns="0" rtlCol="0" anchor="ctr"/>
-          <a:lstStyle/>
-          <a:p>
-            <a:pPr indent="0" marL="0">
-              <a:buNone/>
-            </a:pPr>
-            <a:r>
-              <a:t>v1 established the solvency baseline. v2 will deepen and calibrate governance capture, utility pricing, campaign marketplace, and creator incentive dynamics.</a:t>
-            </a:r>
-            <a:endParaRPr lang="en-US" sz="1050" dirty="0"/>
+          <a:bodyPr wrap="square" lIns="0" tIns="0" rIns="0" bIns="0" rtlCol="0" anchor="t">
+            <a:noAutofit/>
+          </a:bodyPr>
+          <a:lstStyle/>
+          <a:p>
+            <a:pPr algn="l">
+              <a:lnSpc>
+                <a:spcPct val="95000"/>
+              </a:lnSpc>
+              <a:spcAft>
+                <a:spcPts val="200"/>
+              </a:spcAft>
+            </a:pPr>
+            <a:r>
+              <a:rPr sz="1019">
+                <a:solidFill>
+                  <a:srgbClr val="888888"/>
+                </a:solidFill>
+                <a:latin typeface="Calibri"/>
+              </a:rPr>
+              <a:t>Deepen governance participation and capture scenarios alongside utility pricing, campaigns, creators, validators, and liquidity behavior.</a:t>
+            </a:r>
           </a:p>
         </p:txBody>
       </p:sp>
@@ -2572,24 +2684,28 @@
           <a:ln/>
         </p:spPr>
         <p:txBody>
-          <a:bodyPr wrap="square" lIns="0" tIns="0" rIns="0" bIns="0" rtlCol="0" anchor="ctr"/>
-          <a:lstStyle/>
-          <a:p>
-            <a:pPr indent="0" marL="0">
-              <a:buNone/>
-            </a:pPr>
-            <a:r>
-              <a:rPr lang="en-US" sz="1000" i="1" dirty="0">
+          <a:bodyPr wrap="square" lIns="0" tIns="0" rIns="0" bIns="0" rtlCol="0" anchor="ctr">
+            <a:noAutofit/>
+          </a:bodyPr>
+          <a:lstStyle/>
+          <a:p>
+            <a:pPr algn="l">
+              <a:lnSpc>
+                <a:spcPct val="100000"/>
+              </a:lnSpc>
+              <a:spcAft>
+                <a:spcPts val="200"/>
+              </a:spcAft>
+            </a:pPr>
+            <a:r>
+              <a:rPr sz="969">
                 <a:solidFill>
                   <a:srgbClr val="888888"/>
                 </a:solidFill>
-                <a:latin typeface="Calibri" pitchFamily="34" charset="0"/>
-                <a:ea typeface="Calibri" pitchFamily="34" charset="-122"/>
-                <a:cs typeface="Calibri" pitchFamily="34" charset="-120"/>
-              </a:rPr>
-              <a:t>Adversarial testing will be handled internally by Provecto Labs, giving tighter integration between specification and attack design.</a:t>
-            </a:r>
-            <a:endParaRPr lang="en-US" sz="1000" dirty="0"/>
+                <a:latin typeface="Calibri"/>
+              </a:rPr>
+              <a:t>Provecto Labs will maintain an integrated workflow between specification, simulation, calibration, and adversarial testing.</a:t>
+            </a:r>
           </a:p>
         </p:txBody>
       </p:sp>
@@ -2643,24 +2759,28 @@
           <a:ln/>
         </p:spPr>
         <p:txBody>
-          <a:bodyPr wrap="square" lIns="0" tIns="0" rIns="0" bIns="0" rtlCol="0" anchor="ctr"/>
-          <a:lstStyle/>
-          <a:p>
-            <a:pPr indent="0" marL="0">
-              <a:buNone/>
-            </a:pPr>
-            <a:r>
-              <a:rPr lang="en-US" sz="2200" b="1" dirty="0">
+          <a:bodyPr wrap="square" lIns="0" tIns="0" rIns="0" bIns="0" rtlCol="0" anchor="ctr">
+            <a:noAutofit/>
+          </a:bodyPr>
+          <a:lstStyle/>
+          <a:p>
+            <a:pPr algn="l">
+              <a:lnSpc>
+                <a:spcPct val="100000"/>
+              </a:lnSpc>
+              <a:spcAft>
+                <a:spcPts val="0"/>
+              </a:spcAft>
+            </a:pPr>
+            <a:r>
+              <a:rPr sz="2200" b="1">
                 <a:solidFill>
                   <a:srgbClr val="2D2D2D"/>
                 </a:solidFill>
-                <a:latin typeface="Calibri" pitchFamily="34" charset="0"/>
-                <a:ea typeface="Calibri" pitchFamily="34" charset="-122"/>
-                <a:cs typeface="Calibri" pitchFamily="34" charset="-120"/>
+                <a:latin typeface="Calibri"/>
               </a:rPr>
               <a:t>Next Steps: Academic Publication</a:t>
             </a:r>
-            <a:endParaRPr lang="en-US" sz="2200" dirty="0"/>
           </a:p>
         </p:txBody>
       </p:sp>
@@ -2687,7 +2807,7 @@
           </a:ln>
         </p:spPr>
         <p:txBody>
-          <a:bodyPr/>
+          <a:bodyPr wrap="square"/>
           <a:p/>
         </p:txBody>
       </p:sp>
@@ -2759,7 +2879,7 @@
           </a:effectLst>
         </p:spPr>
         <p:txBody>
-          <a:bodyPr/>
+          <a:bodyPr wrap="square"/>
           <a:p/>
         </p:txBody>
       </p:sp>
@@ -2781,24 +2901,28 @@
           <a:ln/>
         </p:spPr>
         <p:txBody>
-          <a:bodyPr wrap="square" lIns="0" tIns="0" rIns="0" bIns="0" rtlCol="0" anchor="ctr"/>
-          <a:lstStyle/>
-          <a:p>
-            <a:pPr indent="0" marL="0">
-              <a:buNone/>
-            </a:pPr>
-            <a:r>
-              <a:rPr lang="en-US" sz="1600" b="1" dirty="0">
+          <a:bodyPr wrap="square" lIns="0" tIns="0" rIns="0" bIns="0" rtlCol="0" anchor="ctr">
+            <a:noAutofit/>
+          </a:bodyPr>
+          <a:lstStyle/>
+          <a:p>
+            <a:pPr algn="l">
+              <a:lnSpc>
+                <a:spcPct val="100000"/>
+              </a:lnSpc>
+              <a:spcAft>
+                <a:spcPts val="200"/>
+              </a:spcAft>
+            </a:pPr>
+            <a:r>
+              <a:rPr sz="1600" b="1">
                 <a:solidFill>
                   <a:srgbClr val="2D2D2D"/>
                 </a:solidFill>
-                <a:latin typeface="Calibri" pitchFamily="34" charset="0"/>
-                <a:ea typeface="Calibri" pitchFamily="34" charset="-122"/>
-                <a:cs typeface="Calibri" pitchFamily="34" charset="-120"/>
+                <a:latin typeface="Calibri"/>
               </a:rPr>
               <a:t>Parameter Locks in Token Economic Systems</a:t>
             </a:r>
-            <a:endParaRPr lang="en-US" sz="1600" dirty="0"/>
           </a:p>
         </p:txBody>
       </p:sp>
@@ -2820,24 +2944,28 @@
           <a:ln/>
         </p:spPr>
         <p:txBody>
-          <a:bodyPr wrap="square" lIns="0" tIns="0" rIns="0" bIns="0" rtlCol="0" anchor="ctr"/>
-          <a:lstStyle/>
-          <a:p>
-            <a:pPr indent="0" marL="0">
-              <a:buNone/>
-            </a:pPr>
-            <a:r>
-              <a:rPr lang="en-US" sz="1100" dirty="0">
+          <a:bodyPr wrap="square" lIns="0" tIns="0" rIns="0" bIns="0" rtlCol="0" anchor="ctr">
+            <a:noAutofit/>
+          </a:bodyPr>
+          <a:lstStyle/>
+          <a:p>
+            <a:pPr algn="l">
+              <a:lnSpc>
+                <a:spcPct val="100000"/>
+              </a:lnSpc>
+              <a:spcAft>
+                <a:spcPts val="200"/>
+              </a:spcAft>
+            </a:pPr>
+            <a:r>
+              <a:rPr sz="1100">
                 <a:solidFill>
                   <a:srgbClr val="2EAA56"/>
                 </a:solidFill>
-                <a:latin typeface="Calibri" pitchFamily="34" charset="0"/>
-                <a:ea typeface="Calibri" pitchFamily="34" charset="-122"/>
-                <a:cs typeface="Calibri" pitchFamily="34" charset="-120"/>
-              </a:rPr>
-              <a:t>Journal of The British Blockchain Association (JBBA)</a:t>
-            </a:r>
-            <a:endParaRPr lang="en-US" sz="1100" dirty="0"/>
+                <a:latin typeface="Calibri"/>
+              </a:rPr>
+              <a:t>Proposed target: Journal of the British Blockchain Association (JBBA)</a:t>
+            </a:r>
           </a:p>
         </p:txBody>
       </p:sp>
@@ -2859,24 +2987,28 @@
           <a:ln/>
         </p:spPr>
         <p:txBody>
-          <a:bodyPr wrap="square" lIns="0" tIns="0" rIns="0" bIns="0" rtlCol="0" anchor="ctr"/>
-          <a:lstStyle/>
-          <a:p>
-            <a:pPr indent="0" marL="0">
-              <a:buNone/>
-            </a:pPr>
-            <a:r>
-              <a:rPr lang="en-US" sz="1200" dirty="0">
+          <a:bodyPr wrap="square" lIns="0" tIns="0" rIns="0" bIns="0" rtlCol="0" anchor="ctr">
+            <a:noAutofit/>
+          </a:bodyPr>
+          <a:lstStyle/>
+          <a:p>
+            <a:pPr algn="l">
+              <a:lnSpc>
+                <a:spcPct val="100000"/>
+              </a:lnSpc>
+              <a:spcAft>
+                <a:spcPts val="200"/>
+              </a:spcAft>
+            </a:pPr>
+            <a:r>
+              <a:rPr sz="1120">
                 <a:solidFill>
                   <a:srgbClr val="2D2D2D"/>
                 </a:solidFill>
-                <a:latin typeface="Calibri" pitchFamily="34" charset="0"/>
-                <a:ea typeface="Calibri" pitchFamily="34" charset="-122"/>
-                <a:cs typeface="Calibri" pitchFamily="34" charset="-120"/>
-              </a:rPr>
-              <a:t>Formalizing the Z1 three-tier parameter governance hierarchy as a generalizable framework for token economic design. The paper will demonstrate how treating parameter mutability as a first-class design primitive creates measurable governance attack resistance.</a:t>
-            </a:r>
-            <a:endParaRPr lang="en-US" sz="1200" dirty="0"/>
+                <a:latin typeface="Calibri"/>
+              </a:rPr>
+              <a:t>Formalize Z1's tiered parameter-lock architecture as a reusable framework for safe parameter mutability. The paper would use Z1 and the simulation evidence as the principal case study.</a:t>
+            </a:r>
           </a:p>
         </p:txBody>
       </p:sp>
@@ -2909,7 +3041,7 @@
           </a:effectLst>
         </p:spPr>
         <p:txBody>
-          <a:bodyPr/>
+          <a:bodyPr wrap="square"/>
           <a:p/>
         </p:txBody>
       </p:sp>
@@ -2931,24 +3063,28 @@
           <a:ln/>
         </p:spPr>
         <p:txBody>
-          <a:bodyPr wrap="square" lIns="0" tIns="0" rIns="0" bIns="0" rtlCol="0" anchor="ctr"/>
-          <a:lstStyle/>
-          <a:p>
-            <a:pPr indent="0" marL="0">
-              <a:buNone/>
-            </a:pPr>
-            <a:r>
-              <a:rPr lang="en-US" sz="1200" b="1" dirty="0">
+          <a:bodyPr wrap="square" lIns="0" tIns="0" rIns="0" bIns="0" rtlCol="0" anchor="ctr">
+            <a:noAutofit/>
+          </a:bodyPr>
+          <a:lstStyle/>
+          <a:p>
+            <a:pPr algn="l">
+              <a:lnSpc>
+                <a:spcPct val="100000"/>
+              </a:lnSpc>
+              <a:spcAft>
+                <a:spcPts val="200"/>
+              </a:spcAft>
+            </a:pPr>
+            <a:r>
+              <a:rPr sz="1200" b="1">
                 <a:solidFill>
                   <a:srgbClr val="2EAA56"/>
                 </a:solidFill>
-                <a:latin typeface="Calibri" pitchFamily="34" charset="0"/>
-                <a:ea typeface="Calibri" pitchFamily="34" charset="-122"/>
-                <a:cs typeface="Calibri" pitchFamily="34" charset="-120"/>
-              </a:rPr>
-              <a:t>Why this is publishable</a:t>
-            </a:r>
-            <a:endParaRPr lang="en-US" sz="1200" dirty="0"/>
+                <a:latin typeface="Calibri"/>
+              </a:rPr>
+              <a:t>Why the topic is publishable</a:t>
+            </a:r>
           </a:p>
         </p:txBody>
       </p:sp>
@@ -2970,74 +3106,85 @@
           <a:ln/>
         </p:spPr>
         <p:txBody>
-          <a:bodyPr wrap="square" rtlCol="0" anchor="t"/>
-          <a:lstStyle/>
-          <a:p>
-            <a:pPr marL="342900" indent="-342900">
-              <a:spcAft>
-                <a:spcPts val="400"/>
-              </a:spcAft>
-              <a:buSzPct val="100000"/>
-              <a:buChar char="•"/>
-            </a:pPr>
-            <a:r>
-              <a:t>Treating parameter mutability as a first-class design dimension is a novel approach</a:t>
-            </a:r>
-            <a:endParaRPr lang="en-US" sz="1100" dirty="0"/>
-          </a:p>
-          <a:p>
-            <a:pPr marL="342900" indent="-342900">
-              <a:spcAft>
-                <a:spcPts val="400"/>
-              </a:spcAft>
-              <a:buSzPct val="100000"/>
-              <a:buChar char="•"/>
-            </a:pPr>
-            <a:r>
-              <a:rPr lang="en-US" sz="1100" dirty="0">
+          <a:bodyPr wrap="square" rtlCol="0" anchor="t">
+            <a:noAutofit/>
+          </a:bodyPr>
+          <a:lstStyle/>
+          <a:p>
+            <a:pPr algn="l">
+              <a:lnSpc>
+                <a:spcPct val="92000"/>
+              </a:lnSpc>
+              <a:spcAft>
+                <a:spcPts val="200"/>
+              </a:spcAft>
+            </a:pPr>
+            <a:r>
+              <a:rPr sz="1030">
                 <a:solidFill>
                   <a:srgbClr val="2D2D2D"/>
                 </a:solidFill>
-              </a:rPr>
-              <a:t>Combines game theory, formal verification, and mechanism design</a:t>
-            </a:r>
-            <a:endParaRPr lang="en-US" sz="1100" dirty="0"/>
-          </a:p>
-          <a:p>
-            <a:pPr marL="342900" indent="-342900">
-              <a:spcAft>
-                <a:spcPts val="400"/>
-              </a:spcAft>
-              <a:buSzPct val="100000"/>
-              <a:buChar char="•"/>
-            </a:pPr>
-            <a:r>
-              <a:rPr lang="en-US" sz="1100" dirty="0">
+                <a:latin typeface="Calibri"/>
+              </a:rPr>
+              <a:t>• Treats parameter criticality and mutability as explicit design variables</a:t>
+            </a:r>
+          </a:p>
+          <a:p>
+            <a:pPr algn="l">
+              <a:lnSpc>
+                <a:spcPct val="92000"/>
+              </a:lnSpc>
+              <a:spcAft>
+                <a:spcPts val="200"/>
+              </a:spcAft>
+            </a:pPr>
+            <a:r>
+              <a:rPr sz="1030">
                 <a:solidFill>
                   <a:srgbClr val="2D2D2D"/>
                 </a:solidFill>
-              </a:rPr>
-              <a:t>Real case study (Z1) with simulation evidence, not just theory</a:t>
-            </a:r>
-            <a:endParaRPr lang="en-US" sz="1100" dirty="0"/>
-          </a:p>
-          <a:p>
-            <a:pPr marL="342900" indent="-342900">
-              <a:spcAft>
-                <a:spcPts val="400"/>
-              </a:spcAft>
-              <a:buSzPct val="100000"/>
-              <a:buChar char="•"/>
-            </a:pPr>
-            <a:r>
-              <a:rPr lang="en-US" sz="1100" dirty="0">
+                <a:latin typeface="Calibri"/>
+              </a:rPr>
+              <a:t>• Connects mechanism design, simulation evidence, and formal checks</a:t>
+            </a:r>
+          </a:p>
+          <a:p>
+            <a:pPr algn="l">
+              <a:lnSpc>
+                <a:spcPct val="92000"/>
+              </a:lnSpc>
+              <a:spcAft>
+                <a:spcPts val="200"/>
+              </a:spcAft>
+            </a:pPr>
+            <a:r>
+              <a:rPr sz="1030">
                 <a:solidFill>
                   <a:srgbClr val="2D2D2D"/>
                 </a:solidFill>
-              </a:rPr>
-              <a:t>Directly addresses the governance capture problem plaguing DeFi</a:t>
-            </a:r>
-            <a:endParaRPr lang="en-US" sz="1100" dirty="0"/>
+                <a:latin typeface="Calibri"/>
+              </a:rPr>
+              <a:t>• Provides a real token-economy case study</a:t>
+            </a:r>
+          </a:p>
+          <a:p>
+            <a:pPr algn="l">
+              <a:lnSpc>
+                <a:spcPct val="92000"/>
+              </a:lnSpc>
+              <a:spcAft>
+                <a:spcPts val="200"/>
+              </a:spcAft>
+            </a:pPr>
+            <a:r>
+              <a:rPr sz="1030">
+                <a:solidFill>
+                  <a:srgbClr val="2D2D2D"/>
+                </a:solidFill>
+                <a:latin typeface="Calibri"/>
+              </a:rPr>
+              <a:t>• Contributes a practical pattern for governance resilience</a:t>
+            </a:r>
           </a:p>
         </p:txBody>
       </p:sp>
@@ -3070,7 +3217,7 @@
           </a:effectLst>
         </p:spPr>
         <p:txBody>
-          <a:bodyPr/>
+          <a:bodyPr wrap="square"/>
           <a:p/>
         </p:txBody>
       </p:sp>
@@ -3092,24 +3239,28 @@
           <a:ln/>
         </p:spPr>
         <p:txBody>
-          <a:bodyPr wrap="square" lIns="0" tIns="0" rIns="0" bIns="0" rtlCol="0" anchor="ctr"/>
-          <a:lstStyle/>
-          <a:p>
-            <a:pPr indent="0" marL="0">
-              <a:buNone/>
-            </a:pPr>
-            <a:r>
-              <a:rPr lang="en-US" sz="1200" b="1" dirty="0">
+          <a:bodyPr wrap="square" lIns="0" tIns="0" rIns="0" bIns="0" rtlCol="0" anchor="ctr">
+            <a:noAutofit/>
+          </a:bodyPr>
+          <a:lstStyle/>
+          <a:p>
+            <a:pPr algn="l">
+              <a:lnSpc>
+                <a:spcPct val="100000"/>
+              </a:lnSpc>
+              <a:spcAft>
+                <a:spcPts val="200"/>
+              </a:spcAft>
+            </a:pPr>
+            <a:r>
+              <a:rPr sz="1200" b="1">
                 <a:solidFill>
                   <a:srgbClr val="2EAA56"/>
                 </a:solidFill>
-                <a:latin typeface="Calibri" pitchFamily="34" charset="0"/>
-                <a:ea typeface="Calibri" pitchFamily="34" charset="-122"/>
-                <a:cs typeface="Calibri" pitchFamily="34" charset="-120"/>
-              </a:rPr>
-              <a:t>Contributors</a:t>
-            </a:r>
-            <a:endParaRPr lang="en-US" sz="1200" dirty="0"/>
+                <a:latin typeface="Calibri"/>
+              </a:rPr>
+              <a:t>Proposed contributors</a:t>
+            </a:r>
           </a:p>
         </p:txBody>
       </p:sp>
@@ -3131,118 +3282,89 @@
           <a:ln/>
         </p:spPr>
         <p:txBody>
-          <a:bodyPr wrap="square" rtlCol="0" anchor="t"/>
-          <a:lstStyle/>
-          <a:p>
-            <a:pPr indent="0" marL="0">
-              <a:spcAft>
-                <a:spcPts val="200"/>
-              </a:spcAft>
-              <a:buNone/>
-            </a:pPr>
-            <a:r>
-              <a:rPr lang="en-US" sz="1100" b="1" dirty="0">
-                <a:solidFill>
-                  <a:srgbClr val="2D2D2D"/>
-                </a:solidFill>
-              </a:rPr>
-              <a:t>Linas Stankevicius  </a:t>
-            </a:r>
-            <a:pPr indent="0" marL="0">
-              <a:spcAft>
-                <a:spcPts val="200"/>
-              </a:spcAft>
-              <a:buNone/>
-            </a:pPr>
-            <a:r>
-              <a:rPr lang="en-US" sz="950" dirty="0">
-                <a:solidFill>
-                  <a:srgbClr val="888888"/>
-                </a:solidFill>
-              </a:rPr>
-              <a:t>2 prior publications with TokenLab</a:t>
-            </a:r>
-            <a:endParaRPr lang="en-US" sz="1100" dirty="0"/>
-          </a:p>
-          <a:p>
-            <a:pPr indent="0" marL="0">
-              <a:spcAft>
-                <a:spcPts val="200"/>
-              </a:spcAft>
-              <a:buNone/>
-            </a:pPr>
-            <a:r>
-              <a:rPr lang="en-US" sz="1100" b="1" dirty="0">
-                <a:solidFill>
-                  <a:srgbClr val="2D2D2D"/>
-                </a:solidFill>
-              </a:rPr>
-              <a:t>Nik Pletikos  </a:t>
-            </a:r>
-            <a:pPr indent="0" marL="0">
-              <a:spcAft>
-                <a:spcPts val="200"/>
-              </a:spcAft>
-              <a:buNone/>
-            </a:pPr>
-            <a:r>
-              <a:rPr lang="en-US" sz="950" dirty="0">
-                <a:solidFill>
-                  <a:srgbClr val="888888"/>
-                </a:solidFill>
-              </a:rPr>
-              <a:t>Provecto Labs</a:t>
-            </a:r>
-            <a:endParaRPr lang="en-US" sz="1100" dirty="0"/>
-          </a:p>
-          <a:p>
-            <a:pPr indent="0" marL="0">
-              <a:spcAft>
-                <a:spcPts val="200"/>
-              </a:spcAft>
-              <a:buNone/>
-            </a:pPr>
-            <a:r>
-              <a:rPr lang="en-US" sz="1100" b="1" dirty="0">
-                <a:solidFill>
-                  <a:srgbClr val="2D2D2D"/>
-                </a:solidFill>
-              </a:rPr>
-              <a:t>Dr. Stylianos Kampakis  </a:t>
-            </a:r>
-            <a:pPr indent="0" marL="0">
-              <a:spcAft>
-                <a:spcPts val="200"/>
-              </a:spcAft>
-              <a:buNone/>
-            </a:pPr>
-            <a:r>
-              <a:rPr lang="en-US" sz="950" dirty="0">
-                <a:solidFill>
-                  <a:srgbClr val="888888"/>
-                </a:solidFill>
-              </a:rPr>
-              <a:t>TokenLab, simulation engineering</a:t>
-            </a:r>
-            <a:endParaRPr lang="en-US" sz="1100" dirty="0"/>
-          </a:p>
-          <a:p>
-            <a:pPr indent="0" marL="0">
-              <a:spcAft>
-                <a:spcPts val="200"/>
-              </a:spcAft>
-              <a:buNone/>
-            </a:pPr>
-            <a:pPr indent="0" marL="0">
-              <a:spcAft>
-                <a:spcPts val="200"/>
-              </a:spcAft>
-              <a:buNone/>
-            </a:pPr>
-            <a:r>
-              <a:t>Academic Cryptography Advisor (PhD, 2011)</a:t>
-            </a:r>
-            <a:endParaRPr lang="en-US" sz="1100" dirty="0"/>
+          <a:bodyPr wrap="square" rtlCol="0" anchor="t">
+            <a:noAutofit/>
+          </a:bodyPr>
+          <a:lstStyle/>
+          <a:p>
+            <a:pPr>
+              <a:lnSpc>
+                <a:spcPct val="90000"/>
+              </a:lnSpc>
+              <a:spcAft>
+                <a:spcPts val="200"/>
+              </a:spcAft>
+            </a:pPr>
+            <a:r>
+              <a:rPr sz="900">
+                <a:latin typeface="Calibri"/>
+              </a:rPr>
+              <a:t>Linas Stankevicius — Provecto Labs</a:t>
+            </a:r>
+          </a:p>
+          <a:p>
+            <a:pPr>
+              <a:lnSpc>
+                <a:spcPct val="90000"/>
+              </a:lnSpc>
+              <a:spcAft>
+                <a:spcPts val="200"/>
+              </a:spcAft>
+            </a:pPr>
+            <a:r>
+              <a:rPr sz="900">
+                <a:latin typeface="Calibri"/>
+              </a:rPr>
+              <a:t>Nik Pletikos — Provecto Labs</a:t>
+            </a:r>
+          </a:p>
+          <a:p>
+            <a:pPr>
+              <a:lnSpc>
+                <a:spcPct val="90000"/>
+              </a:lnSpc>
+              <a:spcAft>
+                <a:spcPts val="200"/>
+              </a:spcAft>
+            </a:pPr>
+            <a:r>
+              <a:rPr sz="900">
+                <a:latin typeface="Calibri"/>
+              </a:rPr>
+              <a:t>Dr. Stylianos Kampakis — TokenLab</a:t>
+            </a:r>
+          </a:p>
+          <a:p>
+            <a:pPr>
+              <a:lnSpc>
+                <a:spcPct val="90000"/>
+              </a:lnSpc>
+              <a:spcAft>
+                <a:spcPts val="200"/>
+              </a:spcAft>
+            </a:pPr>
+            <a:r>
+              <a:rPr sz="900">
+                <a:latin typeface="Calibri"/>
+              </a:rPr>
+              <a:t>Dr. Theodosis Mourouzis — JBBA</a:t>
+            </a:r>
+          </a:p>
+          <a:p>
+            <a:pPr>
+              <a:lnSpc>
+                <a:spcPct val="90000"/>
+              </a:lnSpc>
+              <a:spcAft>
+                <a:spcPts val="200"/>
+              </a:spcAft>
+            </a:pPr>
+            <a:r>
+              <a:rPr sz="900">
+                <a:latin typeface="Calibri"/>
+              </a:rPr>
+              <a:t>Formal methods contributor — to be confirmed</a:t>
+            </a:r>
           </a:p>
         </p:txBody>
       </p:sp>
@@ -3340,7 +3462,7 @@
           </a:ln>
         </p:spPr>
         <p:txBody>
-          <a:bodyPr/>
+          <a:bodyPr wrap="square"/>
           <a:p/>
         </p:txBody>
       </p:sp>
@@ -3433,24 +3555,28 @@
           <a:ln/>
         </p:spPr>
         <p:txBody>
-          <a:bodyPr wrap="square" lIns="0" tIns="0" rIns="0" bIns="0" rtlCol="0" anchor="ctr"/>
-          <a:lstStyle/>
-          <a:p>
-            <a:pPr indent="0" marL="0">
-              <a:buNone/>
-            </a:pPr>
-            <a:r>
-              <a:rPr lang="en-US" sz="2200" b="1" dirty="0">
+          <a:bodyPr wrap="square" lIns="0" tIns="0" rIns="0" bIns="0" rtlCol="0" anchor="ctr">
+            <a:noAutofit/>
+          </a:bodyPr>
+          <a:lstStyle/>
+          <a:p>
+            <a:pPr algn="l">
+              <a:lnSpc>
+                <a:spcPct val="100000"/>
+              </a:lnSpc>
+              <a:spcAft>
+                <a:spcPts val="0"/>
+              </a:spcAft>
+            </a:pPr>
+            <a:r>
+              <a:rPr sz="2200" b="1">
                 <a:solidFill>
                   <a:srgbClr val="2D2D2D"/>
                 </a:solidFill>
-                <a:latin typeface="Calibri" pitchFamily="34" charset="0"/>
-                <a:ea typeface="Calibri" pitchFamily="34" charset="-122"/>
-                <a:cs typeface="Calibri" pitchFamily="34" charset="-120"/>
+                <a:latin typeface="Calibri"/>
               </a:rPr>
               <a:t>What Was Delivered</a:t>
             </a:r>
-            <a:endParaRPr lang="en-US" sz="2200" dirty="0"/>
           </a:p>
         </p:txBody>
       </p:sp>
@@ -3477,7 +3603,7 @@
           </a:ln>
         </p:spPr>
         <p:txBody>
-          <a:bodyPr/>
+          <a:bodyPr wrap="square"/>
           <a:p/>
         </p:txBody>
       </p:sp>
@@ -3549,7 +3675,7 @@
           </a:effectLst>
         </p:spPr>
         <p:txBody>
-          <a:bodyPr/>
+          <a:bodyPr wrap="square"/>
           <a:p/>
         </p:txBody>
       </p:sp>
@@ -3610,100 +3736,123 @@
           <a:ln/>
         </p:spPr>
         <p:txBody>
-          <a:bodyPr wrap="square" rtlCol="0" anchor="t"/>
-          <a:lstStyle/>
-          <a:p>
-            <a:pPr marL="342900" indent="-342900">
-              <a:spcAft>
-                <a:spcPts val="400"/>
-              </a:spcAft>
-              <a:buSzPct val="100000"/>
-              <a:buChar char="•"/>
-            </a:pPr>
-            <a:r>
-              <a:t>Vault inventory: 57 mechanisms, 44 policies, 29 gates, 67 parameters</a:t>
-            </a:r>
-            <a:endParaRPr lang="en-US" sz="1200" dirty="0"/>
-          </a:p>
-          <a:p>
-            <a:pPr marL="342900" indent="-342900">
-              <a:spcAft>
-                <a:spcPts val="400"/>
-              </a:spcAft>
-              <a:buSzPct val="100000"/>
-              <a:buChar char="•"/>
-            </a:pPr>
-            <a:r>
-              <a:rPr lang="en-US" sz="1200" dirty="0">
+          <a:bodyPr wrap="square" rtlCol="0" anchor="t">
+            <a:noAutofit/>
+          </a:bodyPr>
+          <a:lstStyle/>
+          <a:p>
+            <a:pPr algn="l">
+              <a:lnSpc>
+                <a:spcPct val="95000"/>
+              </a:lnSpc>
+              <a:spcAft>
+                <a:spcPts val="200"/>
+              </a:spcAft>
+            </a:pPr>
+            <a:r>
+              <a:rPr sz="1120">
                 <a:solidFill>
                   <a:srgbClr val="2D2D2D"/>
                 </a:solidFill>
-              </a:rPr>
-              <a:t>8 Value Creation Mechanisms mapped with interaction matrix</a:t>
-            </a:r>
-            <a:endParaRPr lang="en-US" sz="1200" dirty="0"/>
-          </a:p>
-          <a:p>
-            <a:pPr marL="342900" indent="-342900">
-              <a:spcAft>
-                <a:spcPts val="400"/>
-              </a:spcAft>
-              <a:buSzPct val="100000"/>
-              <a:buChar char="•"/>
-            </a:pPr>
-            <a:r>
-              <a:t>7 conservation invariants formally defined</a:t>
-            </a:r>
-            <a:endParaRPr lang="en-US" sz="1200" dirty="0"/>
-          </a:p>
-          <a:p>
-            <a:pPr marL="342900" indent="-342900">
-              <a:spcAft>
-                <a:spcPts val="400"/>
-              </a:spcAft>
-              <a:buSzPct val="100000"/>
-              <a:buChar char="•"/>
-            </a:pPr>
-            <a:r>
-              <a:rPr lang="en-US" sz="1200" dirty="0">
+                <a:latin typeface="Calibri"/>
+              </a:rPr>
+              <a:t>• 57 mechanisms, 44 policies, 29 gates, and 67 parameters in the vault inventory</a:t>
+            </a:r>
+          </a:p>
+          <a:p>
+            <a:pPr algn="l">
+              <a:lnSpc>
+                <a:spcPct val="95000"/>
+              </a:lnSpc>
+              <a:spcAft>
+                <a:spcPts val="200"/>
+              </a:spcAft>
+            </a:pPr>
+            <a:r>
+              <a:rPr sz="1120">
                 <a:solidFill>
                   <a:srgbClr val="2D2D2D"/>
                 </a:solidFill>
-              </a:rPr>
-              <a:t>4 existential + 5 structural failure modes catalogued</a:t>
-            </a:r>
-            <a:endParaRPr lang="en-US" sz="1200" dirty="0"/>
-          </a:p>
-          <a:p>
-            <a:pPr marL="342900" indent="-342900">
-              <a:spcAft>
-                <a:spcPts val="400"/>
-              </a:spcAft>
-              <a:buSzPct val="100000"/>
-              <a:buChar char="•"/>
-            </a:pPr>
-            <a:r>
-              <a:t>6 fundamental design tensions identified</a:t>
-            </a:r>
-            <a:endParaRPr lang="en-US" sz="1200" dirty="0"/>
-          </a:p>
-          <a:p>
-            <a:pPr marL="342900" indent="-342900">
-              <a:spcAft>
-                <a:spcPts val="400"/>
-              </a:spcAft>
-              <a:buSzPct val="100000"/>
-              <a:buChar char="•"/>
-            </a:pPr>
-            <a:r>
-              <a:rPr lang="en-US" sz="1200" dirty="0">
+                <a:latin typeface="Calibri"/>
+              </a:rPr>
+              <a:t>• Eight value-creation mechanisms mapped through an interaction matrix</a:t>
+            </a:r>
+          </a:p>
+          <a:p>
+            <a:pPr algn="l">
+              <a:lnSpc>
+                <a:spcPct val="95000"/>
+              </a:lnSpc>
+              <a:spcAft>
+                <a:spcPts val="200"/>
+              </a:spcAft>
+            </a:pPr>
+            <a:r>
+              <a:rPr sz="1120">
                 <a:solidFill>
                   <a:srgbClr val="2D2D2D"/>
                 </a:solidFill>
-              </a:rPr>
-              <a:t>3-tier parameter governance hierarchy designed</a:t>
-            </a:r>
-            <a:endParaRPr lang="en-US" sz="1200" dirty="0"/>
+                <a:latin typeface="Calibri"/>
+              </a:rPr>
+              <a:t>• Accounting and conservation checks defined</a:t>
+            </a:r>
+          </a:p>
+          <a:p>
+            <a:pPr algn="l">
+              <a:lnSpc>
+                <a:spcPct val="95000"/>
+              </a:lnSpc>
+              <a:spcAft>
+                <a:spcPts val="200"/>
+              </a:spcAft>
+            </a:pPr>
+            <a:r>
+              <a:rPr sz="1120">
+                <a:solidFill>
+                  <a:srgbClr val="2D2D2D"/>
+                </a:solidFill>
+                <a:latin typeface="Calibri"/>
+              </a:rPr>
+              <a:t>• Failure modes and design trade-offs catalogued</a:t>
+            </a:r>
+          </a:p>
+          <a:p>
+            <a:pPr algn="l">
+              <a:lnSpc>
+                <a:spcPct val="95000"/>
+              </a:lnSpc>
+              <a:spcAft>
+                <a:spcPts val="200"/>
+              </a:spcAft>
+            </a:pPr>
+            <a:r>
+              <a:rPr sz="1120">
+                <a:solidFill>
+                  <a:srgbClr val="2D2D2D"/>
+                </a:solidFill>
+                <a:latin typeface="Calibri"/>
+              </a:rPr>
+              <a:t>• Three-tier parameter-lock architecture documented</a:t>
+            </a:r>
+          </a:p>
+          <a:p>
+            <a:pPr algn="l">
+              <a:lnSpc>
+                <a:spcPct val="95000"/>
+              </a:lnSpc>
+              <a:spcAft>
+                <a:spcPts val="200"/>
+              </a:spcAft>
+            </a:pPr>
+            <a:r>
+              <a:rPr sz="1120">
+                <a:solidFill>
+                  <a:srgbClr val="2D2D2D"/>
+                </a:solidFill>
+                <a:latin typeface="Calibri"/>
+              </a:rPr>
+              <a:t>• Governance and operational control pathways specified</a:t>
+            </a:r>
           </a:p>
         </p:txBody>
       </p:sp>
@@ -3736,7 +3885,7 @@
           </a:effectLst>
         </p:spPr>
         <p:txBody>
-          <a:bodyPr/>
+          <a:bodyPr wrap="square"/>
           <a:p/>
         </p:txBody>
       </p:sp>
@@ -3797,105 +3946,104 @@
           <a:ln/>
         </p:spPr>
         <p:txBody>
-          <a:bodyPr wrap="square" rtlCol="0" anchor="t"/>
-          <a:lstStyle/>
-          <a:p>
-            <a:pPr marL="342900" indent="-342900">
-              <a:spcAft>
-                <a:spcPts val="400"/>
-              </a:spcAft>
-              <a:buSzPct val="100000"/>
-              <a:buChar char="•"/>
-            </a:pPr>
-            <a:r>
-              <a:rPr lang="en-US" sz="1200" dirty="0">
+          <a:bodyPr wrap="square" rtlCol="0" anchor="t">
+            <a:noAutofit/>
+          </a:bodyPr>
+          <a:lstStyle/>
+          <a:p>
+            <a:pPr algn="l">
+              <a:lnSpc>
+                <a:spcPct val="95000"/>
+              </a:lnSpc>
+              <a:spcAft>
+                <a:spcPts val="200"/>
+              </a:spcAft>
+            </a:pPr>
+            <a:r>
+              <a:rPr sz="1120">
                 <a:solidFill>
                   <a:srgbClr val="2D2D2D"/>
                 </a:solidFill>
-              </a:rPr>
-              <a:t>3 milestones: core solvency, market dynamics, full economy</a:t>
-            </a:r>
-            <a:endParaRPr lang="en-US" sz="1200" dirty="0"/>
-          </a:p>
-          <a:p>
-            <a:pPr marL="342900" indent="-342900">
-              <a:spcAft>
-                <a:spcPts val="400"/>
-              </a:spcAft>
-              <a:buSzPct val="100000"/>
-              <a:buChar char="•"/>
-            </a:pPr>
-            <a:r>
-              <a:t>12-scenario stress grid (12 scenarios x 50 runs)</a:t>
-            </a:r>
-            <a:endParaRPr lang="en-US" sz="1200" dirty="0"/>
-          </a:p>
-          <a:p>
-            <a:pPr marL="342900" indent="-342900">
-              <a:spcAft>
-                <a:spcPts val="400"/>
-              </a:spcAft>
-              <a:buSzPct val="100000"/>
-              <a:buChar char="•"/>
-            </a:pPr>
-            <a:r>
-              <a:rPr lang="en-US" sz="1200" dirty="0">
+                <a:latin typeface="Calibri"/>
+              </a:rPr>
+              <a:t>• M1–M3 models covering core solvency, market dynamics, and resilience</a:t>
+            </a:r>
+          </a:p>
+          <a:p>
+            <a:pPr algn="l">
+              <a:lnSpc>
+                <a:spcPct val="95000"/>
+              </a:lnSpc>
+              <a:spcAft>
+                <a:spcPts val="200"/>
+              </a:spcAft>
+            </a:pPr>
+            <a:r>
+              <a:rPr sz="1120">
                 <a:solidFill>
                   <a:srgbClr val="2D2D2D"/>
                 </a:solidFill>
-              </a:rPr>
-              <a:t>Bank run and adversarial whale scenarios</a:t>
-            </a:r>
-            <a:endParaRPr lang="en-US" sz="1200" dirty="0"/>
-          </a:p>
-          <a:p>
-            <a:pPr marL="342900" indent="-342900">
-              <a:spcAft>
-                <a:spcPts val="400"/>
-              </a:spcAft>
-              <a:buSzPct val="100000"/>
-              <a:buChar char="•"/>
-            </a:pPr>
-            <a:r>
-              <a:rPr lang="en-US" sz="1200" dirty="0">
+                <a:latin typeface="Calibri"/>
+              </a:rPr>
+              <a:t>• Stress scenarios across adoption, sentiment, claims, and adversarial behavior</a:t>
+            </a:r>
+          </a:p>
+          <a:p>
+            <a:pPr algn="l">
+              <a:lnSpc>
+                <a:spcPct val="95000"/>
+              </a:lnSpc>
+              <a:spcAft>
+                <a:spcPts val="200"/>
+              </a:spcAft>
+            </a:pPr>
+            <a:r>
+              <a:rPr sz="1120">
                 <a:solidFill>
                   <a:srgbClr val="2D2D2D"/>
                 </a:solidFill>
-              </a:rPr>
-              <a:t>Full economy model with AMM, genesis vesting, campaigns</a:t>
-            </a:r>
-            <a:endParaRPr lang="en-US" sz="1200" dirty="0"/>
-          </a:p>
-          <a:p>
-            <a:pPr marL="342900" indent="-342900">
-              <a:spcAft>
-                <a:spcPts val="400"/>
-              </a:spcAft>
-              <a:buSzPct val="100000"/>
-              <a:buChar char="•"/>
-            </a:pPr>
-            <a:r>
-              <a:t>600-trial Monte Carlo baseline</a:t>
-            </a:r>
-            <a:endParaRPr lang="en-US" sz="1200" dirty="0"/>
-          </a:p>
-          <a:p>
-            <a:pPr marL="342900" indent="-342900">
-              <a:spcAft>
-                <a:spcPts val="400"/>
-              </a:spcAft>
-              <a:buSzPct val="100000"/>
-              <a:buChar char="•"/>
-            </a:pPr>
-            <a:r>
-              <a:rPr lang="en-US" sz="1200" dirty="0">
+                <a:latin typeface="Calibri"/>
+              </a:rPr>
+              <a:t>• Dynamic settlement, AMM, vesting, campaigns, and ecosystem pools</a:t>
+            </a:r>
+          </a:p>
+          <a:p>
+            <a:pPr algn="l">
+              <a:lnSpc>
+                <a:spcPct val="95000"/>
+              </a:lnSpc>
+              <a:spcAft>
+                <a:spcPts val="200"/>
+              </a:spcAft>
+            </a:pPr>
+            <a:r>
+              <a:rPr sz="1120">
                 <a:solidFill>
                   <a:srgbClr val="2D2D2D"/>
                 </a:solidFill>
-              </a:rPr>
-              <a:t>Conservation invariants verified every epoch</a:t>
-            </a:r>
-            <a:endParaRPr lang="en-US" sz="1200" dirty="0"/>
+                <a:latin typeface="Calibri"/>
+              </a:rPr>
+              <a:t>• Monte Carlo analysis and structured parameter sweeps</a:t>
+            </a:r>
+          </a:p>
+          <a:p>
+            <a:pPr algn="l">
+              <a:lnSpc>
+                <a:spcPct val="95000"/>
+              </a:lnSpc>
+              <a:spcAft>
+                <a:spcPts val="200"/>
+              </a:spcAft>
+            </a:pPr>
+            <a:r>
+              <a:rPr sz="1120">
+                <a:solidFill>
+                  <a:srgbClr val="2D2D2D"/>
+                </a:solidFill>
+                <a:latin typeface="Calibri"/>
+              </a:rPr>
+              <a:t>• Conservation and accounting checks executed every epoch</a:t>
+            </a:r>
           </a:p>
         </p:txBody>
       </p:sp>
@@ -3949,16 +4097,28 @@
           <a:ln/>
         </p:spPr>
         <p:txBody>
-          <a:bodyPr wrap="square" lIns="0" tIns="0" rIns="0" bIns="0" rtlCol="0" anchor="ctr"/>
-          <a:lstStyle/>
-          <a:p>
-            <a:pPr indent="0" marL="0">
-              <a:buNone/>
-            </a:pPr>
-            <a:r>
-              <a:t>Bootstrap Dependency and Preliminary Breakeven Conditions</a:t>
-            </a:r>
-            <a:endParaRPr lang="en-US" sz="2200" dirty="0"/>
+          <a:bodyPr wrap="square" lIns="0" tIns="0" rIns="0" bIns="0" rtlCol="0" anchor="ctr">
+            <a:noAutofit/>
+          </a:bodyPr>
+          <a:lstStyle/>
+          <a:p>
+            <a:pPr algn="l">
+              <a:lnSpc>
+                <a:spcPct val="100000"/>
+              </a:lnSpc>
+              <a:spcAft>
+                <a:spcPts val="0"/>
+              </a:spcAft>
+            </a:pPr>
+            <a:r>
+              <a:rPr sz="2200" b="1">
+                <a:solidFill>
+                  <a:srgbClr val="2D2D2D"/>
+                </a:solidFill>
+                <a:latin typeface="Calibri"/>
+              </a:rPr>
+              <a:t>Planned Bootstrap Path to Self-Sustainability</a:t>
+            </a:r>
           </a:p>
         </p:txBody>
       </p:sp>
@@ -3985,7 +4145,7 @@
           </a:ln>
         </p:spPr>
         <p:txBody>
-          <a:bodyPr/>
+          <a:bodyPr wrap="square"/>
           <a:p/>
         </p:txBody>
       </p:sp>
@@ -4057,7 +4217,7 @@
           </a:effectLst>
         </p:spPr>
         <p:txBody>
-          <a:bodyPr/>
+          <a:bodyPr wrap="square"/>
           <a:p/>
         </p:txBody>
       </p:sp>
@@ -4079,16 +4239,28 @@
           <a:ln/>
         </p:spPr>
         <p:txBody>
-          <a:bodyPr wrap="square" lIns="0" tIns="0" rIns="0" bIns="0" rtlCol="0" anchor="t"/>
-          <a:lstStyle/>
-          <a:p>
-            <a:pPr indent="0" marL="0">
-              <a:buNone/>
-            </a:pPr>
-            <a:r>
-              <a:t>Like all major protocols, the Z1 economy utilizes a planned genesis subsidy to bootstrap initial operations. Organic revenue is designed to scale alongside platform utility.</a:t>
-            </a:r>
-            <a:endParaRPr lang="en-US" sz="1300" dirty="0"/>
+          <a:bodyPr wrap="square" lIns="0" tIns="0" rIns="0" bIns="0" rtlCol="0" anchor="ctr">
+            <a:noAutofit/>
+          </a:bodyPr>
+          <a:lstStyle/>
+          <a:p>
+            <a:pPr algn="l">
+              <a:lnSpc>
+                <a:spcPct val="100000"/>
+              </a:lnSpc>
+              <a:spcAft>
+                <a:spcPts val="200"/>
+              </a:spcAft>
+            </a:pPr>
+            <a:r>
+              <a:rPr sz="1400" b="1">
+                <a:solidFill>
+                  <a:srgbClr val="2D2D2D"/>
+                </a:solidFill>
+                <a:latin typeface="Calibri"/>
+              </a:rPr>
+              <a:t>Z1 is designed to use a planned genesis subsidy while participation, utility activity, and fee capture develop.</a:t>
+            </a:r>
           </a:p>
         </p:txBody>
       </p:sp>
@@ -4110,16 +4282,28 @@
           <a:ln/>
         </p:spPr>
         <p:txBody>
-          <a:bodyPr wrap="square" lIns="0" tIns="0" rIns="0" bIns="0" rtlCol="0" anchor="t"/>
-          <a:lstStyle/>
-          <a:p>
-            <a:pPr indent="0" marL="0">
-              <a:buNone/>
-            </a:pPr>
-            <a:r>
-              <a:t>The simulation has successfully mapped this transition path, providing the business team with the exact user acquisition and utility fee targets required to achieve organic self-sustainability.</a:t>
-            </a:r>
-            <a:endParaRPr lang="en-US" sz="1300" dirty="0"/>
+          <a:bodyPr wrap="square" lIns="0" tIns="0" rIns="0" bIns="0" rtlCol="0" anchor="ctr">
+            <a:noAutofit/>
+          </a:bodyPr>
+          <a:lstStyle/>
+          <a:p>
+            <a:pPr algn="l">
+              <a:lnSpc>
+                <a:spcPct val="100000"/>
+              </a:lnSpc>
+              <a:spcAft>
+                <a:spcPts val="200"/>
+              </a:spcAft>
+            </a:pPr>
+            <a:r>
+              <a:rPr sz="1220">
+                <a:solidFill>
+                  <a:srgbClr val="2D2D2D"/>
+                </a:solidFill>
+                <a:latin typeface="Calibri"/>
+              </a:rPr>
+              <a:t>The simulation provides a framework for estimating the adoption, spending, and fee conditions required for a durable transition toward organic sustainability.</a:t>
+            </a:r>
           </a:p>
         </p:txBody>
       </p:sp>
@@ -4152,7 +4336,7 @@
           </a:effectLst>
         </p:spPr>
         <p:txBody>
-          <a:bodyPr/>
+          <a:bodyPr wrap="square"/>
           <a:p/>
         </p:txBody>
       </p:sp>
@@ -4174,24 +4358,28 @@
           <a:ln/>
         </p:spPr>
         <p:txBody>
-          <a:bodyPr wrap="square" lIns="0" tIns="0" rIns="0" bIns="0" rtlCol="0" anchor="ctr"/>
-          <a:lstStyle/>
-          <a:p>
-            <a:pPr indent="0" marL="0">
-              <a:buNone/>
-            </a:pPr>
-            <a:r>
-              <a:rPr lang="en-US" sz="1300" b="1" dirty="0">
+          <a:bodyPr wrap="square" lIns="0" tIns="0" rIns="0" bIns="0" rtlCol="0" anchor="ctr">
+            <a:noAutofit/>
+          </a:bodyPr>
+          <a:lstStyle/>
+          <a:p>
+            <a:pPr algn="l">
+              <a:lnSpc>
+                <a:spcPct val="100000"/>
+              </a:lnSpc>
+              <a:spcAft>
+                <a:spcPts val="200"/>
+              </a:spcAft>
+            </a:pPr>
+            <a:r>
+              <a:rPr sz="1300" b="1">
                 <a:solidFill>
                   <a:srgbClr val="2EAA56"/>
                 </a:solidFill>
-                <a:latin typeface="Calibri" pitchFamily="34" charset="0"/>
-                <a:ea typeface="Calibri" pitchFamily="34" charset="-122"/>
-                <a:cs typeface="Calibri" pitchFamily="34" charset="-120"/>
-              </a:rPr>
-              <a:t>What this means</a:t>
-            </a:r>
-            <a:endParaRPr lang="en-US" sz="1300" dirty="0"/>
+                <a:latin typeface="Calibri"/>
+              </a:rPr>
+              <a:t>What we learned</a:t>
+            </a:r>
           </a:p>
         </p:txBody>
       </p:sp>
@@ -4213,61 +4401,66 @@
           <a:ln/>
         </p:spPr>
         <p:txBody>
-          <a:bodyPr wrap="square" rtlCol="0" anchor="t"/>
-          <a:lstStyle/>
-          <a:p>
-            <a:pPr marL="342900" indent="-342900">
-              <a:spcAft>
-                <a:spcPts val="600"/>
-              </a:spcAft>
-              <a:buSzPct val="100000"/>
-              <a:buChar char="•"/>
-            </a:pPr>
-            <a:r>
-              <a:rPr lang="en-US" sz="1150" dirty="0">
+          <a:bodyPr wrap="square" rtlCol="0" anchor="t">
+            <a:noAutofit/>
+          </a:bodyPr>
+          <a:lstStyle/>
+          <a:p>
+            <a:pPr algn="l">
+              <a:lnSpc>
+                <a:spcPct val="95000"/>
+              </a:lnSpc>
+              <a:spcAft>
+                <a:spcPts val="200"/>
+              </a:spcAft>
+            </a:pPr>
+            <a:r>
+              <a:rPr sz="1110">
                 <a:solidFill>
                   <a:srgbClr val="2D2D2D"/>
                 </a:solidFill>
-              </a:rPr>
-              <a:t>Participation growth rate directly determines treasury survival</a:t>
-            </a:r>
-            <a:endParaRPr lang="en-US" sz="1150" dirty="0"/>
-          </a:p>
-          <a:p>
-            <a:pPr marL="342900" indent="-342900">
-              <a:spcAft>
-                <a:spcPts val="600"/>
-              </a:spcAft>
-              <a:buSzPct val="100000"/>
-              <a:buChar char="•"/>
-            </a:pPr>
-            <a:r>
-              <a:rPr lang="en-US" sz="1150" dirty="0">
+                <a:latin typeface="Calibri"/>
+              </a:rPr>
+              <a:t>• Runway depends on participation growth, utility spending, and fee capture</a:t>
+            </a:r>
+          </a:p>
+          <a:p>
+            <a:pPr algn="l">
+              <a:lnSpc>
+                <a:spcPct val="95000"/>
+              </a:lnSpc>
+              <a:spcAft>
+                <a:spcPts val="200"/>
+              </a:spcAft>
+            </a:pPr>
+            <a:r>
+              <a:rPr sz="1110">
                 <a:solidFill>
                   <a:srgbClr val="2D2D2D"/>
                 </a:solidFill>
-              </a:rPr>
-              <a:t>Fee rates and utility adoption must hit specific thresholds within a knowable timeframe</a:t>
-            </a:r>
-            <a:endParaRPr lang="en-US" sz="1150" dirty="0"/>
-          </a:p>
-          <a:p>
-            <a:pPr marL="342900" indent="-342900">
-              <a:spcAft>
-                <a:spcPts val="600"/>
-              </a:spcAft>
-              <a:buSzPct val="100000"/>
-              <a:buChar char="•"/>
-            </a:pPr>
-            <a:r>
-              <a:rPr lang="en-US" sz="1150" dirty="0">
+                <a:latin typeface="Calibri"/>
+              </a:rPr>
+              <a:t>• Treasury top-up and throttle mechanisms create time to adjust</a:t>
+            </a:r>
+          </a:p>
+          <a:p>
+            <a:pPr algn="l">
+              <a:lnSpc>
+                <a:spcPct val="95000"/>
+              </a:lnSpc>
+              <a:spcAft>
+                <a:spcPts val="200"/>
+              </a:spcAft>
+            </a:pPr>
+            <a:r>
+              <a:rPr sz="1110">
                 <a:solidFill>
                   <a:srgbClr val="2D2D2D"/>
                 </a:solidFill>
-              </a:rPr>
-              <a:t>v2 simulation must map the exact breakeven boundary</a:t>
-            </a:r>
-            <a:endParaRPr lang="en-US" sz="1150" dirty="0"/>
+                <a:latin typeface="Calibri"/>
+              </a:rPr>
+              <a:t>• Wider sweeps can map the breakeven boundary more precisely</a:t>
+            </a:r>
           </a:p>
         </p:txBody>
       </p:sp>
@@ -4300,7 +4493,7 @@
           </a:effectLst>
         </p:spPr>
         <p:txBody>
-          <a:bodyPr/>
+          <a:bodyPr wrap="square"/>
           <a:p/>
         </p:txBody>
       </p:sp>
@@ -4322,24 +4515,28 @@
           <a:ln/>
         </p:spPr>
         <p:txBody>
-          <a:bodyPr wrap="square" lIns="0" tIns="0" rIns="0" bIns="0" rtlCol="0" anchor="ctr"/>
-          <a:lstStyle/>
-          <a:p>
-            <a:pPr indent="0" marL="0">
-              <a:buNone/>
-            </a:pPr>
-            <a:r>
-              <a:rPr lang="en-US" sz="1300" b="1" dirty="0">
+          <a:bodyPr wrap="square" lIns="0" tIns="0" rIns="0" bIns="0" rtlCol="0" anchor="ctr">
+            <a:noAutofit/>
+          </a:bodyPr>
+          <a:lstStyle/>
+          <a:p>
+            <a:pPr algn="l">
+              <a:lnSpc>
+                <a:spcPct val="100000"/>
+              </a:lnSpc>
+              <a:spcAft>
+                <a:spcPts val="200"/>
+              </a:spcAft>
+            </a:pPr>
+            <a:r>
+              <a:rPr sz="1300" b="1">
                 <a:solidFill>
                   <a:srgbClr val="2EAA56"/>
                 </a:solidFill>
-                <a:latin typeface="Calibri" pitchFamily="34" charset="0"/>
-                <a:ea typeface="Calibri" pitchFamily="34" charset="-122"/>
-                <a:cs typeface="Calibri" pitchFamily="34" charset="-120"/>
-              </a:rPr>
-              <a:t>What it does not mean</a:t>
-            </a:r>
-            <a:endParaRPr lang="en-US" sz="1300" dirty="0"/>
+                <a:latin typeface="Calibri"/>
+              </a:rPr>
+              <a:t>What this enables</a:t>
+            </a:r>
           </a:p>
         </p:txBody>
       </p:sp>
@@ -4361,61 +4558,66 @@
           <a:ln/>
         </p:spPr>
         <p:txBody>
-          <a:bodyPr wrap="square" rtlCol="0" anchor="t"/>
-          <a:lstStyle/>
-          <a:p>
-            <a:pPr marL="342900" indent="-342900">
-              <a:spcAft>
-                <a:spcPts val="600"/>
-              </a:spcAft>
-              <a:buSzPct val="100000"/>
-              <a:buChar char="•"/>
-            </a:pPr>
-            <a:r>
-              <a:rPr lang="en-US" sz="1150" dirty="0">
+          <a:bodyPr wrap="square" rtlCol="0" anchor="t">
+            <a:noAutofit/>
+          </a:bodyPr>
+          <a:lstStyle/>
+          <a:p>
+            <a:pPr algn="l">
+              <a:lnSpc>
+                <a:spcPct val="95000"/>
+              </a:lnSpc>
+              <a:spcAft>
+                <a:spcPts val="200"/>
+              </a:spcAft>
+            </a:pPr>
+            <a:r>
+              <a:rPr sz="1110">
                 <a:solidFill>
                   <a:srgbClr val="2D2D2D"/>
                 </a:solidFill>
-              </a:rPr>
-              <a:t>The design is not broken. Every protocol bootstraps through subsidies</a:t>
-            </a:r>
-            <a:endParaRPr lang="en-US" sz="1150" dirty="0"/>
-          </a:p>
-          <a:p>
-            <a:pPr marL="342900" indent="-342900">
-              <a:spcAft>
-                <a:spcPts val="600"/>
-              </a:spcAft>
-              <a:buSzPct val="100000"/>
-              <a:buChar char="•"/>
-            </a:pPr>
-            <a:r>
-              <a:rPr lang="en-US" sz="1150" dirty="0">
+                <a:latin typeface="Calibri"/>
+              </a:rPr>
+              <a:t>• A measurable bootstrap plan rather than an open-ended subsidy</a:t>
+            </a:r>
+          </a:p>
+          <a:p>
+            <a:pPr algn="l">
+              <a:lnSpc>
+                <a:spcPct val="95000"/>
+              </a:lnSpc>
+              <a:spcAft>
+                <a:spcPts val="200"/>
+              </a:spcAft>
+            </a:pPr>
+            <a:r>
+              <a:rPr sz="1110">
                 <a:solidFill>
                   <a:srgbClr val="2D2D2D"/>
                 </a:solidFill>
-              </a:rPr>
-              <a:t>The backstop mechanisms (automated throttle, AR top-up) are correctly designed</a:t>
-            </a:r>
-            <a:endParaRPr lang="en-US" sz="1150" dirty="0"/>
-          </a:p>
-          <a:p>
-            <a:pPr marL="342900" indent="-342900">
-              <a:spcAft>
-                <a:spcPts val="600"/>
-              </a:spcAft>
-              <a:buSzPct val="100000"/>
-              <a:buChar char="•"/>
-            </a:pPr>
-            <a:r>
-              <a:rPr lang="en-US" sz="1150" dirty="0">
+                <a:latin typeface="Calibri"/>
+              </a:rPr>
+              <a:t>• Operating targets that can be updated as real behavior arrives</a:t>
+            </a:r>
+          </a:p>
+          <a:p>
+            <a:pPr algn="l">
+              <a:lnSpc>
+                <a:spcPct val="95000"/>
+              </a:lnSpc>
+              <a:spcAft>
+                <a:spcPts val="200"/>
+              </a:spcAft>
+            </a:pPr>
+            <a:r>
+              <a:rPr sz="1110">
                 <a:solidFill>
                   <a:srgbClr val="2D2D2D"/>
                 </a:solidFill>
-              </a:rPr>
-              <a:t>The deficit is quantifiable and manageable with the right adoption trajectory</a:t>
-            </a:r>
-            <a:endParaRPr lang="en-US" sz="1150" dirty="0"/>
+                <a:latin typeface="Calibri"/>
+              </a:rPr>
+              <a:t>• A controlled transition from model assumptions to empirical policy</a:t>
+            </a:r>
           </a:p>
         </p:txBody>
       </p:sp>
@@ -4469,16 +4671,28 @@
           <a:ln/>
         </p:spPr>
         <p:txBody>
-          <a:bodyPr wrap="square" lIns="0" tIns="0" rIns="0" bIns="0" rtlCol="0" anchor="ctr"/>
-          <a:lstStyle/>
-          <a:p>
-            <a:pPr indent="0" marL="0">
-              <a:buNone/>
-            </a:pPr>
-            <a:r>
-              <a:t>Operational Solvency &amp; Control System</a:t>
-            </a:r>
-            <a:endParaRPr lang="en-US" sz="2200" dirty="0"/>
+          <a:bodyPr wrap="square" lIns="0" tIns="0" rIns="0" bIns="0" rtlCol="0" anchor="ctr">
+            <a:noAutofit/>
+          </a:bodyPr>
+          <a:lstStyle/>
+          <a:p>
+            <a:pPr algn="l">
+              <a:lnSpc>
+                <a:spcPct val="100000"/>
+              </a:lnSpc>
+              <a:spcAft>
+                <a:spcPts val="0"/>
+              </a:spcAft>
+            </a:pPr>
+            <a:r>
+              <a:rPr sz="2200" b="1">
+                <a:solidFill>
+                  <a:srgbClr val="2D2D2D"/>
+                </a:solidFill>
+                <a:latin typeface="Calibri"/>
+              </a:rPr>
+              <a:t>A Viable Operating Region Has Been Identified</a:t>
+            </a:r>
           </a:p>
         </p:txBody>
       </p:sp>
@@ -4505,7 +4719,7 @@
           </a:ln>
         </p:spPr>
         <p:txBody>
-          <a:bodyPr/>
+          <a:bodyPr wrap="square"/>
           <a:p/>
         </p:txBody>
       </p:sp>
@@ -4577,7 +4791,7 @@
           </a:effectLst>
         </p:spPr>
         <p:txBody>
-          <a:bodyPr/>
+          <a:bodyPr wrap="square"/>
           <a:p/>
         </p:txBody>
       </p:sp>
@@ -4599,16 +4813,28 @@
           <a:ln/>
         </p:spPr>
         <p:txBody>
-          <a:bodyPr wrap="square" lIns="0" tIns="0" rIns="0" bIns="0" rtlCol="0" anchor="ctr"/>
-          <a:lstStyle/>
-          <a:p>
-            <a:pPr indent="0" marL="0">
-              <a:buNone/>
-            </a:pPr>
-            <a:r>
-              <a:t>Under baseline parameters, 95% of randomized runs remained above the solvency floor. Fixed-settlement-ratio adversarial runs failed, while the dynamic settlement controller successfully maintained solvency.</a:t>
-            </a:r>
-            <a:endParaRPr lang="en-US" sz="1300" dirty="0"/>
+          <a:bodyPr wrap="square" lIns="0" tIns="0" rIns="0" bIns="0" rtlCol="0" anchor="ctr">
+            <a:noAutofit/>
+          </a:bodyPr>
+          <a:lstStyle/>
+          <a:p>
+            <a:pPr algn="l">
+              <a:lnSpc>
+                <a:spcPct val="100000"/>
+              </a:lnSpc>
+              <a:spcAft>
+                <a:spcPts val="200"/>
+              </a:spcAft>
+            </a:pPr>
+            <a:r>
+              <a:rPr sz="1300" b="1">
+                <a:solidFill>
+                  <a:srgbClr val="2D2D2D"/>
+                </a:solidFill>
+                <a:latin typeface="Calibri"/>
+              </a:rPr>
+              <a:t>Most baseline randomized runs remained above the solvency floor, and the dynamic settlement controller materially improved resilience under stress. Settlement ratio emerged as the strongest operational lever, alongside claim rate, vesting profile, utility recirculation, and fee capture.</a:t>
+            </a:r>
           </a:p>
         </p:txBody>
       </p:sp>
@@ -4641,7 +4867,7 @@
           </a:effectLst>
         </p:spPr>
         <p:txBody>
-          <a:bodyPr/>
+          <a:bodyPr wrap="square"/>
           <a:p/>
         </p:txBody>
       </p:sp>
@@ -4663,16 +4889,28 @@
           <a:ln/>
         </p:spPr>
         <p:txBody>
-          <a:bodyPr wrap="square" lIns="0" tIns="0" rIns="0" bIns="0" rtlCol="0" anchor="ctr"/>
-          <a:lstStyle/>
-          <a:p>
-            <a:pPr indent="0" marL="0">
-              <a:buNone/>
-            </a:pPr>
-            <a:r>
-              <a:t>Operational Advantage</a:t>
-            </a:r>
-            <a:endParaRPr lang="en-US" sz="1300" dirty="0"/>
+          <a:bodyPr wrap="square" lIns="0" tIns="0" rIns="0" bIns="0" rtlCol="0" anchor="ctr">
+            <a:noAutofit/>
+          </a:bodyPr>
+          <a:lstStyle/>
+          <a:p>
+            <a:pPr algn="l">
+              <a:lnSpc>
+                <a:spcPct val="100000"/>
+              </a:lnSpc>
+              <a:spcAft>
+                <a:spcPts val="200"/>
+              </a:spcAft>
+            </a:pPr>
+            <a:r>
+              <a:rPr sz="1300" b="1">
+                <a:solidFill>
+                  <a:srgbClr val="2EAA56"/>
+                </a:solidFill>
+                <a:latin typeface="Calibri"/>
+              </a:rPr>
+              <a:t>Operational advantage</a:t>
+            </a:r>
           </a:p>
         </p:txBody>
       </p:sp>
@@ -4694,64 +4932,85 @@
           <a:ln/>
         </p:spPr>
         <p:txBody>
-          <a:bodyPr wrap="square" rtlCol="0" anchor="t"/>
-          <a:lstStyle/>
-          <a:p>
-            <a:pPr marL="342900" indent="-342900">
-              <a:spcAft>
-                <a:spcPts val="600"/>
-              </a:spcAft>
-              <a:buSzPct val="100000"/>
-              <a:buChar char="•"/>
-            </a:pPr>
-            <a:r>
-              <a:t>The settlement ratio serves as the primary operational lever for managing system stability under market volatility.</a:t>
-            </a:r>
-            <a:endParaRPr lang="en-US" sz="1200" dirty="0"/>
-          </a:p>
-          <a:p>
-            <a:pPr marL="342900" indent="-342900">
-              <a:spcAft>
-                <a:spcPts val="600"/>
-              </a:spcAft>
-              <a:buSzPct val="100000"/>
-              <a:buChar char="•"/>
-            </a:pPr>
-            <a:r>
-              <a:t>The optimization engine has mapped the boundaries of the safe operating zone, indicating that the system remains stable under baseline conditions.</a:t>
-            </a:r>
-            <a:endParaRPr lang="en-US" sz="1200" dirty="0"/>
-          </a:p>
-          <a:p>
-            <a:pPr marL="342900" indent="-342900">
-              <a:spcAft>
-                <a:spcPts val="600"/>
-              </a:spcAft>
-              <a:buSzPct val="100000"/>
-              <a:buChar char="•"/>
-            </a:pPr>
-            <a:r>
-              <a:t>This sensitivity simplifies ongoing risk management, allowing the operator to adjust the system parameters proactively.</a:t>
-            </a:r>
-            <a:endParaRPr lang="en-US" sz="1200" dirty="0"/>
-          </a:p>
-          <a:p>
-            <a:pPr marL="342900" indent="-342900">
-              <a:spcAft>
-                <a:spcPts val="600"/>
-              </a:spcAft>
-              <a:buSzPct val="100000"/>
-              <a:buChar char="•"/>
-            </a:pPr>
-            <a:r>
-              <a:rPr lang="en-US" sz="1200" dirty="0">
+          <a:bodyPr wrap="square" rtlCol="0" anchor="t">
+            <a:noAutofit/>
+          </a:bodyPr>
+          <a:lstStyle/>
+          <a:p>
+            <a:pPr algn="l">
+              <a:lnSpc>
+                <a:spcPct val="95000"/>
+              </a:lnSpc>
+              <a:spcAft>
+                <a:spcPts val="200"/>
+              </a:spcAft>
+            </a:pPr>
+            <a:r>
+              <a:rPr sz="1140">
                 <a:solidFill>
                   <a:srgbClr val="2D2D2D"/>
                 </a:solidFill>
-              </a:rPr>
-              <a:t>v2 simulation must explore the full range of this parameter, not just the optimizer's selection</a:t>
-            </a:r>
-            <a:endParaRPr lang="en-US" sz="1200" dirty="0"/>
+                <a:latin typeface="Calibri"/>
+              </a:rPr>
+              <a:t>• Operators can focus on a small set of high-sensitivity controls</a:t>
+            </a:r>
+          </a:p>
+          <a:p>
+            <a:pPr algn="l">
+              <a:lnSpc>
+                <a:spcPct val="95000"/>
+              </a:lnSpc>
+              <a:spcAft>
+                <a:spcPts val="200"/>
+              </a:spcAft>
+            </a:pPr>
+            <a:r>
+              <a:rPr sz="1140">
+                <a:solidFill>
+                  <a:srgbClr val="2D2D2D"/>
+                </a:solidFill>
+                <a:latin typeface="Calibri"/>
+              </a:rPr>
+              <a:t>• Dynamic settlement control responds more effectively than a fixed ratio</a:t>
+            </a:r>
+          </a:p>
+          <a:p>
+            <a:pPr algn="l">
+              <a:lnSpc>
+                <a:spcPct val="95000"/>
+              </a:lnSpc>
+              <a:spcAft>
+                <a:spcPts val="200"/>
+              </a:spcAft>
+            </a:pPr>
+            <a:r>
+              <a:rPr sz="1140">
+                <a:solidFill>
+                  <a:srgbClr val="2D2D2D"/>
+                </a:solidFill>
+                <a:latin typeface="Calibri"/>
+              </a:rPr>
+              <a:t>• Guardrails and early-warning metrics can support proactive adjustment</a:t>
+            </a:r>
+          </a:p>
+          <a:p>
+            <a:pPr algn="l">
+              <a:lnSpc>
+                <a:spcPct val="95000"/>
+              </a:lnSpc>
+              <a:spcAft>
+                <a:spcPts val="200"/>
+              </a:spcAft>
+            </a:pPr>
+            <a:r>
+              <a:rPr sz="1140">
+                <a:solidFill>
+                  <a:srgbClr val="2D2D2D"/>
+                </a:solidFill>
+                <a:latin typeface="Calibri"/>
+              </a:rPr>
+              <a:t>• The next phase should map safe ranges, not rely on one optimized point</a:t>
+            </a:r>
           </a:p>
         </p:txBody>
       </p:sp>
@@ -4805,16 +5064,28 @@
           <a:ln/>
         </p:spPr>
         <p:txBody>
-          <a:bodyPr wrap="square" lIns="0" tIns="0" rIns="0" bIns="0" rtlCol="0" anchor="ctr"/>
-          <a:lstStyle/>
-          <a:p>
-            <a:pPr indent="0" marL="0">
-              <a:buNone/>
-            </a:pPr>
-            <a:r>
-              <a:t>Six Design Tensions and Scale/Regulatory Hypotheses</a:t>
-            </a:r>
-            <a:endParaRPr lang="en-US" sz="2200" dirty="0"/>
+          <a:bodyPr wrap="square" lIns="0" tIns="0" rIns="0" bIns="0" rtlCol="0" anchor="ctr">
+            <a:noAutofit/>
+          </a:bodyPr>
+          <a:lstStyle/>
+          <a:p>
+            <a:pPr algn="l">
+              <a:lnSpc>
+                <a:spcPct val="100000"/>
+              </a:lnSpc>
+              <a:spcAft>
+                <a:spcPts val="0"/>
+              </a:spcAft>
+            </a:pPr>
+            <a:r>
+              <a:rPr sz="2200" b="1">
+                <a:solidFill>
+                  <a:srgbClr val="2D2D2D"/>
+                </a:solidFill>
+                <a:latin typeface="Calibri"/>
+              </a:rPr>
+              <a:t>Key Design Considerations to Carry Forward</a:t>
+            </a:r>
           </a:p>
         </p:txBody>
       </p:sp>
@@ -4841,7 +5112,7 @@
           </a:ln>
         </p:spPr>
         <p:txBody>
-          <a:bodyPr/>
+          <a:bodyPr wrap="square"/>
           <a:p/>
         </p:txBody>
       </p:sp>
@@ -4902,24 +5173,28 @@
           <a:ln/>
         </p:spPr>
         <p:txBody>
-          <a:bodyPr wrap="square" lIns="0" tIns="0" rIns="0" bIns="0" rtlCol="0" anchor="ctr"/>
-          <a:lstStyle/>
-          <a:p>
-            <a:pPr indent="0" marL="0">
-              <a:buNone/>
-            </a:pPr>
-            <a:r>
-              <a:rPr lang="en-US" sz="1200" i="1" dirty="0">
+          <a:bodyPr wrap="square" lIns="0" tIns="0" rIns="0" bIns="0" rtlCol="0" anchor="ctr">
+            <a:noAutofit/>
+          </a:bodyPr>
+          <a:lstStyle/>
+          <a:p>
+            <a:pPr algn="l">
+              <a:lnSpc>
+                <a:spcPct val="100000"/>
+              </a:lnSpc>
+              <a:spcAft>
+                <a:spcPts val="200"/>
+              </a:spcAft>
+            </a:pPr>
+            <a:r>
+              <a:rPr sz="1200">
                 <a:solidFill>
                   <a:srgbClr val="888888"/>
                 </a:solidFill>
-                <a:latin typeface="Calibri" pitchFamily="34" charset="0"/>
-                <a:ea typeface="Calibri" pitchFamily="34" charset="-122"/>
-                <a:cs typeface="Calibri" pitchFamily="34" charset="-120"/>
-              </a:rPr>
-              <a:t>The specification surfaced seven fundamental tensions between system objectives. These are not bugs or miscalibrations. They are structural tradeoffs that require conscious design decisions.</a:t>
-            </a:r>
-            <a:endParaRPr lang="en-US" sz="1200" dirty="0"/>
+                <a:latin typeface="Calibri"/>
+              </a:rPr>
+              <a:t>The specification and simulations surfaced several design trade-offs. These are normal choices to resolve through calibration, policy, and product design—not signs that the architecture is failing.</a:t>
+            </a:r>
           </a:p>
         </p:txBody>
       </p:sp>
@@ -4943,7 +5218,7 @@
           <a:ln/>
         </p:spPr>
         <p:txBody>
-          <a:bodyPr/>
+          <a:bodyPr wrap="square"/>
           <a:p/>
         </p:txBody>
       </p:sp>
@@ -4965,24 +5240,28 @@
           <a:ln/>
         </p:spPr>
         <p:txBody>
-          <a:bodyPr wrap="square" lIns="0" tIns="0" rIns="0" bIns="0" rtlCol="0" anchor="ctr"/>
-          <a:lstStyle/>
-          <a:p>
-            <a:pPr indent="0" marL="0">
-              <a:buNone/>
-            </a:pPr>
-            <a:r>
-              <a:rPr lang="en-US" sz="1200" dirty="0">
+          <a:bodyPr wrap="square" lIns="0" tIns="0" rIns="0" bIns="0" rtlCol="0" anchor="ctr">
+            <a:noAutofit/>
+          </a:bodyPr>
+          <a:lstStyle/>
+          <a:p>
+            <a:pPr algn="l">
+              <a:lnSpc>
+                <a:spcPct val="100000"/>
+              </a:lnSpc>
+              <a:spcAft>
+                <a:spcPts val="200"/>
+              </a:spcAft>
+            </a:pPr>
+            <a:r>
+              <a:rPr sz="1200">
                 <a:solidFill>
                   <a:srgbClr val="2D2D2D"/>
                 </a:solidFill>
-                <a:latin typeface="Calibri" pitchFamily="34" charset="0"/>
-                <a:ea typeface="Calibri" pitchFamily="34" charset="-122"/>
-                <a:cs typeface="Calibri" pitchFamily="34" charset="-120"/>
-              </a:rPr>
-              <a:t>Growing participation drains the reserve</a:t>
-            </a:r>
-            <a:endParaRPr lang="en-US" sz="1200" dirty="0"/>
+                <a:latin typeface="Calibri"/>
+              </a:rPr>
+              <a:t>Participation growth increases reserve demand</a:t>
+            </a:r>
           </a:p>
         </p:txBody>
       </p:sp>
@@ -5006,7 +5285,7 @@
           <a:ln/>
         </p:spPr>
         <p:txBody>
-          <a:bodyPr/>
+          <a:bodyPr wrap="square"/>
           <a:p/>
         </p:txBody>
       </p:sp>
@@ -5028,24 +5307,28 @@
           <a:ln/>
         </p:spPr>
         <p:txBody>
-          <a:bodyPr wrap="square" lIns="0" tIns="0" rIns="0" bIns="0" rtlCol="0" anchor="ctr"/>
-          <a:lstStyle/>
-          <a:p>
-            <a:pPr indent="0" marL="0">
-              <a:buNone/>
-            </a:pPr>
-            <a:r>
-              <a:rPr lang="en-US" sz="1200" dirty="0">
+          <a:bodyPr wrap="square" lIns="0" tIns="0" rIns="0" bIns="0" rtlCol="0" anchor="ctr">
+            <a:noAutofit/>
+          </a:bodyPr>
+          <a:lstStyle/>
+          <a:p>
+            <a:pPr algn="l">
+              <a:lnSpc>
+                <a:spcPct val="100000"/>
+              </a:lnSpc>
+              <a:spcAft>
+                <a:spcPts val="200"/>
+              </a:spcAft>
+            </a:pPr>
+            <a:r>
+              <a:rPr sz="1200">
                 <a:solidFill>
                   <a:srgbClr val="2D2D2D"/>
                 </a:solidFill>
-                <a:latin typeface="Calibri" pitchFamily="34" charset="0"/>
-                <a:ea typeface="Calibri" pitchFamily="34" charset="-122"/>
-                <a:cs typeface="Calibri" pitchFamily="34" charset="-120"/>
-              </a:rPr>
-              <a:t>Utility spending competes with governance</a:t>
-            </a:r>
-            <a:endParaRPr lang="en-US" sz="1200" dirty="0"/>
+                <a:latin typeface="Calibri"/>
+              </a:rPr>
+              <a:t>Utility and governance incentives need coordinated design</a:t>
+            </a:r>
           </a:p>
         </p:txBody>
       </p:sp>
@@ -5069,7 +5352,7 @@
           <a:ln/>
         </p:spPr>
         <p:txBody>
-          <a:bodyPr/>
+          <a:bodyPr wrap="square"/>
           <a:p/>
         </p:txBody>
       </p:sp>
@@ -5091,24 +5374,28 @@
           <a:ln/>
         </p:spPr>
         <p:txBody>
-          <a:bodyPr wrap="square" lIns="0" tIns="0" rIns="0" bIns="0" rtlCol="0" anchor="ctr"/>
-          <a:lstStyle/>
-          <a:p>
-            <a:pPr indent="0" marL="0">
-              <a:buNone/>
-            </a:pPr>
-            <a:r>
-              <a:rPr lang="en-US" sz="1200" dirty="0">
+          <a:bodyPr wrap="square" lIns="0" tIns="0" rIns="0" bIns="0" rtlCol="0" anchor="ctr">
+            <a:noAutofit/>
+          </a:bodyPr>
+          <a:lstStyle/>
+          <a:p>
+            <a:pPr algn="l">
+              <a:lnSpc>
+                <a:spcPct val="100000"/>
+              </a:lnSpc>
+              <a:spcAft>
+                <a:spcPts val="200"/>
+              </a:spcAft>
+            </a:pPr>
+            <a:r>
+              <a:rPr sz="1200">
                 <a:solidFill>
                   <a:srgbClr val="2D2D2D"/>
                 </a:solidFill>
-                <a:latin typeface="Calibri" pitchFamily="34" charset="0"/>
-                <a:ea typeface="Calibri" pitchFamily="34" charset="-122"/>
-                <a:cs typeface="Calibri" pitchFamily="34" charset="-120"/>
-              </a:rPr>
-              <a:t>Brand activation creates regulatory risk</a:t>
-            </a:r>
-            <a:endParaRPr lang="en-US" sz="1200" dirty="0"/>
+                <a:latin typeface="Calibri"/>
+              </a:rPr>
+              <a:t>Brand activation requires clear compliance controls</a:t>
+            </a:r>
           </a:p>
         </p:txBody>
       </p:sp>
@@ -5132,7 +5419,7 @@
           <a:ln/>
         </p:spPr>
         <p:txBody>
-          <a:bodyPr/>
+          <a:bodyPr wrap="square"/>
           <a:p/>
         </p:txBody>
       </p:sp>
@@ -5154,24 +5441,28 @@
           <a:ln/>
         </p:spPr>
         <p:txBody>
-          <a:bodyPr wrap="square" lIns="0" tIns="0" rIns="0" bIns="0" rtlCol="0" anchor="ctr"/>
-          <a:lstStyle/>
-          <a:p>
-            <a:pPr indent="0" marL="0">
-              <a:buNone/>
-            </a:pPr>
-            <a:r>
-              <a:rPr lang="en-US" sz="1200" dirty="0">
+          <a:bodyPr wrap="square" lIns="0" tIns="0" rIns="0" bIns="0" rtlCol="0" anchor="ctr">
+            <a:noAutofit/>
+          </a:bodyPr>
+          <a:lstStyle/>
+          <a:p>
+            <a:pPr algn="l">
+              <a:lnSpc>
+                <a:spcPct val="100000"/>
+              </a:lnSpc>
+              <a:spcAft>
+                <a:spcPts val="200"/>
+              </a:spcAft>
+            </a:pPr>
+            <a:r>
+              <a:rPr sz="1200">
                 <a:solidFill>
                   <a:srgbClr val="2D2D2D"/>
                 </a:solidFill>
-                <a:latin typeface="Calibri" pitchFamily="34" charset="0"/>
-                <a:ea typeface="Calibri" pitchFamily="34" charset="-122"/>
-                <a:cs typeface="Calibri" pitchFamily="34" charset="-120"/>
-              </a:rPr>
-              <a:t>Token velocity makes utility expensive</a:t>
-            </a:r>
-            <a:endParaRPr lang="en-US" sz="1200" dirty="0"/>
+                <a:latin typeface="Calibri"/>
+              </a:rPr>
+              <a:t>Token velocity affects utility affordability</a:t>
+            </a:r>
           </a:p>
         </p:txBody>
       </p:sp>
@@ -5195,7 +5486,7 @@
           <a:ln/>
         </p:spPr>
         <p:txBody>
-          <a:bodyPr/>
+          <a:bodyPr wrap="square"/>
           <a:p/>
         </p:txBody>
       </p:sp>
@@ -5217,24 +5508,28 @@
           <a:ln/>
         </p:spPr>
         <p:txBody>
-          <a:bodyPr wrap="square" lIns="0" tIns="0" rIns="0" bIns="0" rtlCol="0" anchor="ctr"/>
-          <a:lstStyle/>
-          <a:p>
-            <a:pPr indent="0" marL="0">
-              <a:buNone/>
-            </a:pPr>
-            <a:r>
-              <a:rPr lang="en-US" sz="1200" dirty="0">
+          <a:bodyPr wrap="square" lIns="0" tIns="0" rIns="0" bIns="0" rtlCol="0" anchor="ctr">
+            <a:noAutofit/>
+          </a:bodyPr>
+          <a:lstStyle/>
+          <a:p>
+            <a:pPr algn="l">
+              <a:lnSpc>
+                <a:spcPct val="100000"/>
+              </a:lnSpc>
+              <a:spcAft>
+                <a:spcPts val="200"/>
+              </a:spcAft>
+            </a:pPr>
+            <a:r>
+              <a:rPr sz="1200">
                 <a:solidFill>
                   <a:srgbClr val="2D2D2D"/>
                 </a:solidFill>
-                <a:latin typeface="Calibri" pitchFamily="34" charset="0"/>
-                <a:ea typeface="Calibri" pitchFamily="34" charset="-122"/>
-                <a:cs typeface="Calibri" pitchFamily="34" charset="-120"/>
-              </a:rPr>
-              <a:t>Scaling participation weakens sybil defense</a:t>
-            </a:r>
-            <a:endParaRPr lang="en-US" sz="1200" dirty="0"/>
+                <a:latin typeface="Calibri"/>
+              </a:rPr>
+              <a:t>Scale raises identity and sybil-control requirements</a:t>
+            </a:r>
           </a:p>
         </p:txBody>
       </p:sp>
@@ -5258,7 +5553,7 @@
           <a:ln/>
         </p:spPr>
         <p:txBody>
-          <a:bodyPr/>
+          <a:bodyPr wrap="square"/>
           <a:p/>
         </p:txBody>
       </p:sp>
@@ -5280,24 +5575,28 @@
           <a:ln/>
         </p:spPr>
         <p:txBody>
-          <a:bodyPr wrap="square" lIns="0" tIns="0" rIns="0" bIns="0" rtlCol="0" anchor="ctr"/>
-          <a:lstStyle/>
-          <a:p>
-            <a:pPr indent="0" marL="0">
-              <a:buNone/>
-            </a:pPr>
-            <a:r>
-              <a:rPr lang="en-US" sz="1200" dirty="0">
+          <a:bodyPr wrap="square" lIns="0" tIns="0" rIns="0" bIns="0" rtlCol="0" anchor="ctr">
+            <a:noAutofit/>
+          </a:bodyPr>
+          <a:lstStyle/>
+          <a:p>
+            <a:pPr algn="l">
+              <a:lnSpc>
+                <a:spcPct val="100000"/>
+              </a:lnSpc>
+              <a:spcAft>
+                <a:spcPts val="200"/>
+              </a:spcAft>
+            </a:pPr>
+            <a:r>
+              <a:rPr sz="1200">
                 <a:solidFill>
                   <a:srgbClr val="2D2D2D"/>
                 </a:solidFill>
-                <a:latin typeface="Calibri" pitchFamily="34" charset="0"/>
-                <a:ea typeface="Calibri" pitchFamily="34" charset="-122"/>
-                <a:cs typeface="Calibri" pitchFamily="34" charset="-120"/>
-              </a:rPr>
-              <a:t>Governance rigor causes voter fatigue</a:t>
-            </a:r>
-            <a:endParaRPr lang="en-US" sz="1200" dirty="0"/>
+                <a:latin typeface="Calibri"/>
+              </a:rPr>
+              <a:t>Governance rigor must remain usable for participants</a:t>
+            </a:r>
           </a:p>
         </p:txBody>
       </p:sp>
@@ -5321,7 +5620,7 @@
           <a:ln/>
         </p:spPr>
         <p:txBody>
-          <a:bodyPr/>
+          <a:bodyPr wrap="square"/>
           <a:p/>
         </p:txBody>
       </p:sp>
@@ -5343,24 +5642,28 @@
           <a:ln/>
         </p:spPr>
         <p:txBody>
-          <a:bodyPr wrap="square" lIns="0" tIns="0" rIns="0" bIns="0" rtlCol="0" anchor="ctr"/>
-          <a:lstStyle/>
-          <a:p>
-            <a:pPr indent="0" marL="0">
-              <a:buNone/>
-            </a:pPr>
-            <a:r>
-              <a:rPr lang="en-US" sz="1200" dirty="0">
+          <a:bodyPr wrap="square" lIns="0" tIns="0" rIns="0" bIns="0" rtlCol="0" anchor="ctr">
+            <a:noAutofit/>
+          </a:bodyPr>
+          <a:lstStyle/>
+          <a:p>
+            <a:pPr algn="l">
+              <a:lnSpc>
+                <a:spcPct val="100000"/>
+              </a:lnSpc>
+              <a:spcAft>
+                <a:spcPts val="200"/>
+              </a:spcAft>
+            </a:pPr>
+            <a:r>
+              <a:rPr sz="1200">
                 <a:solidFill>
                   <a:srgbClr val="2D2D2D"/>
                 </a:solidFill>
-                <a:latin typeface="Calibri" pitchFamily="34" charset="0"/>
-                <a:ea typeface="Calibri" pitchFamily="34" charset="-122"/>
-                <a:cs typeface="Calibri" pitchFamily="34" charset="-120"/>
-              </a:rPr>
-              <a:t>Billion-user onboarding creates cliff pressure</a:t>
-            </a:r>
-            <a:endParaRPr lang="en-US" sz="1200" dirty="0"/>
+                <a:latin typeface="Calibri"/>
+              </a:rPr>
+              <a:t>Large onboarding cohorts require vesting-wave management</a:t>
+            </a:r>
           </a:p>
         </p:txBody>
       </p:sp>
@@ -5414,24 +5717,28 @@
           <a:ln/>
         </p:spPr>
         <p:txBody>
-          <a:bodyPr wrap="square" lIns="0" tIns="0" rIns="0" bIns="0" rtlCol="0" anchor="ctr"/>
-          <a:lstStyle/>
-          <a:p>
-            <a:pPr indent="0" marL="0">
-              <a:buNone/>
-            </a:pPr>
-            <a:r>
-              <a:rPr lang="en-US" sz="2200" b="1" dirty="0">
+          <a:bodyPr wrap="square" lIns="0" tIns="0" rIns="0" bIns="0" rtlCol="0" anchor="ctr">
+            <a:noAutofit/>
+          </a:bodyPr>
+          <a:lstStyle/>
+          <a:p>
+            <a:pPr algn="l">
+              <a:lnSpc>
+                <a:spcPct val="100000"/>
+              </a:lnSpc>
+              <a:spcAft>
+                <a:spcPts val="0"/>
+              </a:spcAft>
+            </a:pPr>
+            <a:r>
+              <a:rPr sz="2200" b="1">
                 <a:solidFill>
                   <a:srgbClr val="2D2D2D"/>
                 </a:solidFill>
-                <a:latin typeface="Calibri" pitchFamily="34" charset="0"/>
-                <a:ea typeface="Calibri" pitchFamily="34" charset="-122"/>
-                <a:cs typeface="Calibri" pitchFamily="34" charset="-120"/>
-              </a:rPr>
-              <a:t>Treasury is the System's Central Nervous System</a:t>
-            </a:r>
-            <a:endParaRPr lang="en-US" sz="2200" dirty="0"/>
+                <a:latin typeface="Calibri"/>
+              </a:rPr>
+              <a:t>Treasury, Integrity, and Settlement Are the Core Control Layers</a:t>
+            </a:r>
           </a:p>
         </p:txBody>
       </p:sp>
@@ -5458,7 +5765,7 @@
           </a:ln>
         </p:spPr>
         <p:txBody>
-          <a:bodyPr/>
+          <a:bodyPr wrap="square"/>
           <a:p/>
         </p:txBody>
       </p:sp>
@@ -5530,7 +5837,7 @@
           </a:effectLst>
         </p:spPr>
         <p:txBody>
-          <a:bodyPr/>
+          <a:bodyPr wrap="square"/>
           <a:p/>
         </p:txBody>
       </p:sp>
@@ -5552,16 +5859,28 @@
           <a:ln/>
         </p:spPr>
         <p:txBody>
-          <a:bodyPr wrap="square" lIns="0" tIns="0" rIns="0" bIns="0" rtlCol="0" anchor="ctr"/>
-          <a:lstStyle/>
-          <a:p>
-            <a:pPr indent="0" marL="0">
-              <a:buNone/>
-            </a:pPr>
-            <a:r>
-              <a:t>Treasury serves as the system's central control hub, managing primary operational inflows and outflows.</a:t>
-            </a:r>
-            <a:endParaRPr lang="en-US" sz="1300" dirty="0"/>
+          <a:bodyPr wrap="square" lIns="0" tIns="0" rIns="0" bIns="0" rtlCol="0" anchor="ctr">
+            <a:noAutofit/>
+          </a:bodyPr>
+          <a:lstStyle/>
+          <a:p>
+            <a:pPr algn="l">
+              <a:lnSpc>
+                <a:spcPct val="100000"/>
+              </a:lnSpc>
+              <a:spcAft>
+                <a:spcPts val="200"/>
+              </a:spcAft>
+            </a:pPr>
+            <a:r>
+              <a:rPr sz="1300" b="1">
+                <a:solidFill>
+                  <a:srgbClr val="2D2D2D"/>
+                </a:solidFill>
+                <a:latin typeface="Calibri"/>
+              </a:rPr>
+              <a:t>Treasury is the most connected coordination hub in the Z1 economy.</a:t>
+            </a:r>
           </a:p>
         </p:txBody>
       </p:sp>
@@ -5583,87 +5902,95 @@
           <a:ln/>
         </p:spPr>
         <p:txBody>
-          <a:bodyPr wrap="square" rtlCol="0" anchor="t"/>
-          <a:lstStyle/>
-          <a:p>
-            <a:pPr marL="342900" indent="-342900">
-              <a:spcAft>
-                <a:spcPts val="500"/>
-              </a:spcAft>
-              <a:buSzPct val="100000"/>
-              <a:buChar char="•"/>
-            </a:pPr>
-            <a:r>
-              <a:rPr lang="en-US" sz="1150" dirty="0">
+          <a:bodyPr wrap="square" rtlCol="0" anchor="t">
+            <a:noAutofit/>
+          </a:bodyPr>
+          <a:lstStyle/>
+          <a:p>
+            <a:pPr algn="l">
+              <a:lnSpc>
+                <a:spcPct val="95000"/>
+              </a:lnSpc>
+              <a:spcAft>
+                <a:spcPts val="200"/>
+              </a:spcAft>
+            </a:pPr>
+            <a:r>
+              <a:rPr sz="1110">
                 <a:solidFill>
                   <a:srgbClr val="2D2D2D"/>
                 </a:solidFill>
-              </a:rPr>
-              <a:t>Receives: utility fees, campaign fees, slashing penalties, RWA fees</a:t>
-            </a:r>
-            <a:endParaRPr lang="en-US" sz="1150" dirty="0"/>
-          </a:p>
-          <a:p>
-            <a:pPr marL="342900" indent="-342900">
-              <a:spcAft>
-                <a:spcPts val="500"/>
-              </a:spcAft>
-              <a:buSzPct val="100000"/>
-              <a:buChar char="•"/>
-            </a:pPr>
-            <a:r>
-              <a:rPr lang="en-US" sz="1150" dirty="0">
+                <a:latin typeface="Calibri"/>
+              </a:rPr>
+              <a:t>• Receives utility, campaign, RWA, and penalty-related inflows</a:t>
+            </a:r>
+          </a:p>
+          <a:p>
+            <a:pPr algn="l">
+              <a:lnSpc>
+                <a:spcPct val="95000"/>
+              </a:lnSpc>
+              <a:spcAft>
+                <a:spcPts val="200"/>
+              </a:spcAft>
+            </a:pPr>
+            <a:r>
+              <a:rPr sz="1110">
                 <a:solidFill>
                   <a:srgbClr val="2D2D2D"/>
                 </a:solidFill>
-              </a:rPr>
-              <a:t>Funds: audience recognition settlement, creator incentives, validator rewards, operations</a:t>
-            </a:r>
-            <a:endParaRPr lang="en-US" sz="1150" dirty="0"/>
-          </a:p>
-          <a:p>
-            <a:pPr marL="342900" indent="-342900">
-              <a:spcAft>
-                <a:spcPts val="500"/>
-              </a:spcAft>
-              <a:buSzPct val="100000"/>
-              <a:buChar char="•"/>
-            </a:pPr>
-            <a:r>
-              <a:rPr lang="en-US" sz="1150" dirty="0">
+                <a:latin typeface="Calibri"/>
+              </a:rPr>
+              <a:t>• Supports settlement, incentives, validators, and operations</a:t>
+            </a:r>
+          </a:p>
+          <a:p>
+            <a:pPr algn="l">
+              <a:lnSpc>
+                <a:spcPct val="95000"/>
+              </a:lnSpc>
+              <a:spcAft>
+                <a:spcPts val="200"/>
+              </a:spcAft>
+            </a:pPr>
+            <a:r>
+              <a:rPr sz="1110">
                 <a:solidFill>
                   <a:srgbClr val="2D2D2D"/>
                 </a:solidFill>
-              </a:rPr>
-              <a:t>Controls: reserve top-up, incentive pool replenishment, all operational outflows</a:t>
-            </a:r>
-            <a:endParaRPr lang="en-US" sz="1150" dirty="0"/>
-          </a:p>
-          <a:p>
-            <a:pPr indent="0" marL="0">
-              <a:spcAft>
-                <a:spcPts val="500"/>
-              </a:spcAft>
-              <a:buNone/>
-            </a:pPr>
-            <a:endParaRPr lang="en-US" sz="1150" dirty="0"/>
-          </a:p>
-          <a:p>
-            <a:pPr indent="0" marL="0">
-              <a:spcAft>
-                <a:spcPts val="500"/>
-              </a:spcAft>
-              <a:buNone/>
-            </a:pPr>
-            <a:r>
-              <a:rPr lang="en-US" sz="1150" b="1" dirty="0">
+                <a:latin typeface="Calibri"/>
+              </a:rPr>
+              <a:t>• Coordinates reserve top-ups and pool replenishment</a:t>
+            </a:r>
+          </a:p>
+          <a:p>
+            <a:pPr algn="l">
+              <a:lnSpc>
+                <a:spcPct val="95000"/>
+              </a:lnSpc>
+              <a:spcAft>
+                <a:spcPts val="200"/>
+              </a:spcAft>
+            </a:pPr>
+          </a:p>
+          <a:p>
+            <a:pPr algn="l">
+              <a:lnSpc>
+                <a:spcPct val="95000"/>
+              </a:lnSpc>
+              <a:spcAft>
+                <a:spcPts val="200"/>
+              </a:spcAft>
+            </a:pPr>
+            <a:r>
+              <a:rPr sz="1110">
                 <a:solidFill>
                   <a:srgbClr val="2D2D2D"/>
                 </a:solidFill>
-              </a:rPr>
-              <a:t>This makes Treasury governance the single most consequential attack surface in the entire system. A governance capture of Treasury parameters is an existential event.</a:t>
-            </a:r>
-            <a:endParaRPr lang="en-US" sz="1150" dirty="0"/>
+                <a:latin typeface="Calibri"/>
+              </a:rPr>
+              <a:t>This makes Treasury policy, authorization, and monitoring central to resilience. The parameter-lock system limits how quickly critical controls can change.</a:t>
+            </a:r>
           </a:p>
         </p:txBody>
       </p:sp>
@@ -5696,7 +6023,7 @@
           </a:effectLst>
         </p:spPr>
         <p:txBody>
-          <a:bodyPr/>
+          <a:bodyPr wrap="square"/>
           <a:p/>
         </p:txBody>
       </p:sp>
@@ -5718,24 +6045,28 @@
           <a:ln/>
         </p:spPr>
         <p:txBody>
-          <a:bodyPr wrap="square" lIns="0" tIns="0" rIns="0" bIns="0" rtlCol="0" anchor="ctr"/>
-          <a:lstStyle/>
-          <a:p>
-            <a:pPr indent="0" marL="0">
-              <a:buNone/>
-            </a:pPr>
-            <a:r>
-              <a:rPr lang="en-US" sz="1200" b="1" dirty="0">
+          <a:bodyPr wrap="square" lIns="0" tIns="0" rIns="0" bIns="0" rtlCol="0" anchor="ctr">
+            <a:noAutofit/>
+          </a:bodyPr>
+          <a:lstStyle/>
+          <a:p>
+            <a:pPr algn="l">
+              <a:lnSpc>
+                <a:spcPct val="100000"/>
+              </a:lnSpc>
+              <a:spcAft>
+                <a:spcPts val="200"/>
+              </a:spcAft>
+            </a:pPr>
+            <a:r>
+              <a:rPr sz="1200" b="1">
                 <a:solidFill>
                   <a:srgbClr val="2EAA56"/>
                 </a:solidFill>
-                <a:latin typeface="Calibri" pitchFamily="34" charset="0"/>
-                <a:ea typeface="Calibri" pitchFamily="34" charset="-122"/>
-                <a:cs typeface="Calibri" pitchFamily="34" charset="-120"/>
+                <a:latin typeface="Calibri"/>
               </a:rPr>
               <a:t>Integrity layer is the trust root</a:t>
             </a:r>
-            <a:endParaRPr lang="en-US" sz="1200" dirty="0"/>
           </a:p>
         </p:txBody>
       </p:sp>
@@ -5757,24 +6088,28 @@
           <a:ln/>
         </p:spPr>
         <p:txBody>
-          <a:bodyPr wrap="square" lIns="0" tIns="0" rIns="0" bIns="0" rtlCol="0" anchor="t"/>
-          <a:lstStyle/>
-          <a:p>
-            <a:pPr indent="0" marL="0">
-              <a:buNone/>
-            </a:pPr>
-            <a:r>
-              <a:rPr lang="en-US" sz="1050" dirty="0">
+          <a:bodyPr wrap="square" lIns="0" tIns="0" rIns="0" bIns="0" rtlCol="0" anchor="t">
+            <a:noAutofit/>
+          </a:bodyPr>
+          <a:lstStyle/>
+          <a:p>
+            <a:pPr algn="l">
+              <a:lnSpc>
+                <a:spcPct val="95000"/>
+              </a:lnSpc>
+              <a:spcAft>
+                <a:spcPts val="200"/>
+              </a:spcAft>
+            </a:pPr>
+            <a:r>
+              <a:rPr sz="1050">
                 <a:solidFill>
                   <a:srgbClr val="2D2D2D"/>
                 </a:solidFill>
-                <a:latin typeface="Calibri" pitchFamily="34" charset="0"/>
-                <a:ea typeface="Calibri" pitchFamily="34" charset="-122"/>
-                <a:cs typeface="Calibri" pitchFamily="34" charset="-120"/>
-              </a:rPr>
-              <a:t>Verification is the only mechanism that does not depend on any other mechanism's output. If verification degrades, recognition, campaigns, and governance all lose credibility at once.</a:t>
-            </a:r>
-            <a:endParaRPr lang="en-US" sz="1050" dirty="0"/>
+                <a:latin typeface="Calibri"/>
+              </a:rPr>
+              <a:t>Verification supports recognition, campaigns, and governance. Strong identity quality improves confidence across all three.</a:t>
+            </a:r>
           </a:p>
         </p:txBody>
       </p:sp>
@@ -5807,7 +6142,7 @@
           </a:effectLst>
         </p:spPr>
         <p:txBody>
-          <a:bodyPr/>
+          <a:bodyPr wrap="square"/>
           <a:p/>
         </p:txBody>
       </p:sp>
@@ -5829,24 +6164,28 @@
           <a:ln/>
         </p:spPr>
         <p:txBody>
-          <a:bodyPr wrap="square" lIns="0" tIns="0" rIns="0" bIns="0" rtlCol="0" anchor="ctr"/>
-          <a:lstStyle/>
-          <a:p>
-            <a:pPr indent="0" marL="0">
-              <a:buNone/>
-            </a:pPr>
-            <a:r>
-              <a:rPr lang="en-US" sz="1200" b="1" dirty="0">
+          <a:bodyPr wrap="square" lIns="0" tIns="0" rIns="0" bIns="0" rtlCol="0" anchor="ctr">
+            <a:noAutofit/>
+          </a:bodyPr>
+          <a:lstStyle/>
+          <a:p>
+            <a:pPr algn="l">
+              <a:lnSpc>
+                <a:spcPct val="100000"/>
+              </a:lnSpc>
+              <a:spcAft>
+                <a:spcPts val="200"/>
+              </a:spcAft>
+            </a:pPr>
+            <a:r>
+              <a:rPr sz="1200" b="1">
                 <a:solidFill>
                   <a:srgbClr val="2EAA56"/>
                 </a:solidFill>
-                <a:latin typeface="Calibri" pitchFamily="34" charset="0"/>
-                <a:ea typeface="Calibri" pitchFamily="34" charset="-122"/>
-                <a:cs typeface="Calibri" pitchFamily="34" charset="-120"/>
-              </a:rPr>
-              <a:t>Settlement gate is the load-bearing bridge</a:t>
-            </a:r>
-            <a:endParaRPr lang="en-US" sz="1200" dirty="0"/>
+                <a:latin typeface="Calibri"/>
+              </a:rPr>
+              <a:t>Settlement gate is the economic bridge</a:t>
+            </a:r>
           </a:p>
         </p:txBody>
       </p:sp>
@@ -5868,24 +6207,28 @@
           <a:ln/>
         </p:spPr>
         <p:txBody>
-          <a:bodyPr wrap="square" lIns="0" tIns="0" rIns="0" bIns="0" rtlCol="0" anchor="t"/>
-          <a:lstStyle/>
-          <a:p>
-            <a:pPr indent="0" marL="0">
-              <a:buNone/>
-            </a:pPr>
-            <a:r>
-              <a:rPr lang="en-US" sz="1050" dirty="0">
+          <a:bodyPr wrap="square" lIns="0" tIns="0" rIns="0" bIns="0" rtlCol="0" anchor="t">
+            <a:noAutofit/>
+          </a:bodyPr>
+          <a:lstStyle/>
+          <a:p>
+            <a:pPr algn="l">
+              <a:lnSpc>
+                <a:spcPct val="95000"/>
+              </a:lnSpc>
+              <a:spcAft>
+                <a:spcPts val="200"/>
+              </a:spcAft>
+            </a:pPr>
+            <a:r>
+              <a:rPr sz="1040">
                 <a:solidFill>
                   <a:srgbClr val="2D2D2D"/>
                 </a:solidFill>
-                <a:latin typeface="Calibri" pitchFamily="34" charset="0"/>
-                <a:ea typeface="Calibri" pitchFamily="34" charset="-122"/>
-                <a:cs typeface="Calibri" pitchFamily="34" charset="-120"/>
-              </a:rPr>
-              <a:t>The settlement mechanism is the only connection between the audience economy (ACR credits) and the token economy (Z1U). Every other mechanism operates within one economy only. The dual-economy design succeeds or fails at this single gate.</a:t>
-            </a:r>
-            <a:endParaRPr lang="en-US" sz="1050" dirty="0"/>
+                <a:latin typeface="Calibri"/>
+              </a:rPr>
+              <a:t>Settlement connects ACR recognition to Z1U utility. Ratio, caps, queues, and reserve support determine how smoothly value moves between the two layers.</a:t>
+            </a:r>
           </a:p>
         </p:txBody>
       </p:sp>
@@ -5939,24 +6282,28 @@
           <a:ln/>
         </p:spPr>
         <p:txBody>
-          <a:bodyPr wrap="square" lIns="0" tIns="0" rIns="0" bIns="0" rtlCol="0" anchor="ctr"/>
-          <a:lstStyle/>
-          <a:p>
-            <a:pPr indent="0" marL="0">
-              <a:buNone/>
-            </a:pPr>
-            <a:r>
-              <a:rPr lang="en-US" sz="2200" b="1" dirty="0">
+          <a:bodyPr wrap="square" lIns="0" tIns="0" rIns="0" bIns="0" rtlCol="0" anchor="ctr">
+            <a:noAutofit/>
+          </a:bodyPr>
+          <a:lstStyle/>
+          <a:p>
+            <a:pPr algn="l">
+              <a:lnSpc>
+                <a:spcPct val="100000"/>
+              </a:lnSpc>
+              <a:spcAft>
+                <a:spcPts val="0"/>
+              </a:spcAft>
+            </a:pPr>
+            <a:r>
+              <a:rPr sz="2200" b="1">
                 <a:solidFill>
                   <a:srgbClr val="2D2D2D"/>
                 </a:solidFill>
-                <a:latin typeface="Calibri" pitchFamily="34" charset="0"/>
-                <a:ea typeface="Calibri" pitchFamily="34" charset="-122"/>
-                <a:cs typeface="Calibri" pitchFamily="34" charset="-120"/>
-              </a:rPr>
-              <a:t>Zee's Scale Creates Unique Pressure the Model Must Handle</a:t>
-            </a:r>
-            <a:endParaRPr lang="en-US" sz="2200" dirty="0"/>
+                <a:latin typeface="Calibri"/>
+              </a:rPr>
+              <a:t>Zee's Scale Creates a Distinctive Opportunity and Load Profile</a:t>
+            </a:r>
           </a:p>
         </p:txBody>
       </p:sp>
@@ -5983,7 +6330,7 @@
           </a:ln>
         </p:spPr>
         <p:txBody>
-          <a:bodyPr/>
+          <a:bodyPr wrap="square"/>
           <a:p/>
         </p:txBody>
       </p:sp>
@@ -6055,7 +6402,7 @@
           </a:effectLst>
         </p:spPr>
         <p:txBody>
-          <a:bodyPr/>
+          <a:bodyPr wrap="square"/>
           <a:p/>
         </p:txBody>
       </p:sp>
@@ -6077,24 +6424,28 @@
           <a:ln/>
         </p:spPr>
         <p:txBody>
-          <a:bodyPr wrap="square" lIns="0" tIns="0" rIns="0" bIns="0" rtlCol="0" anchor="ctr"/>
-          <a:lstStyle/>
-          <a:p>
-            <a:pPr indent="0" marL="0">
-              <a:buNone/>
-            </a:pPr>
-            <a:r>
-              <a:rPr lang="en-US" sz="1400" b="1" dirty="0">
+          <a:bodyPr wrap="square" lIns="0" tIns="0" rIns="0" bIns="0" rtlCol="0" anchor="ctr">
+            <a:noAutofit/>
+          </a:bodyPr>
+          <a:lstStyle/>
+          <a:p>
+            <a:pPr algn="l">
+              <a:lnSpc>
+                <a:spcPct val="100000"/>
+              </a:lnSpc>
+              <a:spcAft>
+                <a:spcPts val="200"/>
+              </a:spcAft>
+            </a:pPr>
+            <a:r>
+              <a:rPr sz="1400" b="1">
                 <a:solidFill>
                   <a:srgbClr val="2EAA56"/>
                 </a:solidFill>
-                <a:latin typeface="Calibri" pitchFamily="34" charset="0"/>
-                <a:ea typeface="Calibri" pitchFamily="34" charset="-122"/>
-                <a:cs typeface="Calibri" pitchFamily="34" charset="-120"/>
-              </a:rPr>
-              <a:t>The cohort pressure problem</a:t>
-            </a:r>
-            <a:endParaRPr lang="en-US" sz="1400" dirty="0"/>
+                <a:latin typeface="Calibri"/>
+              </a:rPr>
+              <a:t>The cohort pressure profile</a:t>
+            </a:r>
           </a:p>
         </p:txBody>
       </p:sp>
@@ -6116,24 +6467,28 @@
           <a:ln/>
         </p:spPr>
         <p:txBody>
-          <a:bodyPr wrap="square" lIns="0" tIns="0" rIns="0" bIns="0" rtlCol="0" anchor="t"/>
-          <a:lstStyle/>
-          <a:p>
-            <a:pPr indent="0" marL="0">
-              <a:buNone/>
-            </a:pPr>
-            <a:r>
-              <a:rPr lang="en-US" sz="1200" dirty="0">
+          <a:bodyPr wrap="square" lIns="0" tIns="0" rIns="0" bIns="0" rtlCol="0" anchor="t">
+            <a:noAutofit/>
+          </a:bodyPr>
+          <a:lstStyle/>
+          <a:p>
+            <a:pPr algn="l">
+              <a:lnSpc>
+                <a:spcPct val="95000"/>
+              </a:lnSpc>
+              <a:spcAft>
+                <a:spcPts val="200"/>
+              </a:spcAft>
+            </a:pPr>
+            <a:r>
+              <a:rPr sz="1180">
                 <a:solidFill>
                   <a:srgbClr val="2D2D2D"/>
                 </a:solidFill>
-                <a:latin typeface="Calibri" pitchFamily="34" charset="0"/>
-                <a:ea typeface="Calibri" pitchFamily="34" charset="-122"/>
-                <a:cs typeface="Calibri" pitchFamily="34" charset="-120"/>
-              </a:rPr>
-              <a:t>With 900M+ Zee viewers as the target audience, even a modest claim conversion rate produces tens of millions of simultaneous onboardings. Because vesting has a fixed cliff period, all users in a cohort become eligible for settlement at roughly the same time. This creates a demand spike orders of magnitude above steady state that the Audience Reserve must absorb.</a:t>
-            </a:r>
-            <a:endParaRPr lang="en-US" sz="1200" dirty="0"/>
+                <a:latin typeface="Calibri"/>
+              </a:rPr>
+              <a:t>Zee's existing reach creates the possibility of very large onboarding cohorts. When many users claim and vest on similar timelines, settlement demand can arrive in waves rather than as a smooth growth curve. The model therefore needs to represent both scale and timing, not only total user count.</a:t>
+            </a:r>
           </a:p>
         </p:txBody>
       </p:sp>
@@ -6166,7 +6521,7 @@
           </a:effectLst>
         </p:spPr>
         <p:txBody>
-          <a:bodyPr/>
+          <a:bodyPr wrap="square"/>
           <a:p/>
         </p:txBody>
       </p:sp>
@@ -6188,16 +6543,28 @@
           <a:ln/>
         </p:spPr>
         <p:txBody>
-          <a:bodyPr wrap="square" lIns="0" tIns="0" rIns="0" bIns="0" rtlCol="0" anchor="ctr"/>
-          <a:lstStyle/>
-          <a:p>
-            <a:pPr indent="0" marL="0">
-              <a:buNone/>
-            </a:pPr>
-            <a:r>
-              <a:t>Tested Scale vs. Production Target</a:t>
-            </a:r>
-            <a:endParaRPr lang="en-US" sz="1200" dirty="0"/>
+          <a:bodyPr wrap="square" lIns="0" tIns="0" rIns="0" bIns="0" rtlCol="0" anchor="ctr">
+            <a:noAutofit/>
+          </a:bodyPr>
+          <a:lstStyle/>
+          <a:p>
+            <a:pPr algn="l">
+              <a:lnSpc>
+                <a:spcPct val="100000"/>
+              </a:lnSpc>
+              <a:spcAft>
+                <a:spcPts val="200"/>
+              </a:spcAft>
+            </a:pPr>
+            <a:r>
+              <a:rPr sz="1200" b="1">
+                <a:solidFill>
+                  <a:srgbClr val="2EAA56"/>
+                </a:solidFill>
+                <a:latin typeface="Calibri"/>
+              </a:rPr>
+              <a:t>Specified response: deterministic staggering</a:t>
+            </a:r>
           </a:p>
         </p:txBody>
       </p:sp>
@@ -6219,16 +6586,28 @@
           <a:ln/>
         </p:spPr>
         <p:txBody>
-          <a:bodyPr wrap="square" lIns="0" tIns="0" rIns="0" bIns="0" rtlCol="0" anchor="t"/>
-          <a:lstStyle/>
-          <a:p>
-            <a:pPr indent="0" marL="0">
-              <a:buNone/>
-            </a:pPr>
-            <a:r>
-              <a:t>Simulation ran at 1M initial viewers with 4-epoch compressed vesting. Production spec (180-day cliff, 730-day linear, 90-day stagger) and 900M+ scale will be validated in v2.</a:t>
-            </a:r>
-            <a:endParaRPr lang="en-US" sz="1100" dirty="0"/>
+          <a:bodyPr wrap="square" lIns="0" tIns="0" rIns="0" bIns="0" rtlCol="0" anchor="t">
+            <a:noAutofit/>
+          </a:bodyPr>
+          <a:lstStyle/>
+          <a:p>
+            <a:pPr algn="l">
+              <a:lnSpc>
+                <a:spcPct val="95000"/>
+              </a:lnSpc>
+              <a:spcAft>
+                <a:spcPts val="200"/>
+              </a:spcAft>
+            </a:pPr>
+            <a:r>
+              <a:rPr sz="1080">
+                <a:solidFill>
+                  <a:srgbClr val="2D2D2D"/>
+                </a:solidFill>
+                <a:latin typeface="Calibri"/>
+              </a:rPr>
+              <a:t>Hash-based staggering spreads eligibility over a ramp instead of one cliff date. The next phase should test different rollout and vesting profiles at realistic Zee-scale cohorts.</a:t>
+            </a:r>
           </a:p>
         </p:txBody>
       </p:sp>
@@ -6261,7 +6640,7 @@
           </a:effectLst>
         </p:spPr>
         <p:txBody>
-          <a:bodyPr/>
+          <a:bodyPr wrap="square"/>
           <a:p/>
         </p:txBody>
       </p:sp>
@@ -6283,24 +6662,28 @@
           <a:ln/>
         </p:spPr>
         <p:txBody>
-          <a:bodyPr wrap="square" lIns="0" tIns="0" rIns="0" bIns="0" rtlCol="0" anchor="ctr"/>
-          <a:lstStyle/>
-          <a:p>
-            <a:pPr indent="0" marL="0">
-              <a:buNone/>
-            </a:pPr>
-            <a:r>
-              <a:rPr lang="en-US" sz="1200" b="1" dirty="0">
+          <a:bodyPr wrap="square" lIns="0" tIns="0" rIns="0" bIns="0" rtlCol="0" anchor="ctr">
+            <a:noAutofit/>
+          </a:bodyPr>
+          <a:lstStyle/>
+          <a:p>
+            <a:pPr algn="l">
+              <a:lnSpc>
+                <a:spcPct val="100000"/>
+              </a:lnSpc>
+              <a:spcAft>
+                <a:spcPts val="200"/>
+              </a:spcAft>
+            </a:pPr>
+            <a:r>
+              <a:rPr sz="1200" b="1">
                 <a:solidFill>
                   <a:srgbClr val="2EAA56"/>
                 </a:solidFill>
-                <a:latin typeface="Calibri" pitchFamily="34" charset="0"/>
-                <a:ea typeface="Calibri" pitchFamily="34" charset="-122"/>
-                <a:cs typeface="Calibri" pitchFamily="34" charset="-120"/>
-              </a:rPr>
-              <a:t>Why this is Z1-specific</a:t>
-            </a:r>
-            <a:endParaRPr lang="en-US" sz="1200" dirty="0"/>
+                <a:latin typeface="Calibri"/>
+              </a:rPr>
+              <a:t>Why this matters for Z1</a:t>
+            </a:r>
           </a:p>
         </p:txBody>
       </p:sp>
@@ -6322,24 +6705,28 @@
           <a:ln/>
         </p:spPr>
         <p:txBody>
-          <a:bodyPr wrap="square" lIns="0" tIns="0" rIns="0" bIns="0" rtlCol="0" anchor="t"/>
-          <a:lstStyle/>
-          <a:p>
-            <a:pPr indent="0" marL="0">
-              <a:buNone/>
-            </a:pPr>
-            <a:r>
-              <a:rPr lang="en-US" sz="1100" dirty="0">
+          <a:bodyPr wrap="square" lIns="0" tIns="0" rIns="0" bIns="0" rtlCol="0" anchor="t">
+            <a:noAutofit/>
+          </a:bodyPr>
+          <a:lstStyle/>
+          <a:p>
+            <a:pPr algn="l">
+              <a:lnSpc>
+                <a:spcPct val="95000"/>
+              </a:lnSpc>
+              <a:spcAft>
+                <a:spcPts val="200"/>
+              </a:spcAft>
+            </a:pPr>
+            <a:r>
+              <a:rPr sz="1080">
                 <a:solidFill>
                   <a:srgbClr val="2D2D2D"/>
                 </a:solidFill>
-                <a:latin typeface="Calibri" pitchFamily="34" charset="0"/>
-                <a:ea typeface="Calibri" pitchFamily="34" charset="-122"/>
-                <a:cs typeface="Calibri" pitchFamily="34" charset="-120"/>
-              </a:rPr>
-              <a:t>Most token economies onboard users gradually. Z1's media audience creates the possibility of mass simultaneous onboarding through broadcast events, marketing pushes, or viral moments. The reserve and settlement mechanics must be designed for this reality, not against a generic growth curve.</a:t>
-            </a:r>
-            <a:endParaRPr lang="en-US" sz="1100" dirty="0"/>
+                <a:latin typeface="Calibri"/>
+              </a:rPr>
+              <a:t>Broadcast events, marketing pushes, and platform integrations can create sudden onboarding waves. This is a distribution advantage that requires deliberate reserve and settlement planning.</a:t>
+            </a:r>
           </a:p>
         </p:txBody>
       </p:sp>
@@ -6393,16 +6780,28 @@
           <a:ln/>
         </p:spPr>
         <p:txBody>
-          <a:bodyPr wrap="square" lIns="0" tIns="0" rIns="0" bIns="0" rtlCol="0" anchor="ctr"/>
-          <a:lstStyle/>
-          <a:p>
-            <a:pPr indent="0" marL="0">
-              <a:buNone/>
-            </a:pPr>
-            <a:r>
-              <a:t>Core Mechanics Implemented; Empirical Calibration Needed</a:t>
-            </a:r>
-            <a:endParaRPr lang="en-US" sz="2200" dirty="0"/>
+          <a:bodyPr wrap="square" lIns="0" tIns="0" rIns="0" bIns="0" rtlCol="0" anchor="ctr">
+            <a:noAutofit/>
+          </a:bodyPr>
+          <a:lstStyle/>
+          <a:p>
+            <a:pPr algn="l">
+              <a:lnSpc>
+                <a:spcPct val="100000"/>
+              </a:lnSpc>
+              <a:spcAft>
+                <a:spcPts val="0"/>
+              </a:spcAft>
+            </a:pPr>
+            <a:r>
+              <a:rPr sz="2200" b="1">
+                <a:solidFill>
+                  <a:srgbClr val="2D2D2D"/>
+                </a:solidFill>
+                <a:latin typeface="Calibri"/>
+              </a:rPr>
+              <a:t>Ready for Empirical Calibration with Zee Audience Data</a:t>
+            </a:r>
           </a:p>
         </p:txBody>
       </p:sp>
@@ -6429,7 +6828,7 @@
           </a:ln>
         </p:spPr>
         <p:txBody>
-          <a:bodyPr/>
+          <a:bodyPr wrap="square"/>
           <a:p/>
         </p:txBody>
       </p:sp>
@@ -6501,7 +6900,7 @@
           </a:effectLst>
         </p:spPr>
         <p:txBody>
-          <a:bodyPr/>
+          <a:bodyPr wrap="square"/>
           <a:p/>
         </p:txBody>
       </p:sp>
@@ -6523,16 +6922,28 @@
           <a:ln/>
         </p:spPr>
         <p:txBody>
-          <a:bodyPr wrap="square" lIns="0" tIns="0" rIns="0" bIns="0" rtlCol="0" anchor="ctr"/>
-          <a:lstStyle/>
-          <a:p>
-            <a:pPr indent="0" marL="0">
-              <a:buNone/>
-            </a:pPr>
-            <a:r>
-              <a:t>The core mechanics are implemented and consistent at simulation scale. Empirical calibration and scale validation using Zee audience data remain as next steps.</a:t>
-            </a:r>
-            <a:endParaRPr lang="en-US" sz="1300" dirty="0"/>
+          <a:bodyPr wrap="square" lIns="0" tIns="0" rIns="0" bIns="0" rtlCol="0" anchor="ctr">
+            <a:noAutofit/>
+          </a:bodyPr>
+          <a:lstStyle/>
+          <a:p>
+            <a:pPr algn="l">
+              <a:lnSpc>
+                <a:spcPct val="100000"/>
+              </a:lnSpc>
+              <a:spcAft>
+                <a:spcPts val="200"/>
+              </a:spcAft>
+            </a:pPr>
+            <a:r>
+              <a:rPr sz="1300" b="1">
+                <a:solidFill>
+                  <a:srgbClr val="2D2D2D"/>
+                </a:solidFill>
+                <a:latin typeface="Calibri"/>
+              </a:rPr>
+              <a:t>The core mechanics are implemented and internally consistent at simulation scale. The next step is to calibrate behavior and validate the model across production-scale audience and vesting profiles.</a:t>
+            </a:r>
           </a:p>
         </p:txBody>
       </p:sp>
@@ -6565,7 +6976,7 @@
           </a:effectLst>
         </p:spPr>
         <p:txBody>
-          <a:bodyPr/>
+          <a:bodyPr wrap="square"/>
           <a:p/>
         </p:txBody>
       </p:sp>
@@ -6587,16 +6998,28 @@
           <a:ln/>
         </p:spPr>
         <p:txBody>
-          <a:bodyPr wrap="square" lIns="0" tIns="0" rIns="0" bIns="0" rtlCol="0" anchor="ctr"/>
-          <a:lstStyle/>
-          <a:p>
-            <a:pPr indent="0" marL="0">
-              <a:buNone/>
-            </a:pPr>
-            <a:r>
-              <a:t>The Calibration Advantage</a:t>
-            </a:r>
-            <a:endParaRPr lang="en-US" sz="1300" dirty="0"/>
+          <a:bodyPr wrap="square" lIns="0" tIns="0" rIns="0" bIns="0" rtlCol="0" anchor="ctr">
+            <a:noAutofit/>
+          </a:bodyPr>
+          <a:lstStyle/>
+          <a:p>
+            <a:pPr algn="l">
+              <a:lnSpc>
+                <a:spcPct val="100000"/>
+              </a:lnSpc>
+              <a:spcAft>
+                <a:spcPts val="200"/>
+              </a:spcAft>
+            </a:pPr>
+            <a:r>
+              <a:rPr sz="1300" b="1">
+                <a:solidFill>
+                  <a:srgbClr val="2EAA56"/>
+                </a:solidFill>
+                <a:latin typeface="Calibri"/>
+              </a:rPr>
+              <a:t>The calibration advantage</a:t>
+            </a:r>
           </a:p>
         </p:txBody>
       </p:sp>
@@ -6618,46 +7041,66 @@
           <a:ln/>
         </p:spPr>
         <p:txBody>
-          <a:bodyPr wrap="square" rtlCol="0" anchor="t"/>
-          <a:lstStyle/>
-          <a:p>
-            <a:pPr marL="342900" indent="-342900">
-              <a:spcAft>
-                <a:spcPts val="600"/>
-              </a:spcAft>
-              <a:buSzPct val="100000"/>
-              <a:buChar char="•"/>
-            </a:pPr>
-            <a:r>
-              <a:t>We can transition from a verified theoretical model to an evidence-based economy using Zee's actual historical audience behavioral patterns.</a:t>
-            </a:r>
-            <a:endParaRPr lang="en-US" sz="1100" dirty="0"/>
-          </a:p>
-          <a:p>
-            <a:pPr marL="342900" indent="-342900">
-              <a:spcAft>
-                <a:spcPts val="600"/>
-              </a:spcAft>
-              <a:buSzPct val="100000"/>
-              <a:buChar char="•"/>
-            </a:pPr>
-            <a:r>
-              <a:t>Zee's extensive audience data provides direct, empirical proxies for claim, settlement, and spending behavior.</a:t>
-            </a:r>
-            <a:endParaRPr lang="en-US" sz="1100" dirty="0"/>
-          </a:p>
-          <a:p>
-            <a:pPr marL="342900" indent="-342900">
-              <a:spcAft>
-                <a:spcPts val="600"/>
-              </a:spcAft>
-              <a:buSzPct val="100000"/>
-              <a:buChar char="•"/>
-            </a:pPr>
-            <a:r>
-              <a:t>v2 will perform broad sensitivity analysis and parameter sweeps to map the complete safe operating region.</a:t>
-            </a:r>
-            <a:endParaRPr lang="en-US" sz="1100" dirty="0"/>
+          <a:bodyPr wrap="square" rtlCol="0" anchor="t">
+            <a:noAutofit/>
+          </a:bodyPr>
+          <a:lstStyle/>
+          <a:p>
+            <a:pPr algn="l">
+              <a:lnSpc>
+                <a:spcPct val="95000"/>
+              </a:lnSpc>
+              <a:spcAft>
+                <a:spcPts val="200"/>
+              </a:spcAft>
+            </a:pPr>
+            <a:r>
+              <a:rPr sz="1080">
+                <a:solidFill>
+                  <a:srgbClr val="2D2D2D"/>
+                </a:solidFill>
+                <a:latin typeface="Calibri"/>
+              </a:rPr>
+              <a:t>• Replace placeholder behavior with grounded agent archetypes</a:t>
+            </a:r>
+          </a:p>
+          <a:p>
+            <a:pPr algn="l">
+              <a:lnSpc>
+                <a:spcPct val="95000"/>
+              </a:lnSpc>
+              <a:spcAft>
+                <a:spcPts val="200"/>
+              </a:spcAft>
+            </a:pPr>
+            <a:r>
+              <a:rPr sz="1080">
+                <a:solidFill>
+                  <a:srgbClr val="2D2D2D"/>
+                </a:solidFill>
+                <a:latin typeface="Calibri"/>
+              </a:rPr>
+              <a:t>• Estimate claim, settlement, and utility-spend distributions</a:t>
+            </a:r>
+          </a:p>
+          <a:p>
+            <a:pPr algn="l">
+              <a:lnSpc>
+                <a:spcPct val="95000"/>
+              </a:lnSpc>
+              <a:spcAft>
+                <a:spcPts val="200"/>
+              </a:spcAft>
+            </a:pPr>
+            <a:r>
+              <a:rPr sz="1080">
+                <a:solidFill>
+                  <a:srgbClr val="2D2D2D"/>
+                </a:solidFill>
+                <a:latin typeface="Calibri"/>
+              </a:rPr>
+              <a:t>• Re-run sensitivity analysis across wider operating ranges</a:t>
+            </a:r>
           </a:p>
         </p:txBody>
       </p:sp>
@@ -6690,7 +7133,7 @@
           </a:effectLst>
         </p:spPr>
         <p:txBody>
-          <a:bodyPr/>
+          <a:bodyPr wrap="square"/>
           <a:p/>
         </p:txBody>
       </p:sp>
@@ -6712,24 +7155,28 @@
           <a:ln/>
         </p:spPr>
         <p:txBody>
-          <a:bodyPr wrap="square" lIns="0" tIns="0" rIns="0" bIns="0" rtlCol="0" anchor="ctr"/>
-          <a:lstStyle/>
-          <a:p>
-            <a:pPr indent="0" marL="0">
-              <a:buNone/>
-            </a:pPr>
-            <a:r>
-              <a:rPr lang="en-US" sz="1300" b="1" dirty="0">
+          <a:bodyPr wrap="square" lIns="0" tIns="0" rIns="0" bIns="0" rtlCol="0" anchor="ctr">
+            <a:noAutofit/>
+          </a:bodyPr>
+          <a:lstStyle/>
+          <a:p>
+            <a:pPr algn="l">
+              <a:lnSpc>
+                <a:spcPct val="100000"/>
+              </a:lnSpc>
+              <a:spcAft>
+                <a:spcPts val="200"/>
+              </a:spcAft>
+            </a:pPr>
+            <a:r>
+              <a:rPr sz="1300" b="1">
                 <a:solidFill>
                   <a:srgbClr val="2EAA56"/>
                 </a:solidFill>
-                <a:latin typeface="Calibri" pitchFamily="34" charset="0"/>
-                <a:ea typeface="Calibri" pitchFamily="34" charset="-122"/>
-                <a:cs typeface="Calibri" pitchFamily="34" charset="-120"/>
+                <a:latin typeface="Calibri"/>
               </a:rPr>
               <a:t>What Zee can provide</a:t>
             </a:r>
-            <a:endParaRPr lang="en-US" sz="1300" dirty="0"/>
           </a:p>
         </p:txBody>
       </p:sp>
@@ -6751,61 +7198,66 @@
           <a:ln/>
         </p:spPr>
         <p:txBody>
-          <a:bodyPr wrap="square" rtlCol="0" anchor="t"/>
-          <a:lstStyle/>
-          <a:p>
-            <a:pPr marL="342900" indent="-342900">
-              <a:spcAft>
-                <a:spcPts val="600"/>
-              </a:spcAft>
-              <a:buSzPct val="100000"/>
-              <a:buChar char="•"/>
-            </a:pPr>
-            <a:r>
-              <a:rPr lang="en-US" sz="1100" dirty="0">
+          <a:bodyPr wrap="square" rtlCol="0" anchor="t">
+            <a:noAutofit/>
+          </a:bodyPr>
+          <a:lstStyle/>
+          <a:p>
+            <a:pPr algn="l">
+              <a:lnSpc>
+                <a:spcPct val="95000"/>
+              </a:lnSpc>
+              <a:spcAft>
+                <a:spcPts val="200"/>
+              </a:spcAft>
+            </a:pPr>
+            <a:r>
+              <a:rPr sz="1080">
                 <a:solidFill>
                   <a:srgbClr val="2D2D2D"/>
                 </a:solidFill>
-              </a:rPr>
-              <a:t>Real engagement patterns from 900M+ users: viewing frequency, session depth, content interaction</a:t>
-            </a:r>
-            <a:endParaRPr lang="en-US" sz="1100" dirty="0"/>
-          </a:p>
-          <a:p>
-            <a:pPr marL="342900" indent="-342900">
-              <a:spcAft>
-                <a:spcPts val="600"/>
-              </a:spcAft>
-              <a:buSzPct val="100000"/>
-              <a:buChar char="•"/>
-            </a:pPr>
-            <a:r>
-              <a:rPr lang="en-US" sz="1100" dirty="0">
+                <a:latin typeface="Calibri"/>
+              </a:rPr>
+              <a:t>• Viewing frequency, session depth, and content interaction</a:t>
+            </a:r>
+          </a:p>
+          <a:p>
+            <a:pPr algn="l">
+              <a:lnSpc>
+                <a:spcPct val="95000"/>
+              </a:lnSpc>
+              <a:spcAft>
+                <a:spcPts val="200"/>
+              </a:spcAft>
+            </a:pPr>
+            <a:r>
+              <a:rPr sz="1080">
                 <a:solidFill>
                   <a:srgbClr val="2D2D2D"/>
                 </a:solidFill>
-              </a:rPr>
-              <a:t>Loyalty program redemption rates and timing (closest proxy to settlement behavior)</a:t>
-            </a:r>
-            <a:endParaRPr lang="en-US" sz="1100" dirty="0"/>
-          </a:p>
-          <a:p>
-            <a:pPr marL="342900" indent="-342900">
-              <a:spcAft>
-                <a:spcPts val="600"/>
-              </a:spcAft>
-              <a:buSzPct val="100000"/>
-              <a:buChar char="•"/>
-            </a:pPr>
-            <a:r>
-              <a:rPr lang="en-US" sz="1100" dirty="0">
+                <a:latin typeface="Calibri"/>
+              </a:rPr>
+              <a:t>• Loyalty and redemption timing as settlement proxies</a:t>
+            </a:r>
+          </a:p>
+          <a:p>
+            <a:pPr algn="l">
+              <a:lnSpc>
+                <a:spcPct val="95000"/>
+              </a:lnSpc>
+              <a:spcAft>
+                <a:spcPts val="200"/>
+              </a:spcAft>
+            </a:pPr>
+            <a:r>
+              <a:rPr sz="1080">
                 <a:solidFill>
                   <a:srgbClr val="2D2D2D"/>
                 </a:solidFill>
-              </a:rPr>
-              <a:t>Audience segmentation data to build grounded agent archetypes</a:t>
-            </a:r>
-            <a:endParaRPr lang="en-US" sz="1100" dirty="0"/>
+                <a:latin typeface="Calibri"/>
+              </a:rPr>
+              <a:t>• Audience segments and campaign-response patterns</a:t>
+            </a:r>
           </a:p>
         </p:txBody>
       </p:sp>
@@ -6859,16 +7311,28 @@
           <a:ln/>
         </p:spPr>
         <p:txBody>
-          <a:bodyPr wrap="square" lIns="0" tIns="0" rIns="0" bIns="0" rtlCol="0" anchor="ctr"/>
-          <a:lstStyle/>
-          <a:p>
-            <a:pPr indent="0" marL="0">
-              <a:buNone/>
-            </a:pPr>
-            <a:r>
-              <a:t>Parameter Guardrails: Tested Conditions and Open Validation Items</a:t>
-            </a:r>
-            <a:endParaRPr lang="en-US" sz="2200" dirty="0"/>
+          <a:bodyPr wrap="square" lIns="0" tIns="0" rIns="0" bIns="0" rtlCol="0" anchor="ctr">
+            <a:noAutofit/>
+          </a:bodyPr>
+          <a:lstStyle/>
+          <a:p>
+            <a:pPr algn="l">
+              <a:lnSpc>
+                <a:spcPct val="100000"/>
+              </a:lnSpc>
+              <a:spcAft>
+                <a:spcPts val="0"/>
+              </a:spcAft>
+            </a:pPr>
+            <a:r>
+              <a:rPr sz="2200" b="1">
+                <a:solidFill>
+                  <a:srgbClr val="2D2D2D"/>
+                </a:solidFill>
+                <a:latin typeface="Calibri"/>
+              </a:rPr>
+              <a:t>The Parameter Lock Architecture Is a Genuine Differentiator</a:t>
+            </a:r>
           </a:p>
         </p:txBody>
       </p:sp>
@@ -6895,7 +7359,7 @@
           </a:ln>
         </p:spPr>
         <p:txBody>
-          <a:bodyPr/>
+          <a:bodyPr wrap="square"/>
           <a:p/>
         </p:txBody>
       </p:sp>
@@ -6967,7 +7431,7 @@
           </a:effectLst>
         </p:spPr>
         <p:txBody>
-          <a:bodyPr/>
+          <a:bodyPr wrap="square"/>
           <a:p/>
         </p:txBody>
       </p:sp>
@@ -6989,16 +7453,28 @@
           <a:ln/>
         </p:spPr>
         <p:txBody>
-          <a:bodyPr wrap="square" lIns="0" tIns="0" rIns="0" bIns="0" rtlCol="0" anchor="ctr"/>
-          <a:lstStyle/>
-          <a:p>
-            <a:pPr indent="0" marL="0">
-              <a:buNone/>
-            </a:pPr>
-            <a:r>
-              <a:t>Z1's economic security is protected by mathematically verified invariant locks. Direct code-level constraints block parameter changes that violate tested solvency bounds.</a:t>
-            </a:r>
-            <a:endParaRPr lang="en-US" sz="1300" dirty="0"/>
+          <a:bodyPr wrap="square" lIns="0" tIns="0" rIns="0" bIns="0" rtlCol="0" anchor="ctr">
+            <a:noAutofit/>
+          </a:bodyPr>
+          <a:lstStyle/>
+          <a:p>
+            <a:pPr algn="l">
+              <a:lnSpc>
+                <a:spcPct val="100000"/>
+              </a:lnSpc>
+              <a:spcAft>
+                <a:spcPts val="200"/>
+              </a:spcAft>
+            </a:pPr>
+            <a:r>
+              <a:rPr sz="1260">
+                <a:solidFill>
+                  <a:srgbClr val="2D2D2D"/>
+                </a:solidFill>
+                <a:latin typeface="Calibri"/>
+              </a:rPr>
+              <a:t>Z1 separates parameters by how much of the system they are allowed to change. The result is a clear distinction between foundational constraints, bounded tuning ranges, and routine operating controls.</a:t>
+            </a:r>
           </a:p>
         </p:txBody>
       </p:sp>
@@ -7031,7 +7507,7 @@
           </a:effectLst>
         </p:spPr>
         <p:txBody>
-          <a:bodyPr/>
+          <a:bodyPr wrap="square"/>
           <a:p/>
         </p:txBody>
       </p:sp>
@@ -7053,16 +7529,28 @@
           <a:ln/>
         </p:spPr>
         <p:txBody>
-          <a:bodyPr wrap="square" lIns="0" tIns="0" rIns="0" bIns="0" rtlCol="0" anchor="ctr"/>
-          <a:lstStyle/>
-          <a:p>
-            <a:pPr indent="0" marL="0">
-              <a:buNone/>
-            </a:pPr>
-            <a:r>
-              <a:t>Lock L1: Solvency Invariant (Tested)</a:t>
-            </a:r>
-            <a:endParaRPr lang="en-US" sz="1200" dirty="0"/>
+          <a:bodyPr wrap="square" lIns="0" tIns="0" rIns="0" bIns="0" rtlCol="0" anchor="ctr">
+            <a:noAutofit/>
+          </a:bodyPr>
+          <a:lstStyle/>
+          <a:p>
+            <a:pPr algn="l">
+              <a:lnSpc>
+                <a:spcPct val="90000"/>
+              </a:lnSpc>
+              <a:spcAft>
+                <a:spcPts val="200"/>
+              </a:spcAft>
+            </a:pPr>
+            <a:r>
+              <a:rPr sz="1200" b="1">
+                <a:solidFill>
+                  <a:srgbClr val="2EAA56"/>
+                </a:solidFill>
+                <a:latin typeface="Calibri"/>
+              </a:rPr>
+              <a:t>Tier 0 — Foundation lock</a:t>
+            </a:r>
           </a:p>
         </p:txBody>
       </p:sp>
@@ -7084,16 +7572,28 @@
           <a:ln/>
         </p:spPr>
         <p:txBody>
-          <a:bodyPr wrap="square" lIns="0" tIns="0" rIns="0" bIns="0" rtlCol="0" anchor="t"/>
-          <a:lstStyle/>
-          <a:p>
-            <a:pPr indent="0" marL="0">
-              <a:buNone/>
-            </a:pPr>
-            <a:r>
-              <a:t>Continuously monitors the system-wide outflow-to-inflow ratio (outflow / inflow).</a:t>
-            </a:r>
-            <a:endParaRPr lang="en-US" sz="1000" dirty="0"/>
+          <a:bodyPr wrap="square" lIns="0" tIns="0" rIns="0" bIns="0" rtlCol="0" anchor="ctr">
+            <a:noAutofit/>
+          </a:bodyPr>
+          <a:lstStyle/>
+          <a:p>
+            <a:pPr algn="l">
+              <a:lnSpc>
+                <a:spcPct val="90000"/>
+              </a:lnSpc>
+              <a:spcAft>
+                <a:spcPts val="200"/>
+              </a:spcAft>
+            </a:pPr>
+            <a:r>
+              <a:rPr sz="950" b="0">
+                <a:solidFill>
+                  <a:srgbClr val="2D2D2D"/>
+                </a:solidFill>
+                <a:latin typeface="Calibri"/>
+              </a:rPr>
+              <a:t>Supply cap • reserve floor • settlement source • eligibility constraints</a:t>
+            </a:r>
           </a:p>
         </p:txBody>
       </p:sp>
@@ -7115,16 +7615,28 @@
           <a:ln/>
         </p:spPr>
         <p:txBody>
-          <a:bodyPr wrap="square" lIns="0" tIns="0" rIns="0" bIns="0" rtlCol="0" anchor="t"/>
-          <a:lstStyle/>
-          <a:p>
-            <a:pPr indent="0" marL="0">
-              <a:buNone/>
-            </a:pPr>
-            <a:r>
-              <a:t>Blocks any operational drift that pushes the ratio above 1.0; baseline runs passed at 95%, while fixed-SR adversarial runs failed.</a:t>
-            </a:r>
-            <a:endParaRPr lang="en-US" sz="1000" dirty="0"/>
+          <a:bodyPr wrap="square" lIns="0" tIns="0" rIns="0" bIns="0" rtlCol="0" anchor="ctr">
+            <a:noAutofit/>
+          </a:bodyPr>
+          <a:lstStyle/>
+          <a:p>
+            <a:pPr algn="l">
+              <a:lnSpc>
+                <a:spcPct val="90000"/>
+              </a:lnSpc>
+              <a:spcAft>
+                <a:spcPts val="200"/>
+              </a:spcAft>
+            </a:pPr>
+            <a:r>
+              <a:rPr sz="950" b="0">
+                <a:solidFill>
+                  <a:srgbClr val="888888"/>
+                </a:solidFill>
+                <a:latin typeface="Calibri"/>
+              </a:rPr>
+              <a:t>Highest lock level • exceptional change path • extended delay</a:t>
+            </a:r>
           </a:p>
         </p:txBody>
       </p:sp>
@@ -7157,7 +7669,7 @@
           </a:effectLst>
         </p:spPr>
         <p:txBody>
-          <a:bodyPr/>
+          <a:bodyPr wrap="square"/>
           <a:p/>
         </p:txBody>
       </p:sp>
@@ -7179,16 +7691,28 @@
           <a:ln/>
         </p:spPr>
         <p:txBody>
-          <a:bodyPr wrap="square" lIns="0" tIns="0" rIns="0" bIns="0" rtlCol="0" anchor="ctr"/>
-          <a:lstStyle/>
-          <a:p>
-            <a:pPr indent="0" marL="0">
-              <a:buNone/>
-            </a:pPr>
-            <a:r>
-              <a:t>Lock L3: Brand Inflow Floor (Scale-Calibrated)</a:t>
-            </a:r>
-            <a:endParaRPr lang="en-US" sz="1200" dirty="0"/>
+          <a:bodyPr wrap="square" lIns="0" tIns="0" rIns="0" bIns="0" rtlCol="0" anchor="ctr">
+            <a:noAutofit/>
+          </a:bodyPr>
+          <a:lstStyle/>
+          <a:p>
+            <a:pPr algn="l">
+              <a:lnSpc>
+                <a:spcPct val="90000"/>
+              </a:lnSpc>
+              <a:spcAft>
+                <a:spcPts val="200"/>
+              </a:spcAft>
+            </a:pPr>
+            <a:r>
+              <a:rPr sz="1200" b="1">
+                <a:solidFill>
+                  <a:srgbClr val="2EAA56"/>
+                </a:solidFill>
+                <a:latin typeface="Calibri"/>
+              </a:rPr>
+              <a:t>Tier 1 — Bounded lock</a:t>
+            </a:r>
           </a:p>
         </p:txBody>
       </p:sp>
@@ -7210,16 +7734,28 @@
           <a:ln/>
         </p:spPr>
         <p:txBody>
-          <a:bodyPr wrap="square" lIns="0" tIns="0" rIns="0" bIns="0" rtlCol="0" anchor="t"/>
-          <a:lstStyle/>
-          <a:p>
-            <a:pPr indent="0" marL="0">
-              <a:buNone/>
-            </a:pPr>
-            <a:r>
-              <a:t>Enforces that epoch brand inflows must represent &gt;= 1.0% of the initial Audience Reserve (calibrated for simulation scale).</a:t>
-            </a:r>
-            <a:endParaRPr lang="en-US" sz="1000" dirty="0"/>
+          <a:bodyPr wrap="square" lIns="0" tIns="0" rIns="0" bIns="0" rtlCol="0" anchor="ctr">
+            <a:noAutofit/>
+          </a:bodyPr>
+          <a:lstStyle/>
+          <a:p>
+            <a:pPr algn="l">
+              <a:lnSpc>
+                <a:spcPct val="90000"/>
+              </a:lnSpc>
+              <a:spcAft>
+                <a:spcPts val="200"/>
+              </a:spcAft>
+            </a:pPr>
+            <a:r>
+              <a:rPr sz="950" b="0">
+                <a:solidFill>
+                  <a:srgbClr val="2D2D2D"/>
+                </a:solidFill>
+                <a:latin typeface="Calibri"/>
+              </a:rPr>
+              <a:t>Fees • settlement caps • scoring weights • throttle thresholds</a:t>
+            </a:r>
           </a:p>
         </p:txBody>
       </p:sp>
@@ -7241,16 +7777,28 @@
           <a:ln/>
         </p:spPr>
         <p:txBody>
-          <a:bodyPr wrap="square" lIns="0" tIns="0" rIns="0" bIns="0" rtlCol="0" anchor="t"/>
-          <a:lstStyle/>
-          <a:p>
-            <a:pPr indent="0" marL="0">
-              <a:buNone/>
-            </a:pPr>
-            <a:r>
-              <a:t>Guarantees the reserve maintains a continuous liquidity buffer to prevent starvation under stress.</a:t>
-            </a:r>
-            <a:endParaRPr lang="en-US" sz="1000" dirty="0"/>
+          <a:bodyPr wrap="square" lIns="0" tIns="0" rIns="0" bIns="0" rtlCol="0" anchor="ctr">
+            <a:noAutofit/>
+          </a:bodyPr>
+          <a:lstStyle/>
+          <a:p>
+            <a:pPr algn="l">
+              <a:lnSpc>
+                <a:spcPct val="90000"/>
+              </a:lnSpc>
+              <a:spcAft>
+                <a:spcPts val="200"/>
+              </a:spcAft>
+            </a:pPr>
+            <a:r>
+              <a:rPr sz="950" b="0">
+                <a:solidFill>
+                  <a:srgbClr val="888888"/>
+                </a:solidFill>
+                <a:latin typeface="Calibri"/>
+              </a:rPr>
+              <a:t>Changes only within approved ranges • delayed execution</a:t>
+            </a:r>
           </a:p>
         </p:txBody>
       </p:sp>
@@ -7283,7 +7831,7 @@
           </a:effectLst>
         </p:spPr>
         <p:txBody>
-          <a:bodyPr/>
+          <a:bodyPr wrap="square"/>
           <a:p/>
         </p:txBody>
       </p:sp>
@@ -7305,16 +7853,28 @@
           <a:ln/>
         </p:spPr>
         <p:txBody>
-          <a:bodyPr wrap="square" lIns="0" tIns="0" rIns="0" bIns="0" rtlCol="0" anchor="ctr"/>
-          <a:lstStyle/>
-          <a:p>
-            <a:pPr indent="0" marL="0">
-              <a:buNone/>
-            </a:pPr>
-            <a:r>
-              <a:t>Formal Economic Invariants</a:t>
-            </a:r>
-            <a:endParaRPr lang="en-US" sz="1200" dirty="0"/>
+          <a:bodyPr wrap="square" lIns="0" tIns="0" rIns="0" bIns="0" rtlCol="0" anchor="ctr">
+            <a:noAutofit/>
+          </a:bodyPr>
+          <a:lstStyle/>
+          <a:p>
+            <a:pPr algn="l">
+              <a:lnSpc>
+                <a:spcPct val="90000"/>
+              </a:lnSpc>
+              <a:spcAft>
+                <a:spcPts val="200"/>
+              </a:spcAft>
+            </a:pPr>
+            <a:r>
+              <a:rPr sz="1200" b="1">
+                <a:solidFill>
+                  <a:srgbClr val="2EAA56"/>
+                </a:solidFill>
+                <a:latin typeface="Calibri"/>
+              </a:rPr>
+              <a:t>Tier 2 — Operating range</a:t>
+            </a:r>
           </a:p>
         </p:txBody>
       </p:sp>
@@ -7336,16 +7896,28 @@
           <a:ln/>
         </p:spPr>
         <p:txBody>
-          <a:bodyPr wrap="square" lIns="0" tIns="0" rIns="0" bIns="0" rtlCol="0" anchor="t"/>
-          <a:lstStyle/>
-          <a:p>
-            <a:pPr indent="0" marL="0">
-              <a:buNone/>
-            </a:pPr>
-            <a:r>
-              <a:t>Locks are coded directly into the system runtime and verified as economic invariants every epoch.</a:t>
-            </a:r>
-            <a:endParaRPr lang="en-US" sz="1000" dirty="0"/>
+          <a:bodyPr wrap="square" lIns="0" tIns="0" rIns="0" bIns="0" rtlCol="0" anchor="ctr">
+            <a:noAutofit/>
+          </a:bodyPr>
+          <a:lstStyle/>
+          <a:p>
+            <a:pPr algn="l">
+              <a:lnSpc>
+                <a:spcPct val="90000"/>
+              </a:lnSpc>
+              <a:spcAft>
+                <a:spcPts val="200"/>
+              </a:spcAft>
+            </a:pPr>
+            <a:r>
+              <a:rPr sz="950" b="0">
+                <a:solidFill>
+                  <a:srgbClr val="2D2D2D"/>
+                </a:solidFill>
+                <a:latin typeface="Calibri"/>
+              </a:rPr>
+              <a:t>Short-cycle controls that remain inside Tier 1 boundaries</a:t>
+            </a:r>
           </a:p>
         </p:txBody>
       </p:sp>
@@ -7367,16 +7939,28 @@
           <a:ln/>
         </p:spPr>
         <p:txBody>
-          <a:bodyPr wrap="square" lIns="0" tIns="0" rIns="0" bIns="0" rtlCol="0" anchor="t"/>
-          <a:lstStyle/>
-          <a:p>
-            <a:pPr indent="0" marL="0">
-              <a:buNone/>
-            </a:pPr>
-            <a:r>
-              <a:t>Ensures that tested parameter adjustments cannot trigger an economic collapse under baseline conditions.</a:t>
-            </a:r>
-            <a:endParaRPr lang="en-US" sz="1000" dirty="0"/>
+          <a:bodyPr wrap="square" lIns="0" tIns="0" rIns="0" bIns="0" rtlCol="0" anchor="ctr">
+            <a:noAutofit/>
+          </a:bodyPr>
+          <a:lstStyle/>
+          <a:p>
+            <a:pPr algn="l">
+              <a:lnSpc>
+                <a:spcPct val="90000"/>
+              </a:lnSpc>
+              <a:spcAft>
+                <a:spcPts val="200"/>
+              </a:spcAft>
+            </a:pPr>
+            <a:r>
+              <a:rPr sz="950" b="0">
+                <a:solidFill>
+                  <a:srgbClr val="888888"/>
+                </a:solidFill>
+                <a:latin typeface="Calibri"/>
+              </a:rPr>
+              <a:t>Routine tuning without altering foundational rules</a:t>
+            </a:r>
           </a:p>
         </p:txBody>
       </p:sp>
